--- a/Rosys_Wizards_465_Presentation.pptx
+++ b/Rosys_Wizards_465_Presentation.pptx
@@ -11,17 +11,17 @@
     <p:sldId id="260" r:id="rId5"/>
     <p:sldId id="272" r:id="rId6"/>
     <p:sldId id="271" r:id="rId7"/>
-    <p:sldId id="273" r:id="rId8"/>
+    <p:sldId id="286" r:id="rId8"/>
     <p:sldId id="275" r:id="rId9"/>
     <p:sldId id="262" r:id="rId10"/>
     <p:sldId id="263" r:id="rId11"/>
     <p:sldId id="265" r:id="rId12"/>
     <p:sldId id="266" r:id="rId13"/>
     <p:sldId id="277" r:id="rId14"/>
-    <p:sldId id="278" r:id="rId15"/>
-    <p:sldId id="279" r:id="rId16"/>
+    <p:sldId id="279" r:id="rId15"/>
+    <p:sldId id="283" r:id="rId16"/>
     <p:sldId id="281" r:id="rId17"/>
-    <p:sldId id="280" r:id="rId18"/>
+    <p:sldId id="285" r:id="rId18"/>
     <p:sldId id="282" r:id="rId19"/>
     <p:sldId id="267" r:id="rId20"/>
   </p:sldIdLst>
@@ -141,2822 +141,6 @@
 </p:presentation>
 </file>
 
-<file path=ppt/diagrams/colors1.xml><?xml version="1.0" encoding="utf-8"?>
-<dgm:colorsDef xmlns:dgm="http://schemas.openxmlformats.org/drawingml/2006/diagram" xmlns:a="http://schemas.openxmlformats.org/drawingml/2006/main" uniqueId="urn:microsoft.com/office/officeart/2005/8/colors/accent5_2">
-  <dgm:title val=""/>
-  <dgm:desc val=""/>
-  <dgm:catLst>
-    <dgm:cat type="accent5" pri="11200"/>
-  </dgm:catLst>
-  <dgm:styleLbl name="node0">
-    <dgm:fillClrLst meth="repeat">
-      <a:schemeClr val="accent5"/>
-    </dgm:fillClrLst>
-    <dgm:linClrLst meth="repeat">
-      <a:schemeClr val="lt1"/>
-    </dgm:linClrLst>
-    <dgm:effectClrLst/>
-    <dgm:txLinClrLst/>
-    <dgm:txFillClrLst/>
-    <dgm:txEffectClrLst/>
-  </dgm:styleLbl>
-  <dgm:styleLbl name="node1">
-    <dgm:fillClrLst meth="repeat">
-      <a:schemeClr val="accent5"/>
-    </dgm:fillClrLst>
-    <dgm:linClrLst meth="repeat">
-      <a:schemeClr val="lt1"/>
-    </dgm:linClrLst>
-    <dgm:effectClrLst/>
-    <dgm:txLinClrLst/>
-    <dgm:txFillClrLst/>
-    <dgm:txEffectClrLst/>
-  </dgm:styleLbl>
-  <dgm:styleLbl name="alignNode1">
-    <dgm:fillClrLst meth="repeat">
-      <a:schemeClr val="accent5"/>
-    </dgm:fillClrLst>
-    <dgm:linClrLst meth="repeat">
-      <a:schemeClr val="accent5"/>
-    </dgm:linClrLst>
-    <dgm:effectClrLst/>
-    <dgm:txLinClrLst/>
-    <dgm:txFillClrLst/>
-    <dgm:txEffectClrLst/>
-  </dgm:styleLbl>
-  <dgm:styleLbl name="lnNode1">
-    <dgm:fillClrLst meth="repeat">
-      <a:schemeClr val="accent5"/>
-    </dgm:fillClrLst>
-    <dgm:linClrLst meth="repeat">
-      <a:schemeClr val="lt1"/>
-    </dgm:linClrLst>
-    <dgm:effectClrLst/>
-    <dgm:txLinClrLst/>
-    <dgm:txFillClrLst/>
-    <dgm:txEffectClrLst/>
-  </dgm:styleLbl>
-  <dgm:styleLbl name="vennNode1">
-    <dgm:fillClrLst meth="repeat">
-      <a:schemeClr val="accent5">
-        <a:alpha val="50000"/>
-      </a:schemeClr>
-    </dgm:fillClrLst>
-    <dgm:linClrLst meth="repeat">
-      <a:schemeClr val="lt1"/>
-    </dgm:linClrLst>
-    <dgm:effectClrLst/>
-    <dgm:txLinClrLst/>
-    <dgm:txFillClrLst/>
-    <dgm:txEffectClrLst/>
-  </dgm:styleLbl>
-  <dgm:styleLbl name="node2">
-    <dgm:fillClrLst meth="repeat">
-      <a:schemeClr val="accent5"/>
-    </dgm:fillClrLst>
-    <dgm:linClrLst meth="repeat">
-      <a:schemeClr val="lt1"/>
-    </dgm:linClrLst>
-    <dgm:effectClrLst/>
-    <dgm:txLinClrLst/>
-    <dgm:txFillClrLst/>
-    <dgm:txEffectClrLst/>
-  </dgm:styleLbl>
-  <dgm:styleLbl name="node3">
-    <dgm:fillClrLst meth="repeat">
-      <a:schemeClr val="accent5"/>
-    </dgm:fillClrLst>
-    <dgm:linClrLst meth="repeat">
-      <a:schemeClr val="lt1"/>
-    </dgm:linClrLst>
-    <dgm:effectClrLst/>
-    <dgm:txLinClrLst/>
-    <dgm:txFillClrLst/>
-    <dgm:txEffectClrLst/>
-  </dgm:styleLbl>
-  <dgm:styleLbl name="node4">
-    <dgm:fillClrLst meth="repeat">
-      <a:schemeClr val="accent5"/>
-    </dgm:fillClrLst>
-    <dgm:linClrLst meth="repeat">
-      <a:schemeClr val="lt1"/>
-    </dgm:linClrLst>
-    <dgm:effectClrLst/>
-    <dgm:txLinClrLst/>
-    <dgm:txFillClrLst/>
-    <dgm:txEffectClrLst/>
-  </dgm:styleLbl>
-  <dgm:styleLbl name="fgImgPlace1">
-    <dgm:fillClrLst meth="repeat">
-      <a:schemeClr val="accent5">
-        <a:tint val="50000"/>
-      </a:schemeClr>
-    </dgm:fillClrLst>
-    <dgm:linClrLst meth="repeat">
-      <a:schemeClr val="lt1"/>
-    </dgm:linClrLst>
-    <dgm:effectClrLst/>
-    <dgm:txLinClrLst/>
-    <dgm:txFillClrLst meth="repeat">
-      <a:schemeClr val="lt1"/>
-    </dgm:txFillClrLst>
-    <dgm:txEffectClrLst/>
-  </dgm:styleLbl>
-  <dgm:styleLbl name="alignImgPlace1">
-    <dgm:fillClrLst meth="repeat">
-      <a:schemeClr val="accent5">
-        <a:tint val="50000"/>
-      </a:schemeClr>
-    </dgm:fillClrLst>
-    <dgm:linClrLst meth="repeat">
-      <a:schemeClr val="lt1"/>
-    </dgm:linClrLst>
-    <dgm:effectClrLst/>
-    <dgm:txLinClrLst/>
-    <dgm:txFillClrLst meth="repeat">
-      <a:schemeClr val="lt1"/>
-    </dgm:txFillClrLst>
-    <dgm:txEffectClrLst/>
-  </dgm:styleLbl>
-  <dgm:styleLbl name="bgImgPlace1">
-    <dgm:fillClrLst meth="repeat">
-      <a:schemeClr val="accent5">
-        <a:tint val="50000"/>
-      </a:schemeClr>
-    </dgm:fillClrLst>
-    <dgm:linClrLst meth="repeat">
-      <a:schemeClr val="lt1"/>
-    </dgm:linClrLst>
-    <dgm:effectClrLst/>
-    <dgm:txLinClrLst/>
-    <dgm:txFillClrLst meth="repeat">
-      <a:schemeClr val="lt1"/>
-    </dgm:txFillClrLst>
-    <dgm:txEffectClrLst/>
-  </dgm:styleLbl>
-  <dgm:styleLbl name="sibTrans2D1">
-    <dgm:fillClrLst meth="repeat">
-      <a:schemeClr val="accent5">
-        <a:tint val="60000"/>
-      </a:schemeClr>
-    </dgm:fillClrLst>
-    <dgm:linClrLst meth="repeat">
-      <a:schemeClr val="accent5">
-        <a:tint val="60000"/>
-      </a:schemeClr>
-    </dgm:linClrLst>
-    <dgm:effectClrLst/>
-    <dgm:txLinClrLst/>
-    <dgm:txFillClrLst/>
-    <dgm:txEffectClrLst/>
-  </dgm:styleLbl>
-  <dgm:styleLbl name="fgSibTrans2D1">
-    <dgm:fillClrLst meth="repeat">
-      <a:schemeClr val="accent5">
-        <a:tint val="60000"/>
-      </a:schemeClr>
-    </dgm:fillClrLst>
-    <dgm:linClrLst meth="repeat">
-      <a:schemeClr val="accent5">
-        <a:tint val="60000"/>
-      </a:schemeClr>
-    </dgm:linClrLst>
-    <dgm:effectClrLst/>
-    <dgm:txLinClrLst/>
-    <dgm:txFillClrLst/>
-    <dgm:txEffectClrLst/>
-  </dgm:styleLbl>
-  <dgm:styleLbl name="bgSibTrans2D1">
-    <dgm:fillClrLst meth="repeat">
-      <a:schemeClr val="accent5">
-        <a:tint val="60000"/>
-      </a:schemeClr>
-    </dgm:fillClrLst>
-    <dgm:linClrLst meth="repeat">
-      <a:schemeClr val="accent5">
-        <a:tint val="60000"/>
-      </a:schemeClr>
-    </dgm:linClrLst>
-    <dgm:effectClrLst/>
-    <dgm:txLinClrLst/>
-    <dgm:txFillClrLst/>
-    <dgm:txEffectClrLst/>
-  </dgm:styleLbl>
-  <dgm:styleLbl name="sibTrans1D1">
-    <dgm:fillClrLst meth="repeat">
-      <a:schemeClr val="accent5"/>
-    </dgm:fillClrLst>
-    <dgm:linClrLst meth="repeat">
-      <a:schemeClr val="accent5"/>
-    </dgm:linClrLst>
-    <dgm:effectClrLst/>
-    <dgm:txLinClrLst/>
-    <dgm:txFillClrLst meth="repeat">
-      <a:schemeClr val="tx1"/>
-    </dgm:txFillClrLst>
-    <dgm:txEffectClrLst/>
-  </dgm:styleLbl>
-  <dgm:styleLbl name="callout">
-    <dgm:fillClrLst meth="repeat">
-      <a:schemeClr val="accent5"/>
-    </dgm:fillClrLst>
-    <dgm:linClrLst meth="repeat">
-      <a:schemeClr val="accent5">
-        <a:tint val="50000"/>
-      </a:schemeClr>
-    </dgm:linClrLst>
-    <dgm:effectClrLst/>
-    <dgm:txLinClrLst/>
-    <dgm:txFillClrLst meth="repeat">
-      <a:schemeClr val="tx1"/>
-    </dgm:txFillClrLst>
-    <dgm:txEffectClrLst/>
-  </dgm:styleLbl>
-  <dgm:styleLbl name="asst0">
-    <dgm:fillClrLst meth="repeat">
-      <a:schemeClr val="accent5"/>
-    </dgm:fillClrLst>
-    <dgm:linClrLst meth="repeat">
-      <a:schemeClr val="lt1"/>
-    </dgm:linClrLst>
-    <dgm:effectClrLst/>
-    <dgm:txLinClrLst/>
-    <dgm:txFillClrLst/>
-    <dgm:txEffectClrLst/>
-  </dgm:styleLbl>
-  <dgm:styleLbl name="asst1">
-    <dgm:fillClrLst meth="repeat">
-      <a:schemeClr val="accent5"/>
-    </dgm:fillClrLst>
-    <dgm:linClrLst meth="repeat">
-      <a:schemeClr val="lt1"/>
-    </dgm:linClrLst>
-    <dgm:effectClrLst/>
-    <dgm:txLinClrLst/>
-    <dgm:txFillClrLst/>
-    <dgm:txEffectClrLst/>
-  </dgm:styleLbl>
-  <dgm:styleLbl name="asst2">
-    <dgm:fillClrLst meth="repeat">
-      <a:schemeClr val="accent5"/>
-    </dgm:fillClrLst>
-    <dgm:linClrLst meth="repeat">
-      <a:schemeClr val="lt1"/>
-    </dgm:linClrLst>
-    <dgm:effectClrLst/>
-    <dgm:txLinClrLst/>
-    <dgm:txFillClrLst/>
-    <dgm:txEffectClrLst/>
-  </dgm:styleLbl>
-  <dgm:styleLbl name="asst3">
-    <dgm:fillClrLst meth="repeat">
-      <a:schemeClr val="accent5"/>
-    </dgm:fillClrLst>
-    <dgm:linClrLst meth="repeat">
-      <a:schemeClr val="lt1"/>
-    </dgm:linClrLst>
-    <dgm:effectClrLst/>
-    <dgm:txLinClrLst/>
-    <dgm:txFillClrLst/>
-    <dgm:txEffectClrLst/>
-  </dgm:styleLbl>
-  <dgm:styleLbl name="asst4">
-    <dgm:fillClrLst meth="repeat">
-      <a:schemeClr val="accent5"/>
-    </dgm:fillClrLst>
-    <dgm:linClrLst meth="repeat">
-      <a:schemeClr val="lt1"/>
-    </dgm:linClrLst>
-    <dgm:effectClrLst/>
-    <dgm:txLinClrLst/>
-    <dgm:txFillClrLst/>
-    <dgm:txEffectClrLst/>
-  </dgm:styleLbl>
-  <dgm:styleLbl name="parChTrans2D1">
-    <dgm:fillClrLst meth="repeat">
-      <a:schemeClr val="accent5">
-        <a:tint val="60000"/>
-      </a:schemeClr>
-    </dgm:fillClrLst>
-    <dgm:linClrLst meth="repeat">
-      <a:schemeClr val="accent5">
-        <a:tint val="60000"/>
-      </a:schemeClr>
-    </dgm:linClrLst>
-    <dgm:effectClrLst/>
-    <dgm:txLinClrLst/>
-    <dgm:txFillClrLst meth="repeat">
-      <a:schemeClr val="lt1"/>
-    </dgm:txFillClrLst>
-    <dgm:txEffectClrLst/>
-  </dgm:styleLbl>
-  <dgm:styleLbl name="parChTrans2D2">
-    <dgm:fillClrLst meth="repeat">
-      <a:schemeClr val="accent5"/>
-    </dgm:fillClrLst>
-    <dgm:linClrLst meth="repeat">
-      <a:schemeClr val="accent5"/>
-    </dgm:linClrLst>
-    <dgm:effectClrLst/>
-    <dgm:txLinClrLst/>
-    <dgm:txFillClrLst meth="repeat">
-      <a:schemeClr val="lt1"/>
-    </dgm:txFillClrLst>
-    <dgm:txEffectClrLst/>
-  </dgm:styleLbl>
-  <dgm:styleLbl name="parChTrans2D3">
-    <dgm:fillClrLst meth="repeat">
-      <a:schemeClr val="accent5"/>
-    </dgm:fillClrLst>
-    <dgm:linClrLst meth="repeat">
-      <a:schemeClr val="accent5"/>
-    </dgm:linClrLst>
-    <dgm:effectClrLst/>
-    <dgm:txLinClrLst/>
-    <dgm:txFillClrLst meth="repeat">
-      <a:schemeClr val="lt1"/>
-    </dgm:txFillClrLst>
-    <dgm:txEffectClrLst/>
-  </dgm:styleLbl>
-  <dgm:styleLbl name="parChTrans2D4">
-    <dgm:fillClrLst meth="repeat">
-      <a:schemeClr val="accent5"/>
-    </dgm:fillClrLst>
-    <dgm:linClrLst meth="repeat">
-      <a:schemeClr val="accent5"/>
-    </dgm:linClrLst>
-    <dgm:effectClrLst/>
-    <dgm:txLinClrLst/>
-    <dgm:txFillClrLst meth="repeat">
-      <a:schemeClr val="lt1"/>
-    </dgm:txFillClrLst>
-    <dgm:txEffectClrLst/>
-  </dgm:styleLbl>
-  <dgm:styleLbl name="parChTrans1D1">
-    <dgm:fillClrLst meth="repeat">
-      <a:schemeClr val="accent5"/>
-    </dgm:fillClrLst>
-    <dgm:linClrLst meth="repeat">
-      <a:schemeClr val="accent5">
-        <a:shade val="60000"/>
-      </a:schemeClr>
-    </dgm:linClrLst>
-    <dgm:effectClrLst/>
-    <dgm:txLinClrLst/>
-    <dgm:txFillClrLst meth="repeat">
-      <a:schemeClr val="tx1"/>
-    </dgm:txFillClrLst>
-    <dgm:txEffectClrLst/>
-  </dgm:styleLbl>
-  <dgm:styleLbl name="parChTrans1D2">
-    <dgm:fillClrLst meth="repeat">
-      <a:schemeClr val="accent5"/>
-    </dgm:fillClrLst>
-    <dgm:linClrLst meth="repeat">
-      <a:schemeClr val="accent5">
-        <a:shade val="60000"/>
-      </a:schemeClr>
-    </dgm:linClrLst>
-    <dgm:effectClrLst/>
-    <dgm:txLinClrLst/>
-    <dgm:txFillClrLst meth="repeat">
-      <a:schemeClr val="tx1"/>
-    </dgm:txFillClrLst>
-    <dgm:txEffectClrLst/>
-  </dgm:styleLbl>
-  <dgm:styleLbl name="parChTrans1D3">
-    <dgm:fillClrLst meth="repeat">
-      <a:schemeClr val="accent5"/>
-    </dgm:fillClrLst>
-    <dgm:linClrLst meth="repeat">
-      <a:schemeClr val="accent5">
-        <a:shade val="80000"/>
-      </a:schemeClr>
-    </dgm:linClrLst>
-    <dgm:effectClrLst/>
-    <dgm:txLinClrLst/>
-    <dgm:txFillClrLst meth="repeat">
-      <a:schemeClr val="tx1"/>
-    </dgm:txFillClrLst>
-    <dgm:txEffectClrLst/>
-  </dgm:styleLbl>
-  <dgm:styleLbl name="parChTrans1D4">
-    <dgm:fillClrLst meth="repeat">
-      <a:schemeClr val="accent5"/>
-    </dgm:fillClrLst>
-    <dgm:linClrLst meth="repeat">
-      <a:schemeClr val="accent5">
-        <a:shade val="80000"/>
-      </a:schemeClr>
-    </dgm:linClrLst>
-    <dgm:effectClrLst/>
-    <dgm:txLinClrLst/>
-    <dgm:txFillClrLst meth="repeat">
-      <a:schemeClr val="tx1"/>
-    </dgm:txFillClrLst>
-    <dgm:txEffectClrLst/>
-  </dgm:styleLbl>
-  <dgm:styleLbl name="fgAcc1">
-    <dgm:fillClrLst meth="repeat">
-      <a:schemeClr val="lt1">
-        <a:alpha val="90000"/>
-      </a:schemeClr>
-    </dgm:fillClrLst>
-    <dgm:linClrLst meth="repeat">
-      <a:schemeClr val="accent5"/>
-    </dgm:linClrLst>
-    <dgm:effectClrLst/>
-    <dgm:txLinClrLst/>
-    <dgm:txFillClrLst meth="repeat">
-      <a:schemeClr val="dk1"/>
-    </dgm:txFillClrLst>
-    <dgm:txEffectClrLst/>
-  </dgm:styleLbl>
-  <dgm:styleLbl name="conFgAcc1">
-    <dgm:fillClrLst meth="repeat">
-      <a:schemeClr val="lt1">
-        <a:alpha val="90000"/>
-      </a:schemeClr>
-    </dgm:fillClrLst>
-    <dgm:linClrLst meth="repeat">
-      <a:schemeClr val="accent5"/>
-    </dgm:linClrLst>
-    <dgm:effectClrLst/>
-    <dgm:txLinClrLst/>
-    <dgm:txFillClrLst meth="repeat">
-      <a:schemeClr val="dk1"/>
-    </dgm:txFillClrLst>
-    <dgm:txEffectClrLst/>
-  </dgm:styleLbl>
-  <dgm:styleLbl name="alignAcc1">
-    <dgm:fillClrLst meth="repeat">
-      <a:schemeClr val="lt1">
-        <a:alpha val="90000"/>
-      </a:schemeClr>
-    </dgm:fillClrLst>
-    <dgm:linClrLst meth="repeat">
-      <a:schemeClr val="accent5"/>
-    </dgm:linClrLst>
-    <dgm:effectClrLst/>
-    <dgm:txLinClrLst/>
-    <dgm:txFillClrLst meth="repeat">
-      <a:schemeClr val="dk1"/>
-    </dgm:txFillClrLst>
-    <dgm:txEffectClrLst/>
-  </dgm:styleLbl>
-  <dgm:styleLbl name="trAlignAcc1">
-    <dgm:fillClrLst meth="repeat">
-      <a:schemeClr val="lt1">
-        <a:alpha val="40000"/>
-      </a:schemeClr>
-    </dgm:fillClrLst>
-    <dgm:linClrLst meth="repeat">
-      <a:schemeClr val="accent5"/>
-    </dgm:linClrLst>
-    <dgm:effectClrLst/>
-    <dgm:txLinClrLst/>
-    <dgm:txFillClrLst meth="repeat">
-      <a:schemeClr val="dk1"/>
-    </dgm:txFillClrLst>
-    <dgm:txEffectClrLst/>
-  </dgm:styleLbl>
-  <dgm:styleLbl name="bgAcc1">
-    <dgm:fillClrLst meth="repeat">
-      <a:schemeClr val="lt1">
-        <a:alpha val="90000"/>
-      </a:schemeClr>
-    </dgm:fillClrLst>
-    <dgm:linClrLst meth="repeat">
-      <a:schemeClr val="accent5"/>
-    </dgm:linClrLst>
-    <dgm:effectClrLst/>
-    <dgm:txLinClrLst/>
-    <dgm:txFillClrLst meth="repeat">
-      <a:schemeClr val="dk1"/>
-    </dgm:txFillClrLst>
-    <dgm:txEffectClrLst/>
-  </dgm:styleLbl>
-  <dgm:styleLbl name="solidFgAcc1">
-    <dgm:fillClrLst meth="repeat">
-      <a:schemeClr val="lt1"/>
-    </dgm:fillClrLst>
-    <dgm:linClrLst meth="repeat">
-      <a:schemeClr val="accent5"/>
-    </dgm:linClrLst>
-    <dgm:effectClrLst/>
-    <dgm:txLinClrLst/>
-    <dgm:txFillClrLst meth="repeat">
-      <a:schemeClr val="dk1"/>
-    </dgm:txFillClrLst>
-    <dgm:txEffectClrLst/>
-  </dgm:styleLbl>
-  <dgm:styleLbl name="solidAlignAcc1">
-    <dgm:fillClrLst meth="repeat">
-      <a:schemeClr val="lt1"/>
-    </dgm:fillClrLst>
-    <dgm:linClrLst meth="repeat">
-      <a:schemeClr val="accent5"/>
-    </dgm:linClrLst>
-    <dgm:effectClrLst/>
-    <dgm:txLinClrLst/>
-    <dgm:txFillClrLst meth="repeat">
-      <a:schemeClr val="dk1"/>
-    </dgm:txFillClrLst>
-    <dgm:txEffectClrLst/>
-  </dgm:styleLbl>
-  <dgm:styleLbl name="solidBgAcc1">
-    <dgm:fillClrLst meth="repeat">
-      <a:schemeClr val="lt1"/>
-    </dgm:fillClrLst>
-    <dgm:linClrLst meth="repeat">
-      <a:schemeClr val="accent5"/>
-    </dgm:linClrLst>
-    <dgm:effectClrLst/>
-    <dgm:txLinClrLst/>
-    <dgm:txFillClrLst meth="repeat">
-      <a:schemeClr val="dk1"/>
-    </dgm:txFillClrLst>
-    <dgm:txEffectClrLst/>
-  </dgm:styleLbl>
-  <dgm:styleLbl name="fgAccFollowNode1">
-    <dgm:fillClrLst meth="repeat">
-      <a:schemeClr val="accent5">
-        <a:alpha val="90000"/>
-        <a:tint val="40000"/>
-      </a:schemeClr>
-    </dgm:fillClrLst>
-    <dgm:linClrLst meth="repeat">
-      <a:schemeClr val="accent5">
-        <a:alpha val="90000"/>
-        <a:tint val="40000"/>
-      </a:schemeClr>
-    </dgm:linClrLst>
-    <dgm:effectClrLst/>
-    <dgm:txLinClrLst/>
-    <dgm:txFillClrLst meth="repeat">
-      <a:schemeClr val="dk1"/>
-    </dgm:txFillClrLst>
-    <dgm:txEffectClrLst/>
-  </dgm:styleLbl>
-  <dgm:styleLbl name="alignAccFollowNode1">
-    <dgm:fillClrLst meth="repeat">
-      <a:schemeClr val="accent5">
-        <a:alpha val="90000"/>
-        <a:tint val="40000"/>
-      </a:schemeClr>
-    </dgm:fillClrLst>
-    <dgm:linClrLst meth="repeat">
-      <a:schemeClr val="accent5">
-        <a:alpha val="90000"/>
-        <a:tint val="40000"/>
-      </a:schemeClr>
-    </dgm:linClrLst>
-    <dgm:effectClrLst/>
-    <dgm:txLinClrLst/>
-    <dgm:txFillClrLst meth="repeat">
-      <a:schemeClr val="dk1"/>
-    </dgm:txFillClrLst>
-    <dgm:txEffectClrLst/>
-  </dgm:styleLbl>
-  <dgm:styleLbl name="bgAccFollowNode1">
-    <dgm:fillClrLst meth="repeat">
-      <a:schemeClr val="accent5">
-        <a:alpha val="90000"/>
-        <a:tint val="40000"/>
-      </a:schemeClr>
-    </dgm:fillClrLst>
-    <dgm:linClrLst meth="repeat">
-      <a:schemeClr val="accent5">
-        <a:alpha val="90000"/>
-        <a:tint val="40000"/>
-      </a:schemeClr>
-    </dgm:linClrLst>
-    <dgm:effectClrLst/>
-    <dgm:txLinClrLst/>
-    <dgm:txFillClrLst meth="repeat">
-      <a:schemeClr val="dk1"/>
-    </dgm:txFillClrLst>
-    <dgm:txEffectClrLst/>
-  </dgm:styleLbl>
-  <dgm:styleLbl name="fgAcc0">
-    <dgm:fillClrLst meth="repeat">
-      <a:schemeClr val="lt1">
-        <a:alpha val="90000"/>
-      </a:schemeClr>
-    </dgm:fillClrLst>
-    <dgm:linClrLst meth="repeat">
-      <a:schemeClr val="accent5"/>
-    </dgm:linClrLst>
-    <dgm:effectClrLst/>
-    <dgm:txLinClrLst/>
-    <dgm:txFillClrLst meth="repeat">
-      <a:schemeClr val="dk1"/>
-    </dgm:txFillClrLst>
-    <dgm:txEffectClrLst/>
-  </dgm:styleLbl>
-  <dgm:styleLbl name="fgAcc2">
-    <dgm:fillClrLst meth="repeat">
-      <a:schemeClr val="lt1">
-        <a:alpha val="90000"/>
-      </a:schemeClr>
-    </dgm:fillClrLst>
-    <dgm:linClrLst meth="repeat">
-      <a:schemeClr val="accent5"/>
-    </dgm:linClrLst>
-    <dgm:effectClrLst/>
-    <dgm:txLinClrLst/>
-    <dgm:txFillClrLst meth="repeat">
-      <a:schemeClr val="dk1"/>
-    </dgm:txFillClrLst>
-    <dgm:txEffectClrLst/>
-  </dgm:styleLbl>
-  <dgm:styleLbl name="fgAcc3">
-    <dgm:fillClrLst meth="repeat">
-      <a:schemeClr val="lt1">
-        <a:alpha val="90000"/>
-      </a:schemeClr>
-    </dgm:fillClrLst>
-    <dgm:linClrLst meth="repeat">
-      <a:schemeClr val="accent5"/>
-    </dgm:linClrLst>
-    <dgm:effectClrLst/>
-    <dgm:txLinClrLst/>
-    <dgm:txFillClrLst meth="repeat">
-      <a:schemeClr val="dk1"/>
-    </dgm:txFillClrLst>
-    <dgm:txEffectClrLst/>
-  </dgm:styleLbl>
-  <dgm:styleLbl name="fgAcc4">
-    <dgm:fillClrLst meth="repeat">
-      <a:schemeClr val="lt1">
-        <a:alpha val="90000"/>
-      </a:schemeClr>
-    </dgm:fillClrLst>
-    <dgm:linClrLst meth="repeat">
-      <a:schemeClr val="accent5"/>
-    </dgm:linClrLst>
-    <dgm:effectClrLst/>
-    <dgm:txLinClrLst/>
-    <dgm:txFillClrLst meth="repeat">
-      <a:schemeClr val="dk1"/>
-    </dgm:txFillClrLst>
-    <dgm:txEffectClrLst/>
-  </dgm:styleLbl>
-  <dgm:styleLbl name="bgShp">
-    <dgm:fillClrLst meth="repeat">
-      <a:schemeClr val="accent5">
-        <a:tint val="40000"/>
-      </a:schemeClr>
-    </dgm:fillClrLst>
-    <dgm:linClrLst meth="repeat">
-      <a:schemeClr val="accent5"/>
-    </dgm:linClrLst>
-    <dgm:effectClrLst/>
-    <dgm:txLinClrLst/>
-    <dgm:txFillClrLst meth="repeat">
-      <a:schemeClr val="dk1"/>
-    </dgm:txFillClrLst>
-    <dgm:txEffectClrLst/>
-  </dgm:styleLbl>
-  <dgm:styleLbl name="dkBgShp">
-    <dgm:fillClrLst meth="repeat">
-      <a:schemeClr val="accent5">
-        <a:shade val="80000"/>
-      </a:schemeClr>
-    </dgm:fillClrLst>
-    <dgm:linClrLst meth="repeat">
-      <a:schemeClr val="accent5"/>
-    </dgm:linClrLst>
-    <dgm:effectClrLst/>
-    <dgm:txLinClrLst/>
-    <dgm:txFillClrLst meth="repeat">
-      <a:schemeClr val="lt1"/>
-    </dgm:txFillClrLst>
-    <dgm:txEffectClrLst/>
-  </dgm:styleLbl>
-  <dgm:styleLbl name="trBgShp">
-    <dgm:fillClrLst meth="repeat">
-      <a:schemeClr val="accent5">
-        <a:tint val="50000"/>
-        <a:alpha val="40000"/>
-      </a:schemeClr>
-    </dgm:fillClrLst>
-    <dgm:linClrLst meth="repeat">
-      <a:schemeClr val="accent5"/>
-    </dgm:linClrLst>
-    <dgm:effectClrLst/>
-    <dgm:txLinClrLst/>
-    <dgm:txFillClrLst meth="repeat">
-      <a:schemeClr val="lt1"/>
-    </dgm:txFillClrLst>
-    <dgm:txEffectClrLst/>
-  </dgm:styleLbl>
-  <dgm:styleLbl name="fgShp">
-    <dgm:fillClrLst meth="repeat">
-      <a:schemeClr val="accent5">
-        <a:tint val="60000"/>
-      </a:schemeClr>
-    </dgm:fillClrLst>
-    <dgm:linClrLst meth="repeat">
-      <a:schemeClr val="lt1"/>
-    </dgm:linClrLst>
-    <dgm:effectClrLst/>
-    <dgm:txLinClrLst/>
-    <dgm:txFillClrLst meth="repeat">
-      <a:schemeClr val="dk1"/>
-    </dgm:txFillClrLst>
-    <dgm:txEffectClrLst/>
-  </dgm:styleLbl>
-  <dgm:styleLbl name="revTx">
-    <dgm:fillClrLst meth="repeat">
-      <a:schemeClr val="lt1">
-        <a:alpha val="0"/>
-      </a:schemeClr>
-    </dgm:fillClrLst>
-    <dgm:linClrLst meth="repeat">
-      <a:schemeClr val="dk1">
-        <a:alpha val="0"/>
-      </a:schemeClr>
-    </dgm:linClrLst>
-    <dgm:effectClrLst/>
-    <dgm:txLinClrLst/>
-    <dgm:txFillClrLst meth="repeat">
-      <a:schemeClr val="tx1"/>
-    </dgm:txFillClrLst>
-    <dgm:txEffectClrLst/>
-  </dgm:styleLbl>
-</dgm:colorsDef>
-</file>
-
-<file path=ppt/diagrams/data1.xml><?xml version="1.0" encoding="utf-8"?>
-<dgm:dataModel xmlns:dgm="http://schemas.openxmlformats.org/drawingml/2006/diagram" xmlns:a="http://schemas.openxmlformats.org/drawingml/2006/main">
-  <dgm:ptLst>
-    <dgm:pt modelId="{BDE1FF9D-821E-46A5-8C79-32052AAC7460}" type="doc">
-      <dgm:prSet loTypeId="urn:microsoft.com/office/officeart/2008/layout/LinedList" loCatId="list" qsTypeId="urn:microsoft.com/office/officeart/2005/8/quickstyle/simple2" qsCatId="simple" csTypeId="urn:microsoft.com/office/officeart/2005/8/colors/accent5_2" csCatId="accent5" phldr="1"/>
-      <dgm:spPr/>
-      <dgm:t>
-        <a:bodyPr/>
-        <a:lstStyle/>
-        <a:p>
-          <a:endParaRPr lang="en-US"/>
-        </a:p>
-      </dgm:t>
-    </dgm:pt>
-    <dgm:pt modelId="{81704FD1-E6BC-42CA-A051-56A40D390059}">
-      <dgm:prSet/>
-      <dgm:spPr/>
-      <dgm:t>
-        <a:bodyPr/>
-        <a:lstStyle/>
-        <a:p>
-          <a:r>
-            <a:rPr lang="en-US"/>
-            <a:t>Tutorial Input Average </a:t>
-          </a:r>
-        </a:p>
-      </dgm:t>
-    </dgm:pt>
-    <dgm:pt modelId="{EF31D4E9-3157-4976-BAAE-08EE5BB027E5}" type="parTrans" cxnId="{6A98776B-6FA5-4962-B96A-F43901264244}">
-      <dgm:prSet/>
-      <dgm:spPr/>
-      <dgm:t>
-        <a:bodyPr/>
-        <a:lstStyle/>
-        <a:p>
-          <a:endParaRPr lang="en-US"/>
-        </a:p>
-      </dgm:t>
-    </dgm:pt>
-    <dgm:pt modelId="{9C8843A6-1BEB-46BB-AC46-73B3DB815C12}" type="sibTrans" cxnId="{6A98776B-6FA5-4962-B96A-F43901264244}">
-      <dgm:prSet/>
-      <dgm:spPr/>
-      <dgm:t>
-        <a:bodyPr/>
-        <a:lstStyle/>
-        <a:p>
-          <a:endParaRPr lang="en-US"/>
-        </a:p>
-      </dgm:t>
-    </dgm:pt>
-    <dgm:pt modelId="{3F01806D-0769-426E-A2FD-4239C14BC126}">
-      <dgm:prSet/>
-      <dgm:spPr/>
-      <dgm:t>
-        <a:bodyPr/>
-        <a:lstStyle/>
-        <a:p>
-          <a:r>
-            <a:rPr lang="en-US"/>
-            <a:t>Glyph Lesson Input Average </a:t>
-          </a:r>
-        </a:p>
-      </dgm:t>
-    </dgm:pt>
-    <dgm:pt modelId="{6A06CF36-8181-424B-8D36-0D89CFB587DC}" type="parTrans" cxnId="{714EE402-02A7-4731-B5F1-39AB3128642E}">
-      <dgm:prSet/>
-      <dgm:spPr/>
-      <dgm:t>
-        <a:bodyPr/>
-        <a:lstStyle/>
-        <a:p>
-          <a:endParaRPr lang="en-US"/>
-        </a:p>
-      </dgm:t>
-    </dgm:pt>
-    <dgm:pt modelId="{04352368-FFEF-4BDF-901F-D0002A279135}" type="sibTrans" cxnId="{714EE402-02A7-4731-B5F1-39AB3128642E}">
-      <dgm:prSet/>
-      <dgm:spPr/>
-      <dgm:t>
-        <a:bodyPr/>
-        <a:lstStyle/>
-        <a:p>
-          <a:endParaRPr lang="en-US"/>
-        </a:p>
-      </dgm:t>
-    </dgm:pt>
-    <dgm:pt modelId="{44C58865-330E-498C-811D-829D322298FC}">
-      <dgm:prSet/>
-      <dgm:spPr/>
-      <dgm:t>
-        <a:bodyPr/>
-        <a:lstStyle/>
-        <a:p>
-          <a:r>
-            <a:rPr lang="en-US"/>
-            <a:t>Spell lesson input average  </a:t>
-          </a:r>
-        </a:p>
-      </dgm:t>
-    </dgm:pt>
-    <dgm:pt modelId="{CEF629E5-08CB-4CC1-98BB-65242C91BC61}" type="parTrans" cxnId="{F294A42F-7D91-47EE-9EB2-1A3EBF9465B6}">
-      <dgm:prSet/>
-      <dgm:spPr/>
-      <dgm:t>
-        <a:bodyPr/>
-        <a:lstStyle/>
-        <a:p>
-          <a:endParaRPr lang="en-US"/>
-        </a:p>
-      </dgm:t>
-    </dgm:pt>
-    <dgm:pt modelId="{05A1ADDB-A123-4A97-95FE-61F7FD196252}" type="sibTrans" cxnId="{F294A42F-7D91-47EE-9EB2-1A3EBF9465B6}">
-      <dgm:prSet/>
-      <dgm:spPr/>
-      <dgm:t>
-        <a:bodyPr/>
-        <a:lstStyle/>
-        <a:p>
-          <a:endParaRPr lang="en-US"/>
-        </a:p>
-      </dgm:t>
-    </dgm:pt>
-    <dgm:pt modelId="{E7365CBA-6A80-49FE-90DF-41E4A62B1F93}" type="pres">
-      <dgm:prSet presAssocID="{BDE1FF9D-821E-46A5-8C79-32052AAC7460}" presName="vert0" presStyleCnt="0">
-        <dgm:presLayoutVars>
-          <dgm:dir/>
-          <dgm:animOne val="branch"/>
-          <dgm:animLvl val="lvl"/>
-        </dgm:presLayoutVars>
-      </dgm:prSet>
-      <dgm:spPr/>
-    </dgm:pt>
-    <dgm:pt modelId="{F05FCD15-4855-46B0-B046-56BD266C6BB5}" type="pres">
-      <dgm:prSet presAssocID="{81704FD1-E6BC-42CA-A051-56A40D390059}" presName="thickLine" presStyleLbl="alignNode1" presStyleIdx="0" presStyleCnt="3"/>
-      <dgm:spPr/>
-    </dgm:pt>
-    <dgm:pt modelId="{AA6E773F-8503-4832-B869-ED5F1BE772E6}" type="pres">
-      <dgm:prSet presAssocID="{81704FD1-E6BC-42CA-A051-56A40D390059}" presName="horz1" presStyleCnt="0"/>
-      <dgm:spPr/>
-    </dgm:pt>
-    <dgm:pt modelId="{877200C7-02BF-48DF-BE7E-413882B3BE5A}" type="pres">
-      <dgm:prSet presAssocID="{81704FD1-E6BC-42CA-A051-56A40D390059}" presName="tx1" presStyleLbl="revTx" presStyleIdx="0" presStyleCnt="3"/>
-      <dgm:spPr/>
-    </dgm:pt>
-    <dgm:pt modelId="{43E1D62C-D8B7-4F62-A68D-9A3B24660338}" type="pres">
-      <dgm:prSet presAssocID="{81704FD1-E6BC-42CA-A051-56A40D390059}" presName="vert1" presStyleCnt="0"/>
-      <dgm:spPr/>
-    </dgm:pt>
-    <dgm:pt modelId="{F1FA2E9A-1FB4-4FAA-B619-24A519422DD8}" type="pres">
-      <dgm:prSet presAssocID="{3F01806D-0769-426E-A2FD-4239C14BC126}" presName="thickLine" presStyleLbl="alignNode1" presStyleIdx="1" presStyleCnt="3"/>
-      <dgm:spPr/>
-    </dgm:pt>
-    <dgm:pt modelId="{ED5B79EB-5B90-4691-8399-498B350B87A2}" type="pres">
-      <dgm:prSet presAssocID="{3F01806D-0769-426E-A2FD-4239C14BC126}" presName="horz1" presStyleCnt="0"/>
-      <dgm:spPr/>
-    </dgm:pt>
-    <dgm:pt modelId="{6B306B14-33C3-419F-B1D6-33E53F3282EE}" type="pres">
-      <dgm:prSet presAssocID="{3F01806D-0769-426E-A2FD-4239C14BC126}" presName="tx1" presStyleLbl="revTx" presStyleIdx="1" presStyleCnt="3"/>
-      <dgm:spPr/>
-    </dgm:pt>
-    <dgm:pt modelId="{64785000-30E7-4ABF-84AB-7EAC3268C020}" type="pres">
-      <dgm:prSet presAssocID="{3F01806D-0769-426E-A2FD-4239C14BC126}" presName="vert1" presStyleCnt="0"/>
-      <dgm:spPr/>
-    </dgm:pt>
-    <dgm:pt modelId="{4088CB44-A28C-4EC1-9734-127C98581D19}" type="pres">
-      <dgm:prSet presAssocID="{44C58865-330E-498C-811D-829D322298FC}" presName="thickLine" presStyleLbl="alignNode1" presStyleIdx="2" presStyleCnt="3"/>
-      <dgm:spPr/>
-    </dgm:pt>
-    <dgm:pt modelId="{809EC3E6-37E2-4797-BF58-6203BAD64116}" type="pres">
-      <dgm:prSet presAssocID="{44C58865-330E-498C-811D-829D322298FC}" presName="horz1" presStyleCnt="0"/>
-      <dgm:spPr/>
-    </dgm:pt>
-    <dgm:pt modelId="{57823C16-91EE-4258-9E5D-C3FCB72279D0}" type="pres">
-      <dgm:prSet presAssocID="{44C58865-330E-498C-811D-829D322298FC}" presName="tx1" presStyleLbl="revTx" presStyleIdx="2" presStyleCnt="3"/>
-      <dgm:spPr/>
-    </dgm:pt>
-    <dgm:pt modelId="{09123208-B891-4156-B4D6-2288D6A24E15}" type="pres">
-      <dgm:prSet presAssocID="{44C58865-330E-498C-811D-829D322298FC}" presName="vert1" presStyleCnt="0"/>
-      <dgm:spPr/>
-    </dgm:pt>
-  </dgm:ptLst>
-  <dgm:cxnLst>
-    <dgm:cxn modelId="{714EE402-02A7-4731-B5F1-39AB3128642E}" srcId="{BDE1FF9D-821E-46A5-8C79-32052AAC7460}" destId="{3F01806D-0769-426E-A2FD-4239C14BC126}" srcOrd="1" destOrd="0" parTransId="{6A06CF36-8181-424B-8D36-0D89CFB587DC}" sibTransId="{04352368-FFEF-4BDF-901F-D0002A279135}"/>
-    <dgm:cxn modelId="{A5761A1F-1635-4779-92F5-15A8C4E71211}" type="presOf" srcId="{44C58865-330E-498C-811D-829D322298FC}" destId="{57823C16-91EE-4258-9E5D-C3FCB72279D0}" srcOrd="0" destOrd="0" presId="urn:microsoft.com/office/officeart/2008/layout/LinedList"/>
-    <dgm:cxn modelId="{F294A42F-7D91-47EE-9EB2-1A3EBF9465B6}" srcId="{BDE1FF9D-821E-46A5-8C79-32052AAC7460}" destId="{44C58865-330E-498C-811D-829D322298FC}" srcOrd="2" destOrd="0" parTransId="{CEF629E5-08CB-4CC1-98BB-65242C91BC61}" sibTransId="{05A1ADDB-A123-4A97-95FE-61F7FD196252}"/>
-    <dgm:cxn modelId="{B6BE6D3C-540F-489E-B4BD-BF375F20D2A6}" type="presOf" srcId="{3F01806D-0769-426E-A2FD-4239C14BC126}" destId="{6B306B14-33C3-419F-B1D6-33E53F3282EE}" srcOrd="0" destOrd="0" presId="urn:microsoft.com/office/officeart/2008/layout/LinedList"/>
-    <dgm:cxn modelId="{6A98776B-6FA5-4962-B96A-F43901264244}" srcId="{BDE1FF9D-821E-46A5-8C79-32052AAC7460}" destId="{81704FD1-E6BC-42CA-A051-56A40D390059}" srcOrd="0" destOrd="0" parTransId="{EF31D4E9-3157-4976-BAAE-08EE5BB027E5}" sibTransId="{9C8843A6-1BEB-46BB-AC46-73B3DB815C12}"/>
-    <dgm:cxn modelId="{281D6393-9DE6-404B-A553-6448A37EC14A}" type="presOf" srcId="{BDE1FF9D-821E-46A5-8C79-32052AAC7460}" destId="{E7365CBA-6A80-49FE-90DF-41E4A62B1F93}" srcOrd="0" destOrd="0" presId="urn:microsoft.com/office/officeart/2008/layout/LinedList"/>
-    <dgm:cxn modelId="{3BB4199C-AFE5-43D3-B076-0C3CF55D1C5D}" type="presOf" srcId="{81704FD1-E6BC-42CA-A051-56A40D390059}" destId="{877200C7-02BF-48DF-BE7E-413882B3BE5A}" srcOrd="0" destOrd="0" presId="urn:microsoft.com/office/officeart/2008/layout/LinedList"/>
-    <dgm:cxn modelId="{85B827C5-1513-47ED-AC4C-B4BEE755C150}" type="presParOf" srcId="{E7365CBA-6A80-49FE-90DF-41E4A62B1F93}" destId="{F05FCD15-4855-46B0-B046-56BD266C6BB5}" srcOrd="0" destOrd="0" presId="urn:microsoft.com/office/officeart/2008/layout/LinedList"/>
-    <dgm:cxn modelId="{B3158DEB-DC8B-4548-9B15-5303BBA5FDE4}" type="presParOf" srcId="{E7365CBA-6A80-49FE-90DF-41E4A62B1F93}" destId="{AA6E773F-8503-4832-B869-ED5F1BE772E6}" srcOrd="1" destOrd="0" presId="urn:microsoft.com/office/officeart/2008/layout/LinedList"/>
-    <dgm:cxn modelId="{17AF0B11-A7D9-4DE5-A666-6575CED59EAF}" type="presParOf" srcId="{AA6E773F-8503-4832-B869-ED5F1BE772E6}" destId="{877200C7-02BF-48DF-BE7E-413882B3BE5A}" srcOrd="0" destOrd="0" presId="urn:microsoft.com/office/officeart/2008/layout/LinedList"/>
-    <dgm:cxn modelId="{3B56AD28-2D1B-4F3E-965D-83F9CBA4AC08}" type="presParOf" srcId="{AA6E773F-8503-4832-B869-ED5F1BE772E6}" destId="{43E1D62C-D8B7-4F62-A68D-9A3B24660338}" srcOrd="1" destOrd="0" presId="urn:microsoft.com/office/officeart/2008/layout/LinedList"/>
-    <dgm:cxn modelId="{3D63F83A-0EA2-4613-ACFF-9298F8D4DBFE}" type="presParOf" srcId="{E7365CBA-6A80-49FE-90DF-41E4A62B1F93}" destId="{F1FA2E9A-1FB4-4FAA-B619-24A519422DD8}" srcOrd="2" destOrd="0" presId="urn:microsoft.com/office/officeart/2008/layout/LinedList"/>
-    <dgm:cxn modelId="{1C1B97F9-66CC-4C71-A2DB-3F982B968367}" type="presParOf" srcId="{E7365CBA-6A80-49FE-90DF-41E4A62B1F93}" destId="{ED5B79EB-5B90-4691-8399-498B350B87A2}" srcOrd="3" destOrd="0" presId="urn:microsoft.com/office/officeart/2008/layout/LinedList"/>
-    <dgm:cxn modelId="{0B8D2C2B-C02F-43EF-9151-4025E4C8F06F}" type="presParOf" srcId="{ED5B79EB-5B90-4691-8399-498B350B87A2}" destId="{6B306B14-33C3-419F-B1D6-33E53F3282EE}" srcOrd="0" destOrd="0" presId="urn:microsoft.com/office/officeart/2008/layout/LinedList"/>
-    <dgm:cxn modelId="{17BC1E5E-574A-4F4C-A406-8F57A7A04C74}" type="presParOf" srcId="{ED5B79EB-5B90-4691-8399-498B350B87A2}" destId="{64785000-30E7-4ABF-84AB-7EAC3268C020}" srcOrd="1" destOrd="0" presId="urn:microsoft.com/office/officeart/2008/layout/LinedList"/>
-    <dgm:cxn modelId="{D006F57C-F6F8-47A1-8DBE-5F9FCD876163}" type="presParOf" srcId="{E7365CBA-6A80-49FE-90DF-41E4A62B1F93}" destId="{4088CB44-A28C-4EC1-9734-127C98581D19}" srcOrd="4" destOrd="0" presId="urn:microsoft.com/office/officeart/2008/layout/LinedList"/>
-    <dgm:cxn modelId="{8B20F40D-9FA7-4561-918A-F259034C9BB4}" type="presParOf" srcId="{E7365CBA-6A80-49FE-90DF-41E4A62B1F93}" destId="{809EC3E6-37E2-4797-BF58-6203BAD64116}" srcOrd="5" destOrd="0" presId="urn:microsoft.com/office/officeart/2008/layout/LinedList"/>
-    <dgm:cxn modelId="{1F1FE452-637D-42E8-B883-1DAC2BA9472E}" type="presParOf" srcId="{809EC3E6-37E2-4797-BF58-6203BAD64116}" destId="{57823C16-91EE-4258-9E5D-C3FCB72279D0}" srcOrd="0" destOrd="0" presId="urn:microsoft.com/office/officeart/2008/layout/LinedList"/>
-    <dgm:cxn modelId="{8D593CB1-9243-451A-9712-41CEF7692164}" type="presParOf" srcId="{809EC3E6-37E2-4797-BF58-6203BAD64116}" destId="{09123208-B891-4156-B4D6-2288D6A24E15}" srcOrd="1" destOrd="0" presId="urn:microsoft.com/office/officeart/2008/layout/LinedList"/>
-  </dgm:cxnLst>
-  <dgm:bg/>
-  <dgm:whole/>
-  <dgm:extLst>
-    <a:ext uri="http://schemas.microsoft.com/office/drawing/2008/diagram">
-      <dsp:dataModelExt xmlns:dsp="http://schemas.microsoft.com/office/drawing/2008/diagram" relId="rId7" minVer="http://schemas.openxmlformats.org/drawingml/2006/diagram"/>
-    </a:ext>
-  </dgm:extLst>
-</dgm:dataModel>
-</file>
-
-<file path=ppt/diagrams/drawing1.xml><?xml version="1.0" encoding="utf-8"?>
-<dsp:drawing xmlns:dgm="http://schemas.openxmlformats.org/drawingml/2006/diagram" xmlns:dsp="http://schemas.microsoft.com/office/drawing/2008/diagram" xmlns:a="http://schemas.openxmlformats.org/drawingml/2006/main">
-  <dsp:spTree>
-    <dsp:nvGrpSpPr>
-      <dsp:cNvPr id="0" name=""/>
-      <dsp:cNvGrpSpPr/>
-    </dsp:nvGrpSpPr>
-    <dsp:grpSpPr/>
-    <dsp:sp modelId="{F05FCD15-4855-46B0-B046-56BD266C6BB5}">
-      <dsp:nvSpPr>
-        <dsp:cNvPr id="0" name=""/>
-        <dsp:cNvSpPr/>
-      </dsp:nvSpPr>
-      <dsp:spPr>
-        <a:xfrm>
-          <a:off x="0" y="760"/>
-          <a:ext cx="4940186" cy="0"/>
-        </a:xfrm>
-        <a:prstGeom prst="line">
-          <a:avLst/>
-        </a:prstGeom>
-        <a:solidFill>
-          <a:schemeClr val="accent5">
-            <a:hueOff val="0"/>
-            <a:satOff val="0"/>
-            <a:lumOff val="0"/>
-            <a:alphaOff val="0"/>
-          </a:schemeClr>
-        </a:solidFill>
-        <a:ln w="25400" cap="flat" cmpd="sng" algn="ctr">
-          <a:solidFill>
-            <a:schemeClr val="accent5">
-              <a:hueOff val="0"/>
-              <a:satOff val="0"/>
-              <a:lumOff val="0"/>
-              <a:alphaOff val="0"/>
-            </a:schemeClr>
-          </a:solidFill>
-          <a:prstDash val="solid"/>
-        </a:ln>
-        <a:effectLst>
-          <a:outerShdw blurRad="40000" dist="20000" dir="5400000" rotWithShape="0">
-            <a:srgbClr val="000000">
-              <a:alpha val="38000"/>
-            </a:srgbClr>
-          </a:outerShdw>
-        </a:effectLst>
-      </dsp:spPr>
-      <dsp:style>
-        <a:lnRef idx="2">
-          <a:scrgbClr r="0" g="0" b="0"/>
-        </a:lnRef>
-        <a:fillRef idx="1">
-          <a:scrgbClr r="0" g="0" b="0"/>
-        </a:fillRef>
-        <a:effectRef idx="1">
-          <a:scrgbClr r="0" g="0" b="0"/>
-        </a:effectRef>
-        <a:fontRef idx="minor">
-          <a:schemeClr val="lt1"/>
-        </a:fontRef>
-      </dsp:style>
-    </dsp:sp>
-    <dsp:sp modelId="{877200C7-02BF-48DF-BE7E-413882B3BE5A}">
-      <dsp:nvSpPr>
-        <dsp:cNvPr id="0" name=""/>
-        <dsp:cNvSpPr/>
-      </dsp:nvSpPr>
-      <dsp:spPr>
-        <a:xfrm>
-          <a:off x="0" y="760"/>
-          <a:ext cx="4940186" cy="518462"/>
-        </a:xfrm>
-        <a:prstGeom prst="rect">
-          <a:avLst/>
-        </a:prstGeom>
-        <a:noFill/>
-        <a:ln>
-          <a:noFill/>
-        </a:ln>
-        <a:effectLst/>
-      </dsp:spPr>
-      <dsp:style>
-        <a:lnRef idx="0">
-          <a:scrgbClr r="0" g="0" b="0"/>
-        </a:lnRef>
-        <a:fillRef idx="0">
-          <a:scrgbClr r="0" g="0" b="0"/>
-        </a:fillRef>
-        <a:effectRef idx="0">
-          <a:scrgbClr r="0" g="0" b="0"/>
-        </a:effectRef>
-        <a:fontRef idx="minor"/>
-      </dsp:style>
-      <dsp:txBody>
-        <a:bodyPr spcFirstLastPara="0" vert="horz" wrap="square" lIns="91440" tIns="91440" rIns="91440" bIns="91440" numCol="1" spcCol="1270" anchor="t" anchorCtr="0">
-          <a:noAutofit/>
-        </a:bodyPr>
-        <a:lstStyle/>
-        <a:p>
-          <a:pPr marL="0" lvl="0" indent="0" algn="l" defTabSz="1066800">
-            <a:lnSpc>
-              <a:spcPct val="90000"/>
-            </a:lnSpc>
-            <a:spcBef>
-              <a:spcPct val="0"/>
-            </a:spcBef>
-            <a:spcAft>
-              <a:spcPct val="35000"/>
-            </a:spcAft>
-            <a:buNone/>
-          </a:pPr>
-          <a:r>
-            <a:rPr lang="en-US" sz="2400" kern="1200"/>
-            <a:t>Tutorial Input Average </a:t>
-          </a:r>
-        </a:p>
-      </dsp:txBody>
-      <dsp:txXfrm>
-        <a:off x="0" y="760"/>
-        <a:ext cx="4940186" cy="518462"/>
-      </dsp:txXfrm>
-    </dsp:sp>
-    <dsp:sp modelId="{F1FA2E9A-1FB4-4FAA-B619-24A519422DD8}">
-      <dsp:nvSpPr>
-        <dsp:cNvPr id="0" name=""/>
-        <dsp:cNvSpPr/>
-      </dsp:nvSpPr>
-      <dsp:spPr>
-        <a:xfrm>
-          <a:off x="0" y="519222"/>
-          <a:ext cx="4940186" cy="0"/>
-        </a:xfrm>
-        <a:prstGeom prst="line">
-          <a:avLst/>
-        </a:prstGeom>
-        <a:solidFill>
-          <a:schemeClr val="accent5">
-            <a:hueOff val="0"/>
-            <a:satOff val="0"/>
-            <a:lumOff val="0"/>
-            <a:alphaOff val="0"/>
-          </a:schemeClr>
-        </a:solidFill>
-        <a:ln w="25400" cap="flat" cmpd="sng" algn="ctr">
-          <a:solidFill>
-            <a:schemeClr val="accent5">
-              <a:hueOff val="0"/>
-              <a:satOff val="0"/>
-              <a:lumOff val="0"/>
-              <a:alphaOff val="0"/>
-            </a:schemeClr>
-          </a:solidFill>
-          <a:prstDash val="solid"/>
-        </a:ln>
-        <a:effectLst>
-          <a:outerShdw blurRad="40000" dist="20000" dir="5400000" rotWithShape="0">
-            <a:srgbClr val="000000">
-              <a:alpha val="38000"/>
-            </a:srgbClr>
-          </a:outerShdw>
-        </a:effectLst>
-      </dsp:spPr>
-      <dsp:style>
-        <a:lnRef idx="2">
-          <a:scrgbClr r="0" g="0" b="0"/>
-        </a:lnRef>
-        <a:fillRef idx="1">
-          <a:scrgbClr r="0" g="0" b="0"/>
-        </a:fillRef>
-        <a:effectRef idx="1">
-          <a:scrgbClr r="0" g="0" b="0"/>
-        </a:effectRef>
-        <a:fontRef idx="minor">
-          <a:schemeClr val="lt1"/>
-        </a:fontRef>
-      </dsp:style>
-    </dsp:sp>
-    <dsp:sp modelId="{6B306B14-33C3-419F-B1D6-33E53F3282EE}">
-      <dsp:nvSpPr>
-        <dsp:cNvPr id="0" name=""/>
-        <dsp:cNvSpPr/>
-      </dsp:nvSpPr>
-      <dsp:spPr>
-        <a:xfrm>
-          <a:off x="0" y="519222"/>
-          <a:ext cx="4940186" cy="518462"/>
-        </a:xfrm>
-        <a:prstGeom prst="rect">
-          <a:avLst/>
-        </a:prstGeom>
-        <a:noFill/>
-        <a:ln>
-          <a:noFill/>
-        </a:ln>
-        <a:effectLst/>
-      </dsp:spPr>
-      <dsp:style>
-        <a:lnRef idx="0">
-          <a:scrgbClr r="0" g="0" b="0"/>
-        </a:lnRef>
-        <a:fillRef idx="0">
-          <a:scrgbClr r="0" g="0" b="0"/>
-        </a:fillRef>
-        <a:effectRef idx="0">
-          <a:scrgbClr r="0" g="0" b="0"/>
-        </a:effectRef>
-        <a:fontRef idx="minor"/>
-      </dsp:style>
-      <dsp:txBody>
-        <a:bodyPr spcFirstLastPara="0" vert="horz" wrap="square" lIns="91440" tIns="91440" rIns="91440" bIns="91440" numCol="1" spcCol="1270" anchor="t" anchorCtr="0">
-          <a:noAutofit/>
-        </a:bodyPr>
-        <a:lstStyle/>
-        <a:p>
-          <a:pPr marL="0" lvl="0" indent="0" algn="l" defTabSz="1066800">
-            <a:lnSpc>
-              <a:spcPct val="90000"/>
-            </a:lnSpc>
-            <a:spcBef>
-              <a:spcPct val="0"/>
-            </a:spcBef>
-            <a:spcAft>
-              <a:spcPct val="35000"/>
-            </a:spcAft>
-            <a:buNone/>
-          </a:pPr>
-          <a:r>
-            <a:rPr lang="en-US" sz="2400" kern="1200"/>
-            <a:t>Glyph Lesson Input Average </a:t>
-          </a:r>
-        </a:p>
-      </dsp:txBody>
-      <dsp:txXfrm>
-        <a:off x="0" y="519222"/>
-        <a:ext cx="4940186" cy="518462"/>
-      </dsp:txXfrm>
-    </dsp:sp>
-    <dsp:sp modelId="{4088CB44-A28C-4EC1-9734-127C98581D19}">
-      <dsp:nvSpPr>
-        <dsp:cNvPr id="0" name=""/>
-        <dsp:cNvSpPr/>
-      </dsp:nvSpPr>
-      <dsp:spPr>
-        <a:xfrm>
-          <a:off x="0" y="1037684"/>
-          <a:ext cx="4940186" cy="0"/>
-        </a:xfrm>
-        <a:prstGeom prst="line">
-          <a:avLst/>
-        </a:prstGeom>
-        <a:solidFill>
-          <a:schemeClr val="accent5">
-            <a:hueOff val="0"/>
-            <a:satOff val="0"/>
-            <a:lumOff val="0"/>
-            <a:alphaOff val="0"/>
-          </a:schemeClr>
-        </a:solidFill>
-        <a:ln w="25400" cap="flat" cmpd="sng" algn="ctr">
-          <a:solidFill>
-            <a:schemeClr val="accent5">
-              <a:hueOff val="0"/>
-              <a:satOff val="0"/>
-              <a:lumOff val="0"/>
-              <a:alphaOff val="0"/>
-            </a:schemeClr>
-          </a:solidFill>
-          <a:prstDash val="solid"/>
-        </a:ln>
-        <a:effectLst>
-          <a:outerShdw blurRad="40000" dist="20000" dir="5400000" rotWithShape="0">
-            <a:srgbClr val="000000">
-              <a:alpha val="38000"/>
-            </a:srgbClr>
-          </a:outerShdw>
-        </a:effectLst>
-      </dsp:spPr>
-      <dsp:style>
-        <a:lnRef idx="2">
-          <a:scrgbClr r="0" g="0" b="0"/>
-        </a:lnRef>
-        <a:fillRef idx="1">
-          <a:scrgbClr r="0" g="0" b="0"/>
-        </a:fillRef>
-        <a:effectRef idx="1">
-          <a:scrgbClr r="0" g="0" b="0"/>
-        </a:effectRef>
-        <a:fontRef idx="minor">
-          <a:schemeClr val="lt1"/>
-        </a:fontRef>
-      </dsp:style>
-    </dsp:sp>
-    <dsp:sp modelId="{57823C16-91EE-4258-9E5D-C3FCB72279D0}">
-      <dsp:nvSpPr>
-        <dsp:cNvPr id="0" name=""/>
-        <dsp:cNvSpPr/>
-      </dsp:nvSpPr>
-      <dsp:spPr>
-        <a:xfrm>
-          <a:off x="0" y="1037684"/>
-          <a:ext cx="4940186" cy="518462"/>
-        </a:xfrm>
-        <a:prstGeom prst="rect">
-          <a:avLst/>
-        </a:prstGeom>
-        <a:noFill/>
-        <a:ln>
-          <a:noFill/>
-        </a:ln>
-        <a:effectLst/>
-      </dsp:spPr>
-      <dsp:style>
-        <a:lnRef idx="0">
-          <a:scrgbClr r="0" g="0" b="0"/>
-        </a:lnRef>
-        <a:fillRef idx="0">
-          <a:scrgbClr r="0" g="0" b="0"/>
-        </a:fillRef>
-        <a:effectRef idx="0">
-          <a:scrgbClr r="0" g="0" b="0"/>
-        </a:effectRef>
-        <a:fontRef idx="minor"/>
-      </dsp:style>
-      <dsp:txBody>
-        <a:bodyPr spcFirstLastPara="0" vert="horz" wrap="square" lIns="91440" tIns="91440" rIns="91440" bIns="91440" numCol="1" spcCol="1270" anchor="t" anchorCtr="0">
-          <a:noAutofit/>
-        </a:bodyPr>
-        <a:lstStyle/>
-        <a:p>
-          <a:pPr marL="0" lvl="0" indent="0" algn="l" defTabSz="1066800">
-            <a:lnSpc>
-              <a:spcPct val="90000"/>
-            </a:lnSpc>
-            <a:spcBef>
-              <a:spcPct val="0"/>
-            </a:spcBef>
-            <a:spcAft>
-              <a:spcPct val="35000"/>
-            </a:spcAft>
-            <a:buNone/>
-          </a:pPr>
-          <a:r>
-            <a:rPr lang="en-US" sz="2400" kern="1200"/>
-            <a:t>Spell lesson input average  </a:t>
-          </a:r>
-        </a:p>
-      </dsp:txBody>
-      <dsp:txXfrm>
-        <a:off x="0" y="1037684"/>
-        <a:ext cx="4940186" cy="518462"/>
-      </dsp:txXfrm>
-    </dsp:sp>
-  </dsp:spTree>
-</dsp:drawing>
-</file>
-
-<file path=ppt/diagrams/layout1.xml><?xml version="1.0" encoding="utf-8"?>
-<dgm:layoutDef xmlns:dgm="http://schemas.openxmlformats.org/drawingml/2006/diagram" xmlns:a="http://schemas.openxmlformats.org/drawingml/2006/main" uniqueId="urn:microsoft.com/office/officeart/2008/layout/LinedList">
-  <dgm:title val=""/>
-  <dgm:desc val=""/>
-  <dgm:catLst>
-    <dgm:cat type="hierarchy" pri="8000"/>
-    <dgm:cat type="list" pri="2500"/>
-  </dgm:catLst>
-  <dgm:sampData>
-    <dgm:dataModel>
-      <dgm:ptLst>
-        <dgm:pt modelId="0" type="doc"/>
-        <dgm:pt modelId="1">
-          <dgm:prSet phldr="1"/>
-        </dgm:pt>
-        <dgm:pt modelId="11">
-          <dgm:prSet phldr="1"/>
-        </dgm:pt>
-        <dgm:pt modelId="12">
-          <dgm:prSet phldr="1"/>
-        </dgm:pt>
-        <dgm:pt modelId="13">
-          <dgm:prSet phldr="1"/>
-        </dgm:pt>
-      </dgm:ptLst>
-      <dgm:cxnLst>
-        <dgm:cxn modelId="2" srcId="0" destId="1" srcOrd="0" destOrd="0"/>
-        <dgm:cxn modelId="3" srcId="1" destId="11" srcOrd="0" destOrd="0"/>
-        <dgm:cxn modelId="4" srcId="1" destId="12" srcOrd="1" destOrd="0"/>
-        <dgm:cxn modelId="5" srcId="1" destId="13" srcOrd="2" destOrd="0"/>
-      </dgm:cxnLst>
-      <dgm:bg/>
-      <dgm:whole/>
-    </dgm:dataModel>
-  </dgm:sampData>
-  <dgm:styleData>
-    <dgm:dataModel>
-      <dgm:ptLst>
-        <dgm:pt modelId="0" type="doc"/>
-        <dgm:pt modelId="1">
-          <dgm:prSet phldr="1"/>
-        </dgm:pt>
-        <dgm:pt modelId="11">
-          <dgm:prSet phldr="1"/>
-        </dgm:pt>
-        <dgm:pt modelId="12">
-          <dgm:prSet phldr="1"/>
-        </dgm:pt>
-      </dgm:ptLst>
-      <dgm:cxnLst>
-        <dgm:cxn modelId="2" srcId="0" destId="1" srcOrd="0" destOrd="0"/>
-        <dgm:cxn modelId="3" srcId="1" destId="11" srcOrd="0" destOrd="0"/>
-        <dgm:cxn modelId="4" srcId="1" destId="12" srcOrd="1" destOrd="0"/>
-      </dgm:cxnLst>
-      <dgm:bg/>
-      <dgm:whole/>
-    </dgm:dataModel>
-  </dgm:styleData>
-  <dgm:clrData>
-    <dgm:dataModel>
-      <dgm:ptLst>
-        <dgm:pt modelId="0" type="doc"/>
-        <dgm:pt modelId="1">
-          <dgm:prSet phldr="1"/>
-        </dgm:pt>
-        <dgm:pt modelId="11">
-          <dgm:prSet phldr="1"/>
-        </dgm:pt>
-        <dgm:pt modelId="12">
-          <dgm:prSet phldr="1"/>
-        </dgm:pt>
-      </dgm:ptLst>
-      <dgm:cxnLst>
-        <dgm:cxn modelId="2" srcId="0" destId="1" srcOrd="0" destOrd="0"/>
-        <dgm:cxn modelId="3" srcId="1" destId="11" srcOrd="0" destOrd="0"/>
-        <dgm:cxn modelId="4" srcId="1" destId="12" srcOrd="1" destOrd="0"/>
-      </dgm:cxnLst>
-      <dgm:bg/>
-      <dgm:whole/>
-    </dgm:dataModel>
-  </dgm:clrData>
-  <dgm:layoutNode name="vert0">
-    <dgm:varLst>
-      <dgm:dir/>
-      <dgm:animOne val="branch"/>
-      <dgm:animLvl val="lvl"/>
-    </dgm:varLst>
-    <dgm:choose name="Name0">
-      <dgm:if name="Name1" func="var" arg="dir" op="equ" val="norm">
-        <dgm:alg type="lin">
-          <dgm:param type="linDir" val="fromT"/>
-          <dgm:param type="nodeHorzAlign" val="l"/>
-        </dgm:alg>
-      </dgm:if>
-      <dgm:else name="Name2">
-        <dgm:alg type="lin">
-          <dgm:param type="linDir" val="fromT"/>
-          <dgm:param type="nodeHorzAlign" val="r"/>
-        </dgm:alg>
-      </dgm:else>
-    </dgm:choose>
-    <dgm:shape xmlns:r="http://schemas.openxmlformats.org/officeDocument/2006/relationships" r:blip="">
-      <dgm:adjLst/>
-    </dgm:shape>
-    <dgm:presOf/>
-    <dgm:constrLst>
-      <dgm:constr type="w" for="ch" forName="horz1" refType="w"/>
-      <dgm:constr type="h" for="ch" forName="horz1" refType="h"/>
-      <dgm:constr type="h" for="des" forName="vert1" refType="h"/>
-      <dgm:constr type="h" for="des" forName="tx1" refType="h"/>
-      <dgm:constr type="h" for="des" forName="horz2" refType="h"/>
-      <dgm:constr type="h" for="des" forName="vert2" refType="h"/>
-      <dgm:constr type="h" for="des" forName="horz3" refType="h"/>
-      <dgm:constr type="h" for="des" forName="vert3" refType="h"/>
-      <dgm:constr type="h" for="des" forName="horz4" refType="h"/>
-      <dgm:constr type="h" for="des" ptType="node" refType="h"/>
-      <dgm:constr type="primFontSz" for="des" forName="tx1" op="equ" val="65"/>
-      <dgm:constr type="primFontSz" for="des" forName="tx2" op="equ" val="65"/>
-      <dgm:constr type="primFontSz" for="des" forName="tx3" op="equ" val="65"/>
-      <dgm:constr type="primFontSz" for="des" forName="tx4" op="equ" val="65"/>
-      <dgm:constr type="w" for="des" forName="thickLine" refType="w"/>
-      <dgm:constr type="h" for="des" forName="thickLine"/>
-      <dgm:constr type="h" for="des" forName="thinLine1"/>
-      <dgm:constr type="h" for="des" forName="thinLine2b"/>
-      <dgm:constr type="h" for="des" forName="thinLine3"/>
-      <dgm:constr type="h" for="des" forName="vertSpace2a" refType="h" fact="0.05"/>
-      <dgm:constr type="h" for="des" forName="vertSpace2b" refType="h" refFor="des" refForName="vertSpace2a"/>
-    </dgm:constrLst>
-    <dgm:forEach name="Name3" axis="ch" ptType="node">
-      <dgm:layoutNode name="thickLine" styleLbl="alignNode1">
-        <dgm:alg type="sp"/>
-        <dgm:shape xmlns:r="http://schemas.openxmlformats.org/officeDocument/2006/relationships" type="line" r:blip="">
-          <dgm:adjLst/>
-        </dgm:shape>
-        <dgm:presOf/>
-      </dgm:layoutNode>
-      <dgm:layoutNode name="horz1">
-        <dgm:choose name="Name4">
-          <dgm:if name="Name5" func="var" arg="dir" op="equ" val="norm">
-            <dgm:alg type="lin">
-              <dgm:param type="linDir" val="fromL"/>
-              <dgm:param type="nodeVertAlign" val="t"/>
-            </dgm:alg>
-          </dgm:if>
-          <dgm:else name="Name6">
-            <dgm:alg type="lin">
-              <dgm:param type="linDir" val="fromR"/>
-              <dgm:param type="nodeVertAlign" val="t"/>
-            </dgm:alg>
-          </dgm:else>
-        </dgm:choose>
-        <dgm:shape xmlns:r="http://schemas.openxmlformats.org/officeDocument/2006/relationships" r:blip="">
-          <dgm:adjLst/>
-        </dgm:shape>
-        <dgm:presOf/>
-        <dgm:choose name="Name7">
-          <dgm:if name="Name8" axis="root des" func="maxDepth" op="equ" val="1">
-            <dgm:constrLst>
-              <dgm:constr type="w" for="ch" forName="tx1" refType="w"/>
-            </dgm:constrLst>
-          </dgm:if>
-          <dgm:if name="Name9" axis="root des" func="maxDepth" op="equ" val="2">
-            <dgm:constrLst>
-              <dgm:constr type="w" for="ch" forName="tx1" refType="w" fact="0.2"/>
-              <dgm:constr type="w" for="des" forName="tx2" refType="w" fact="0.785"/>
-              <dgm:constr type="w" for="des" forName="horzSpace2" refType="w" fact="0.015"/>
-              <dgm:constr type="w" for="des" forName="thinLine2b" refType="w" fact="0.8"/>
-            </dgm:constrLst>
-          </dgm:if>
-          <dgm:if name="Name10" axis="root des" func="maxDepth" op="equ" val="3">
-            <dgm:constrLst>
-              <dgm:constr type="w" for="ch" forName="tx1" refType="w" fact="0.2"/>
-              <dgm:constr type="w" for="des" forName="tx2" refType="w" fact="0.385"/>
-              <dgm:constr type="w" for="des" forName="tx3" refType="w" fact="0.385"/>
-              <dgm:constr type="w" for="des" forName="horzSpace2" refType="w" fact="0.015"/>
-              <dgm:constr type="w" for="des" forName="horzSpace3" refType="w" fact="0.015"/>
-              <dgm:constr type="w" for="des" forName="thinLine2b" refType="w" fact="0.8"/>
-              <dgm:constr type="w" for="des" forName="thinLine3" refType="w" fact="0.385"/>
-            </dgm:constrLst>
-          </dgm:if>
-          <dgm:if name="Name11" axis="root des" func="maxDepth" op="gte" val="4">
-            <dgm:constrLst>
-              <dgm:constr type="w" for="ch" forName="tx1" refType="w" fact="0.2"/>
-              <dgm:constr type="w" for="des" forName="tx2" refType="w" fact="0.2516"/>
-              <dgm:constr type="w" for="des" forName="tx3" refType="w" fact="0.2516"/>
-              <dgm:constr type="w" for="des" forName="tx4" refType="w" fact="0.2516"/>
-              <dgm:constr type="w" for="des" forName="horzSpace2" refType="w" fact="0.015"/>
-              <dgm:constr type="w" for="des" forName="horzSpace3" refType="w" fact="0.015"/>
-              <dgm:constr type="w" for="des" forName="horzSpace4" refType="w" fact="0.015"/>
-              <dgm:constr type="w" for="des" forName="thinLine2b" refType="w" fact="0.8"/>
-              <dgm:constr type="w" for="des" forName="thinLine3" refType="w" fact="0.5332"/>
-            </dgm:constrLst>
-          </dgm:if>
-          <dgm:else name="Name12"/>
-        </dgm:choose>
-        <dgm:layoutNode name="tx1" styleLbl="revTx">
-          <dgm:alg type="tx">
-            <dgm:param type="parTxLTRAlign" val="l"/>
-            <dgm:param type="parTxRTLAlign" val="r"/>
-            <dgm:param type="txAnchorVert" val="t"/>
-          </dgm:alg>
-          <dgm:shape xmlns:r="http://schemas.openxmlformats.org/officeDocument/2006/relationships" type="rect" r:blip="">
-            <dgm:adjLst/>
-          </dgm:shape>
-          <dgm:presOf axis="self"/>
-          <dgm:constrLst>
-            <dgm:constr type="tMarg" refType="primFontSz" fact="0.3"/>
-            <dgm:constr type="bMarg" refType="primFontSz" fact="0.3"/>
-            <dgm:constr type="lMarg" refType="primFontSz" fact="0.3"/>
-            <dgm:constr type="rMarg" refType="primFontSz" fact="0.3"/>
-          </dgm:constrLst>
-          <dgm:ruleLst>
-            <dgm:rule type="primFontSz" val="5" fact="NaN" max="NaN"/>
-          </dgm:ruleLst>
-        </dgm:layoutNode>
-        <dgm:layoutNode name="vert1">
-          <dgm:choose name="Name13">
-            <dgm:if name="Name14" func="var" arg="dir" op="equ" val="norm">
-              <dgm:alg type="lin">
-                <dgm:param type="linDir" val="fromT"/>
-                <dgm:param type="nodeHorzAlign" val="l"/>
-              </dgm:alg>
-            </dgm:if>
-            <dgm:else name="Name15">
-              <dgm:alg type="lin">
-                <dgm:param type="linDir" val="fromT"/>
-                <dgm:param type="nodeHorzAlign" val="r"/>
-              </dgm:alg>
-            </dgm:else>
-          </dgm:choose>
-          <dgm:shape xmlns:r="http://schemas.openxmlformats.org/officeDocument/2006/relationships" r:blip="">
-            <dgm:adjLst/>
-          </dgm:shape>
-          <dgm:presOf/>
-          <dgm:forEach name="Name16" axis="ch" ptType="node">
-            <dgm:choose name="Name17">
-              <dgm:if name="Name18" axis="self" ptType="node" func="pos" op="equ" val="1">
-                <dgm:layoutNode name="vertSpace2a">
-                  <dgm:alg type="sp"/>
-                  <dgm:shape xmlns:r="http://schemas.openxmlformats.org/officeDocument/2006/relationships" r:blip="">
-                    <dgm:adjLst/>
-                  </dgm:shape>
-                  <dgm:presOf/>
-                </dgm:layoutNode>
-              </dgm:if>
-              <dgm:else name="Name19"/>
-            </dgm:choose>
-            <dgm:layoutNode name="horz2">
-              <dgm:choose name="Name20">
-                <dgm:if name="Name21" func="var" arg="dir" op="equ" val="norm">
-                  <dgm:alg type="lin">
-                    <dgm:param type="linDir" val="fromL"/>
-                    <dgm:param type="nodeVertAlign" val="t"/>
-                  </dgm:alg>
-                </dgm:if>
-                <dgm:else name="Name22">
-                  <dgm:alg type="lin">
-                    <dgm:param type="linDir" val="fromR"/>
-                    <dgm:param type="nodeVertAlign" val="t"/>
-                  </dgm:alg>
-                </dgm:else>
-              </dgm:choose>
-              <dgm:shape xmlns:r="http://schemas.openxmlformats.org/officeDocument/2006/relationships" r:blip="">
-                <dgm:adjLst/>
-              </dgm:shape>
-              <dgm:presOf/>
-              <dgm:layoutNode name="horzSpace2">
-                <dgm:alg type="sp"/>
-                <dgm:shape xmlns:r="http://schemas.openxmlformats.org/officeDocument/2006/relationships" r:blip="">
-                  <dgm:adjLst/>
-                </dgm:shape>
-                <dgm:presOf/>
-              </dgm:layoutNode>
-              <dgm:layoutNode name="tx2" styleLbl="revTx">
-                <dgm:alg type="tx">
-                  <dgm:param type="parTxLTRAlign" val="l"/>
-                  <dgm:param type="parTxRTLAlign" val="r"/>
-                  <dgm:param type="txAnchorVert" val="t"/>
-                </dgm:alg>
-                <dgm:shape xmlns:r="http://schemas.openxmlformats.org/officeDocument/2006/relationships" type="rect" r:blip="">
-                  <dgm:adjLst/>
-                </dgm:shape>
-                <dgm:presOf axis="self"/>
-                <dgm:constrLst>
-                  <dgm:constr type="tMarg" refType="primFontSz" fact="0.3"/>
-                  <dgm:constr type="bMarg" refType="primFontSz" fact="0.3"/>
-                  <dgm:constr type="lMarg" refType="primFontSz" fact="0.3"/>
-                  <dgm:constr type="rMarg" refType="primFontSz" fact="0.3"/>
-                </dgm:constrLst>
-                <dgm:ruleLst>
-                  <dgm:rule type="primFontSz" val="5" fact="NaN" max="NaN"/>
-                </dgm:ruleLst>
-              </dgm:layoutNode>
-              <dgm:layoutNode name="vert2">
-                <dgm:choose name="Name23">
-                  <dgm:if name="Name24" func="var" arg="dir" op="equ" val="norm">
-                    <dgm:alg type="lin">
-                      <dgm:param type="linDir" val="fromT"/>
-                      <dgm:param type="nodeHorzAlign" val="l"/>
-                    </dgm:alg>
-                  </dgm:if>
-                  <dgm:else name="Name25">
-                    <dgm:alg type="lin">
-                      <dgm:param type="linDir" val="fromT"/>
-                      <dgm:param type="nodeHorzAlign" val="r"/>
-                    </dgm:alg>
-                  </dgm:else>
-                </dgm:choose>
-                <dgm:shape xmlns:r="http://schemas.openxmlformats.org/officeDocument/2006/relationships" r:blip="">
-                  <dgm:adjLst/>
-                </dgm:shape>
-                <dgm:presOf/>
-                <dgm:forEach name="Name26" axis="ch" ptType="node">
-                  <dgm:layoutNode name="horz3">
-                    <dgm:choose name="Name27">
-                      <dgm:if name="Name28" func="var" arg="dir" op="equ" val="norm">
-                        <dgm:alg type="lin">
-                          <dgm:param type="linDir" val="fromL"/>
-                          <dgm:param type="nodeVertAlign" val="t"/>
-                        </dgm:alg>
-                      </dgm:if>
-                      <dgm:else name="Name29">
-                        <dgm:alg type="lin">
-                          <dgm:param type="linDir" val="fromR"/>
-                          <dgm:param type="nodeVertAlign" val="t"/>
-                        </dgm:alg>
-                      </dgm:else>
-                    </dgm:choose>
-                    <dgm:shape xmlns:r="http://schemas.openxmlformats.org/officeDocument/2006/relationships" r:blip="">
-                      <dgm:adjLst/>
-                    </dgm:shape>
-                    <dgm:presOf/>
-                    <dgm:layoutNode name="horzSpace3">
-                      <dgm:alg type="sp"/>
-                      <dgm:shape xmlns:r="http://schemas.openxmlformats.org/officeDocument/2006/relationships" r:blip="">
-                        <dgm:adjLst/>
-                      </dgm:shape>
-                      <dgm:presOf/>
-                    </dgm:layoutNode>
-                    <dgm:layoutNode name="tx3" styleLbl="revTx">
-                      <dgm:alg type="tx">
-                        <dgm:param type="parTxLTRAlign" val="l"/>
-                        <dgm:param type="parTxRTLAlign" val="r"/>
-                        <dgm:param type="txAnchorVert" val="t"/>
-                      </dgm:alg>
-                      <dgm:shape xmlns:r="http://schemas.openxmlformats.org/officeDocument/2006/relationships" type="rect" r:blip="">
-                        <dgm:adjLst/>
-                      </dgm:shape>
-                      <dgm:presOf axis="self"/>
-                      <dgm:constrLst>
-                        <dgm:constr type="tMarg" refType="primFontSz" fact="0.3"/>
-                        <dgm:constr type="bMarg" refType="primFontSz" fact="0.3"/>
-                        <dgm:constr type="lMarg" refType="primFontSz" fact="0.3"/>
-                        <dgm:constr type="rMarg" refType="primFontSz" fact="0.3"/>
-                      </dgm:constrLst>
-                      <dgm:ruleLst>
-                        <dgm:rule type="primFontSz" val="5" fact="NaN" max="NaN"/>
-                      </dgm:ruleLst>
-                    </dgm:layoutNode>
-                    <dgm:layoutNode name="vert3">
-                      <dgm:choose name="Name30">
-                        <dgm:if name="Name31" func="var" arg="dir" op="equ" val="norm">
-                          <dgm:alg type="lin">
-                            <dgm:param type="linDir" val="fromT"/>
-                            <dgm:param type="nodeHorzAlign" val="l"/>
-                          </dgm:alg>
-                        </dgm:if>
-                        <dgm:else name="Name32">
-                          <dgm:alg type="lin">
-                            <dgm:param type="linDir" val="fromT"/>
-                            <dgm:param type="nodeHorzAlign" val="r"/>
-                          </dgm:alg>
-                        </dgm:else>
-                      </dgm:choose>
-                      <dgm:shape xmlns:r="http://schemas.openxmlformats.org/officeDocument/2006/relationships" r:blip="">
-                        <dgm:adjLst/>
-                      </dgm:shape>
-                      <dgm:presOf/>
-                      <dgm:forEach name="Name33" axis="ch" ptType="node">
-                        <dgm:layoutNode name="horz4">
-                          <dgm:choose name="Name34">
-                            <dgm:if name="Name35" func="var" arg="dir" op="equ" val="norm">
-                              <dgm:alg type="lin">
-                                <dgm:param type="linDir" val="fromL"/>
-                                <dgm:param type="nodeVertAlign" val="t"/>
-                              </dgm:alg>
-                            </dgm:if>
-                            <dgm:else name="Name36">
-                              <dgm:alg type="lin">
-                                <dgm:param type="linDir" val="fromR"/>
-                                <dgm:param type="nodeVertAlign" val="t"/>
-                              </dgm:alg>
-                            </dgm:else>
-                          </dgm:choose>
-                          <dgm:shape xmlns:r="http://schemas.openxmlformats.org/officeDocument/2006/relationships" r:blip="">
-                            <dgm:adjLst/>
-                          </dgm:shape>
-                          <dgm:presOf/>
-                          <dgm:layoutNode name="horzSpace4">
-                            <dgm:alg type="sp"/>
-                            <dgm:shape xmlns:r="http://schemas.openxmlformats.org/officeDocument/2006/relationships" r:blip="">
-                              <dgm:adjLst/>
-                            </dgm:shape>
-                            <dgm:presOf/>
-                          </dgm:layoutNode>
-                          <dgm:layoutNode name="tx4" styleLbl="revTx">
-                            <dgm:varLst>
-                              <dgm:bulletEnabled val="1"/>
-                            </dgm:varLst>
-                            <dgm:alg type="tx">
-                              <dgm:param type="parTxLTRAlign" val="l"/>
-                              <dgm:param type="parTxRTLAlign" val="r"/>
-                              <dgm:param type="txAnchorVert" val="t"/>
-                            </dgm:alg>
-                            <dgm:shape xmlns:r="http://schemas.openxmlformats.org/officeDocument/2006/relationships" type="rect" r:blip="">
-                              <dgm:adjLst/>
-                            </dgm:shape>
-                            <dgm:presOf axis="desOrSelf" ptType="node"/>
-                            <dgm:constrLst>
-                              <dgm:constr type="tMarg" refType="primFontSz" fact="0.3"/>
-                              <dgm:constr type="bMarg" refType="primFontSz" fact="0.3"/>
-                              <dgm:constr type="lMarg" refType="primFontSz" fact="0.3"/>
-                              <dgm:constr type="rMarg" refType="primFontSz" fact="0.3"/>
-                            </dgm:constrLst>
-                            <dgm:ruleLst>
-                              <dgm:rule type="primFontSz" val="5" fact="NaN" max="NaN"/>
-                            </dgm:ruleLst>
-                          </dgm:layoutNode>
-                        </dgm:layoutNode>
-                      </dgm:forEach>
-                    </dgm:layoutNode>
-                  </dgm:layoutNode>
-                  <dgm:forEach name="Name37" axis="followSib" ptType="sibTrans" cnt="1">
-                    <dgm:layoutNode name="thinLine3" styleLbl="callout">
-                      <dgm:alg type="sp"/>
-                      <dgm:shape xmlns:r="http://schemas.openxmlformats.org/officeDocument/2006/relationships" type="line" r:blip="">
-                        <dgm:adjLst/>
-                      </dgm:shape>
-                      <dgm:presOf/>
-                    </dgm:layoutNode>
-                  </dgm:forEach>
-                </dgm:forEach>
-              </dgm:layoutNode>
-            </dgm:layoutNode>
-            <dgm:layoutNode name="thinLine2b" styleLbl="callout">
-              <dgm:alg type="sp"/>
-              <dgm:shape xmlns:r="http://schemas.openxmlformats.org/officeDocument/2006/relationships" type="line" r:blip="">
-                <dgm:adjLst/>
-              </dgm:shape>
-              <dgm:presOf/>
-            </dgm:layoutNode>
-            <dgm:layoutNode name="vertSpace2b">
-              <dgm:alg type="sp"/>
-              <dgm:shape xmlns:r="http://schemas.openxmlformats.org/officeDocument/2006/relationships" r:blip="">
-                <dgm:adjLst/>
-              </dgm:shape>
-              <dgm:presOf/>
-            </dgm:layoutNode>
-          </dgm:forEach>
-        </dgm:layoutNode>
-      </dgm:layoutNode>
-    </dgm:forEach>
-  </dgm:layoutNode>
-</dgm:layoutDef>
-</file>
-
-<file path=ppt/diagrams/quickStyle1.xml><?xml version="1.0" encoding="utf-8"?>
-<dgm:styleDef xmlns:dgm="http://schemas.openxmlformats.org/drawingml/2006/diagram" xmlns:a="http://schemas.openxmlformats.org/drawingml/2006/main" uniqueId="urn:microsoft.com/office/officeart/2005/8/quickstyle/simple2">
-  <dgm:title val=""/>
-  <dgm:desc val=""/>
-  <dgm:catLst>
-    <dgm:cat type="simple" pri="10200"/>
-  </dgm:catLst>
-  <dgm:scene3d>
-    <a:camera prst="orthographicFront"/>
-    <a:lightRig rig="threePt" dir="t"/>
-  </dgm:scene3d>
-  <dgm:styleLbl name="node0">
-    <dgm:scene3d>
-      <a:camera prst="orthographicFront"/>
-      <a:lightRig rig="threePt" dir="t"/>
-    </dgm:scene3d>
-    <dgm:sp3d/>
-    <dgm:txPr/>
-    <dgm:style>
-      <a:lnRef idx="3">
-        <a:scrgbClr r="0" g="0" b="0"/>
-      </a:lnRef>
-      <a:fillRef idx="1">
-        <a:scrgbClr r="0" g="0" b="0"/>
-      </a:fillRef>
-      <a:effectRef idx="1">
-        <a:scrgbClr r="0" g="0" b="0"/>
-      </a:effectRef>
-      <a:fontRef idx="minor">
-        <a:schemeClr val="lt1"/>
-      </a:fontRef>
-    </dgm:style>
-  </dgm:styleLbl>
-  <dgm:styleLbl name="lnNode1">
-    <dgm:scene3d>
-      <a:camera prst="orthographicFront"/>
-      <a:lightRig rig="threePt" dir="t"/>
-    </dgm:scene3d>
-    <dgm:sp3d/>
-    <dgm:txPr/>
-    <dgm:style>
-      <a:lnRef idx="3">
-        <a:scrgbClr r="0" g="0" b="0"/>
-      </a:lnRef>
-      <a:fillRef idx="1">
-        <a:scrgbClr r="0" g="0" b="0"/>
-      </a:fillRef>
-      <a:effectRef idx="1">
-        <a:scrgbClr r="0" g="0" b="0"/>
-      </a:effectRef>
-      <a:fontRef idx="minor">
-        <a:schemeClr val="lt1"/>
-      </a:fontRef>
-    </dgm:style>
-  </dgm:styleLbl>
-  <dgm:styleLbl name="vennNode1">
-    <dgm:scene3d>
-      <a:camera prst="orthographicFront"/>
-      <a:lightRig rig="threePt" dir="t"/>
-    </dgm:scene3d>
-    <dgm:sp3d/>
-    <dgm:txPr/>
-    <dgm:style>
-      <a:lnRef idx="3">
-        <a:scrgbClr r="0" g="0" b="0"/>
-      </a:lnRef>
-      <a:fillRef idx="1">
-        <a:scrgbClr r="0" g="0" b="0"/>
-      </a:fillRef>
-      <a:effectRef idx="0">
-        <a:scrgbClr r="0" g="0" b="0"/>
-      </a:effectRef>
-      <a:fontRef idx="minor">
-        <a:schemeClr val="tx1"/>
-      </a:fontRef>
-    </dgm:style>
-  </dgm:styleLbl>
-  <dgm:styleLbl name="alignNode1">
-    <dgm:scene3d>
-      <a:camera prst="orthographicFront"/>
-      <a:lightRig rig="threePt" dir="t"/>
-    </dgm:scene3d>
-    <dgm:sp3d/>
-    <dgm:txPr/>
-    <dgm:style>
-      <a:lnRef idx="2">
-        <a:scrgbClr r="0" g="0" b="0"/>
-      </a:lnRef>
-      <a:fillRef idx="1">
-        <a:scrgbClr r="0" g="0" b="0"/>
-      </a:fillRef>
-      <a:effectRef idx="1">
-        <a:scrgbClr r="0" g="0" b="0"/>
-      </a:effectRef>
-      <a:fontRef idx="minor">
-        <a:schemeClr val="lt1"/>
-      </a:fontRef>
-    </dgm:style>
-  </dgm:styleLbl>
-  <dgm:styleLbl name="node1">
-    <dgm:scene3d>
-      <a:camera prst="orthographicFront"/>
-      <a:lightRig rig="threePt" dir="t"/>
-    </dgm:scene3d>
-    <dgm:sp3d/>
-    <dgm:txPr/>
-    <dgm:style>
-      <a:lnRef idx="3">
-        <a:scrgbClr r="0" g="0" b="0"/>
-      </a:lnRef>
-      <a:fillRef idx="1">
-        <a:scrgbClr r="0" g="0" b="0"/>
-      </a:fillRef>
-      <a:effectRef idx="1">
-        <a:scrgbClr r="0" g="0" b="0"/>
-      </a:effectRef>
-      <a:fontRef idx="minor">
-        <a:schemeClr val="lt1"/>
-      </a:fontRef>
-    </dgm:style>
-  </dgm:styleLbl>
-  <dgm:styleLbl name="node2">
-    <dgm:scene3d>
-      <a:camera prst="orthographicFront"/>
-      <a:lightRig rig="threePt" dir="t"/>
-    </dgm:scene3d>
-    <dgm:sp3d/>
-    <dgm:txPr/>
-    <dgm:style>
-      <a:lnRef idx="3">
-        <a:scrgbClr r="0" g="0" b="0"/>
-      </a:lnRef>
-      <a:fillRef idx="1">
-        <a:scrgbClr r="0" g="0" b="0"/>
-      </a:fillRef>
-      <a:effectRef idx="1">
-        <a:scrgbClr r="0" g="0" b="0"/>
-      </a:effectRef>
-      <a:fontRef idx="minor">
-        <a:schemeClr val="lt1"/>
-      </a:fontRef>
-    </dgm:style>
-  </dgm:styleLbl>
-  <dgm:styleLbl name="node3">
-    <dgm:scene3d>
-      <a:camera prst="orthographicFront"/>
-      <a:lightRig rig="threePt" dir="t"/>
-    </dgm:scene3d>
-    <dgm:sp3d/>
-    <dgm:txPr/>
-    <dgm:style>
-      <a:lnRef idx="3">
-        <a:scrgbClr r="0" g="0" b="0"/>
-      </a:lnRef>
-      <a:fillRef idx="1">
-        <a:scrgbClr r="0" g="0" b="0"/>
-      </a:fillRef>
-      <a:effectRef idx="1">
-        <a:scrgbClr r="0" g="0" b="0"/>
-      </a:effectRef>
-      <a:fontRef idx="minor">
-        <a:schemeClr val="lt1"/>
-      </a:fontRef>
-    </dgm:style>
-  </dgm:styleLbl>
-  <dgm:styleLbl name="node4">
-    <dgm:scene3d>
-      <a:camera prst="orthographicFront"/>
-      <a:lightRig rig="threePt" dir="t"/>
-    </dgm:scene3d>
-    <dgm:sp3d/>
-    <dgm:txPr/>
-    <dgm:style>
-      <a:lnRef idx="3">
-        <a:scrgbClr r="0" g="0" b="0"/>
-      </a:lnRef>
-      <a:fillRef idx="1">
-        <a:scrgbClr r="0" g="0" b="0"/>
-      </a:fillRef>
-      <a:effectRef idx="1">
-        <a:scrgbClr r="0" g="0" b="0"/>
-      </a:effectRef>
-      <a:fontRef idx="minor">
-        <a:schemeClr val="lt1"/>
-      </a:fontRef>
-    </dgm:style>
-  </dgm:styleLbl>
-  <dgm:styleLbl name="fgImgPlace1">
-    <dgm:scene3d>
-      <a:camera prst="orthographicFront"/>
-      <a:lightRig rig="threePt" dir="t"/>
-    </dgm:scene3d>
-    <dgm:sp3d/>
-    <dgm:txPr/>
-    <dgm:style>
-      <a:lnRef idx="3">
-        <a:scrgbClr r="0" g="0" b="0"/>
-      </a:lnRef>
-      <a:fillRef idx="1">
-        <a:scrgbClr r="0" g="0" b="0"/>
-      </a:fillRef>
-      <a:effectRef idx="1">
-        <a:scrgbClr r="0" g="0" b="0"/>
-      </a:effectRef>
-      <a:fontRef idx="minor"/>
-    </dgm:style>
-  </dgm:styleLbl>
-  <dgm:styleLbl name="alignImgPlace1">
-    <dgm:scene3d>
-      <a:camera prst="orthographicFront"/>
-      <a:lightRig rig="threePt" dir="t"/>
-    </dgm:scene3d>
-    <dgm:sp3d/>
-    <dgm:txPr/>
-    <dgm:style>
-      <a:lnRef idx="3">
-        <a:scrgbClr r="0" g="0" b="0"/>
-      </a:lnRef>
-      <a:fillRef idx="1">
-        <a:scrgbClr r="0" g="0" b="0"/>
-      </a:fillRef>
-      <a:effectRef idx="1">
-        <a:scrgbClr r="0" g="0" b="0"/>
-      </a:effectRef>
-      <a:fontRef idx="minor"/>
-    </dgm:style>
-  </dgm:styleLbl>
-  <dgm:styleLbl name="bgImgPlace1">
-    <dgm:scene3d>
-      <a:camera prst="orthographicFront"/>
-      <a:lightRig rig="threePt" dir="t"/>
-    </dgm:scene3d>
-    <dgm:sp3d/>
-    <dgm:txPr/>
-    <dgm:style>
-      <a:lnRef idx="3">
-        <a:scrgbClr r="0" g="0" b="0"/>
-      </a:lnRef>
-      <a:fillRef idx="1">
-        <a:scrgbClr r="0" g="0" b="0"/>
-      </a:fillRef>
-      <a:effectRef idx="1">
-        <a:scrgbClr r="0" g="0" b="0"/>
-      </a:effectRef>
-      <a:fontRef idx="minor"/>
-    </dgm:style>
-  </dgm:styleLbl>
-  <dgm:styleLbl name="sibTrans2D1">
-    <dgm:scene3d>
-      <a:camera prst="orthographicFront"/>
-      <a:lightRig rig="threePt" dir="t"/>
-    </dgm:scene3d>
-    <dgm:sp3d/>
-    <dgm:txPr/>
-    <dgm:style>
-      <a:lnRef idx="0">
-        <a:scrgbClr r="0" g="0" b="0"/>
-      </a:lnRef>
-      <a:fillRef idx="1">
-        <a:scrgbClr r="0" g="0" b="0"/>
-      </a:fillRef>
-      <a:effectRef idx="1">
-        <a:scrgbClr r="0" g="0" b="0"/>
-      </a:effectRef>
-      <a:fontRef idx="minor">
-        <a:schemeClr val="lt1"/>
-      </a:fontRef>
-    </dgm:style>
-  </dgm:styleLbl>
-  <dgm:styleLbl name="fgSibTrans2D1">
-    <dgm:scene3d>
-      <a:camera prst="orthographicFront"/>
-      <a:lightRig rig="threePt" dir="t"/>
-    </dgm:scene3d>
-    <dgm:sp3d/>
-    <dgm:txPr/>
-    <dgm:style>
-      <a:lnRef idx="0">
-        <a:scrgbClr r="0" g="0" b="0"/>
-      </a:lnRef>
-      <a:fillRef idx="1">
-        <a:scrgbClr r="0" g="0" b="0"/>
-      </a:fillRef>
-      <a:effectRef idx="1">
-        <a:scrgbClr r="0" g="0" b="0"/>
-      </a:effectRef>
-      <a:fontRef idx="minor">
-        <a:schemeClr val="lt1"/>
-      </a:fontRef>
-    </dgm:style>
-  </dgm:styleLbl>
-  <dgm:styleLbl name="bgSibTrans2D1">
-    <dgm:scene3d>
-      <a:camera prst="orthographicFront"/>
-      <a:lightRig rig="threePt" dir="t"/>
-    </dgm:scene3d>
-    <dgm:sp3d/>
-    <dgm:txPr/>
-    <dgm:style>
-      <a:lnRef idx="0">
-        <a:scrgbClr r="0" g="0" b="0"/>
-      </a:lnRef>
-      <a:fillRef idx="1">
-        <a:scrgbClr r="0" g="0" b="0"/>
-      </a:fillRef>
-      <a:effectRef idx="1">
-        <a:scrgbClr r="0" g="0" b="0"/>
-      </a:effectRef>
-      <a:fontRef idx="minor">
-        <a:schemeClr val="lt1"/>
-      </a:fontRef>
-    </dgm:style>
-  </dgm:styleLbl>
-  <dgm:styleLbl name="sibTrans1D1">
-    <dgm:scene3d>
-      <a:camera prst="orthographicFront"/>
-      <a:lightRig rig="threePt" dir="t"/>
-    </dgm:scene3d>
-    <dgm:sp3d/>
-    <dgm:txPr/>
-    <dgm:style>
-      <a:lnRef idx="1">
-        <a:scrgbClr r="0" g="0" b="0"/>
-      </a:lnRef>
-      <a:fillRef idx="0">
-        <a:scrgbClr r="0" g="0" b="0"/>
-      </a:fillRef>
-      <a:effectRef idx="0">
-        <a:scrgbClr r="0" g="0" b="0"/>
-      </a:effectRef>
-      <a:fontRef idx="minor"/>
-    </dgm:style>
-  </dgm:styleLbl>
-  <dgm:styleLbl name="callout">
-    <dgm:scene3d>
-      <a:camera prst="orthographicFront"/>
-      <a:lightRig rig="threePt" dir="t"/>
-    </dgm:scene3d>
-    <dgm:sp3d/>
-    <dgm:txPr/>
-    <dgm:style>
-      <a:lnRef idx="2">
-        <a:scrgbClr r="0" g="0" b="0"/>
-      </a:lnRef>
-      <a:fillRef idx="1">
-        <a:scrgbClr r="0" g="0" b="0"/>
-      </a:fillRef>
-      <a:effectRef idx="1">
-        <a:scrgbClr r="0" g="0" b="0"/>
-      </a:effectRef>
-      <a:fontRef idx="minor"/>
-    </dgm:style>
-  </dgm:styleLbl>
-  <dgm:styleLbl name="asst0">
-    <dgm:scene3d>
-      <a:camera prst="orthographicFront"/>
-      <a:lightRig rig="threePt" dir="t"/>
-    </dgm:scene3d>
-    <dgm:sp3d/>
-    <dgm:txPr/>
-    <dgm:style>
-      <a:lnRef idx="3">
-        <a:scrgbClr r="0" g="0" b="0"/>
-      </a:lnRef>
-      <a:fillRef idx="1">
-        <a:scrgbClr r="0" g="0" b="0"/>
-      </a:fillRef>
-      <a:effectRef idx="1">
-        <a:scrgbClr r="0" g="0" b="0"/>
-      </a:effectRef>
-      <a:fontRef idx="minor">
-        <a:schemeClr val="lt1"/>
-      </a:fontRef>
-    </dgm:style>
-  </dgm:styleLbl>
-  <dgm:styleLbl name="asst1">
-    <dgm:scene3d>
-      <a:camera prst="orthographicFront"/>
-      <a:lightRig rig="threePt" dir="t"/>
-    </dgm:scene3d>
-    <dgm:sp3d/>
-    <dgm:txPr/>
-    <dgm:style>
-      <a:lnRef idx="3">
-        <a:scrgbClr r="0" g="0" b="0"/>
-      </a:lnRef>
-      <a:fillRef idx="1">
-        <a:scrgbClr r="0" g="0" b="0"/>
-      </a:fillRef>
-      <a:effectRef idx="1">
-        <a:scrgbClr r="0" g="0" b="0"/>
-      </a:effectRef>
-      <a:fontRef idx="minor">
-        <a:schemeClr val="lt1"/>
-      </a:fontRef>
-    </dgm:style>
-  </dgm:styleLbl>
-  <dgm:styleLbl name="asst2">
-    <dgm:scene3d>
-      <a:camera prst="orthographicFront"/>
-      <a:lightRig rig="threePt" dir="t"/>
-    </dgm:scene3d>
-    <dgm:sp3d/>
-    <dgm:txPr/>
-    <dgm:style>
-      <a:lnRef idx="3">
-        <a:scrgbClr r="0" g="0" b="0"/>
-      </a:lnRef>
-      <a:fillRef idx="1">
-        <a:scrgbClr r="0" g="0" b="0"/>
-      </a:fillRef>
-      <a:effectRef idx="1">
-        <a:scrgbClr r="0" g="0" b="0"/>
-      </a:effectRef>
-      <a:fontRef idx="minor">
-        <a:schemeClr val="lt1"/>
-      </a:fontRef>
-    </dgm:style>
-  </dgm:styleLbl>
-  <dgm:styleLbl name="asst3">
-    <dgm:scene3d>
-      <a:camera prst="orthographicFront"/>
-      <a:lightRig rig="threePt" dir="t"/>
-    </dgm:scene3d>
-    <dgm:sp3d/>
-    <dgm:txPr/>
-    <dgm:style>
-      <a:lnRef idx="3">
-        <a:scrgbClr r="0" g="0" b="0"/>
-      </a:lnRef>
-      <a:fillRef idx="1">
-        <a:scrgbClr r="0" g="0" b="0"/>
-      </a:fillRef>
-      <a:effectRef idx="1">
-        <a:scrgbClr r="0" g="0" b="0"/>
-      </a:effectRef>
-      <a:fontRef idx="minor">
-        <a:schemeClr val="lt1"/>
-      </a:fontRef>
-    </dgm:style>
-  </dgm:styleLbl>
-  <dgm:styleLbl name="asst4">
-    <dgm:scene3d>
-      <a:camera prst="orthographicFront"/>
-      <a:lightRig rig="threePt" dir="t"/>
-    </dgm:scene3d>
-    <dgm:sp3d/>
-    <dgm:txPr/>
-    <dgm:style>
-      <a:lnRef idx="3">
-        <a:scrgbClr r="0" g="0" b="0"/>
-      </a:lnRef>
-      <a:fillRef idx="1">
-        <a:scrgbClr r="0" g="0" b="0"/>
-      </a:fillRef>
-      <a:effectRef idx="1">
-        <a:scrgbClr r="0" g="0" b="0"/>
-      </a:effectRef>
-      <a:fontRef idx="minor">
-        <a:schemeClr val="lt1"/>
-      </a:fontRef>
-    </dgm:style>
-  </dgm:styleLbl>
-  <dgm:styleLbl name="parChTrans2D1">
-    <dgm:scene3d>
-      <a:camera prst="orthographicFront"/>
-      <a:lightRig rig="threePt" dir="t"/>
-    </dgm:scene3d>
-    <dgm:sp3d/>
-    <dgm:txPr/>
-    <dgm:style>
-      <a:lnRef idx="3">
-        <a:scrgbClr r="0" g="0" b="0"/>
-      </a:lnRef>
-      <a:fillRef idx="1">
-        <a:scrgbClr r="0" g="0" b="0"/>
-      </a:fillRef>
-      <a:effectRef idx="1">
-        <a:scrgbClr r="0" g="0" b="0"/>
-      </a:effectRef>
-      <a:fontRef idx="minor">
-        <a:schemeClr val="lt1"/>
-      </a:fontRef>
-    </dgm:style>
-  </dgm:styleLbl>
-  <dgm:styleLbl name="parChTrans2D2">
-    <dgm:scene3d>
-      <a:camera prst="orthographicFront"/>
-      <a:lightRig rig="threePt" dir="t"/>
-    </dgm:scene3d>
-    <dgm:sp3d/>
-    <dgm:txPr/>
-    <dgm:style>
-      <a:lnRef idx="3">
-        <a:scrgbClr r="0" g="0" b="0"/>
-      </a:lnRef>
-      <a:fillRef idx="1">
-        <a:scrgbClr r="0" g="0" b="0"/>
-      </a:fillRef>
-      <a:effectRef idx="1">
-        <a:scrgbClr r="0" g="0" b="0"/>
-      </a:effectRef>
-      <a:fontRef idx="minor">
-        <a:schemeClr val="lt1"/>
-      </a:fontRef>
-    </dgm:style>
-  </dgm:styleLbl>
-  <dgm:styleLbl name="parChTrans2D3">
-    <dgm:scene3d>
-      <a:camera prst="orthographicFront"/>
-      <a:lightRig rig="threePt" dir="t"/>
-    </dgm:scene3d>
-    <dgm:sp3d/>
-    <dgm:txPr/>
-    <dgm:style>
-      <a:lnRef idx="3">
-        <a:scrgbClr r="0" g="0" b="0"/>
-      </a:lnRef>
-      <a:fillRef idx="1">
-        <a:scrgbClr r="0" g="0" b="0"/>
-      </a:fillRef>
-      <a:effectRef idx="1">
-        <a:scrgbClr r="0" g="0" b="0"/>
-      </a:effectRef>
-      <a:fontRef idx="minor">
-        <a:schemeClr val="lt1"/>
-      </a:fontRef>
-    </dgm:style>
-  </dgm:styleLbl>
-  <dgm:styleLbl name="parChTrans2D4">
-    <dgm:scene3d>
-      <a:camera prst="orthographicFront"/>
-      <a:lightRig rig="threePt" dir="t"/>
-    </dgm:scene3d>
-    <dgm:sp3d/>
-    <dgm:txPr/>
-    <dgm:style>
-      <a:lnRef idx="3">
-        <a:scrgbClr r="0" g="0" b="0"/>
-      </a:lnRef>
-      <a:fillRef idx="1">
-        <a:scrgbClr r="0" g="0" b="0"/>
-      </a:fillRef>
-      <a:effectRef idx="1">
-        <a:scrgbClr r="0" g="0" b="0"/>
-      </a:effectRef>
-      <a:fontRef idx="minor">
-        <a:schemeClr val="lt1"/>
-      </a:fontRef>
-    </dgm:style>
-  </dgm:styleLbl>
-  <dgm:styleLbl name="parChTrans1D1">
-    <dgm:scene3d>
-      <a:camera prst="orthographicFront"/>
-      <a:lightRig rig="threePt" dir="t"/>
-    </dgm:scene3d>
-    <dgm:sp3d/>
-    <dgm:txPr/>
-    <dgm:style>
-      <a:lnRef idx="2">
-        <a:scrgbClr r="0" g="0" b="0"/>
-      </a:lnRef>
-      <a:fillRef idx="0">
-        <a:scrgbClr r="0" g="0" b="0"/>
-      </a:fillRef>
-      <a:effectRef idx="0">
-        <a:scrgbClr r="0" g="0" b="0"/>
-      </a:effectRef>
-      <a:fontRef idx="minor"/>
-    </dgm:style>
-  </dgm:styleLbl>
-  <dgm:styleLbl name="parChTrans1D2">
-    <dgm:scene3d>
-      <a:camera prst="orthographicFront"/>
-      <a:lightRig rig="threePt" dir="t"/>
-    </dgm:scene3d>
-    <dgm:sp3d/>
-    <dgm:txPr/>
-    <dgm:style>
-      <a:lnRef idx="2">
-        <a:scrgbClr r="0" g="0" b="0"/>
-      </a:lnRef>
-      <a:fillRef idx="0">
-        <a:scrgbClr r="0" g="0" b="0"/>
-      </a:fillRef>
-      <a:effectRef idx="0">
-        <a:scrgbClr r="0" g="0" b="0"/>
-      </a:effectRef>
-      <a:fontRef idx="minor"/>
-    </dgm:style>
-  </dgm:styleLbl>
-  <dgm:styleLbl name="parChTrans1D3">
-    <dgm:scene3d>
-      <a:camera prst="orthographicFront"/>
-      <a:lightRig rig="threePt" dir="t"/>
-    </dgm:scene3d>
-    <dgm:sp3d/>
-    <dgm:txPr/>
-    <dgm:style>
-      <a:lnRef idx="2">
-        <a:scrgbClr r="0" g="0" b="0"/>
-      </a:lnRef>
-      <a:fillRef idx="0">
-        <a:scrgbClr r="0" g="0" b="0"/>
-      </a:fillRef>
-      <a:effectRef idx="0">
-        <a:scrgbClr r="0" g="0" b="0"/>
-      </a:effectRef>
-      <a:fontRef idx="minor"/>
-    </dgm:style>
-  </dgm:styleLbl>
-  <dgm:styleLbl name="parChTrans1D4">
-    <dgm:scene3d>
-      <a:camera prst="orthographicFront"/>
-      <a:lightRig rig="threePt" dir="t"/>
-    </dgm:scene3d>
-    <dgm:sp3d/>
-    <dgm:txPr/>
-    <dgm:style>
-      <a:lnRef idx="2">
-        <a:scrgbClr r="0" g="0" b="0"/>
-      </a:lnRef>
-      <a:fillRef idx="0">
-        <a:scrgbClr r="0" g="0" b="0"/>
-      </a:fillRef>
-      <a:effectRef idx="0">
-        <a:scrgbClr r="0" g="0" b="0"/>
-      </a:effectRef>
-      <a:fontRef idx="minor"/>
-    </dgm:style>
-  </dgm:styleLbl>
-  <dgm:styleLbl name="fgAcc1">
-    <dgm:scene3d>
-      <a:camera prst="orthographicFront"/>
-      <a:lightRig rig="threePt" dir="t"/>
-    </dgm:scene3d>
-    <dgm:sp3d/>
-    <dgm:txPr/>
-    <dgm:style>
-      <a:lnRef idx="2">
-        <a:scrgbClr r="0" g="0" b="0"/>
-      </a:lnRef>
-      <a:fillRef idx="1">
-        <a:scrgbClr r="0" g="0" b="0"/>
-      </a:fillRef>
-      <a:effectRef idx="0">
-        <a:scrgbClr r="0" g="0" b="0"/>
-      </a:effectRef>
-      <a:fontRef idx="minor"/>
-    </dgm:style>
-  </dgm:styleLbl>
-  <dgm:styleLbl name="conFgAcc1">
-    <dgm:scene3d>
-      <a:camera prst="orthographicFront"/>
-      <a:lightRig rig="threePt" dir="t"/>
-    </dgm:scene3d>
-    <dgm:sp3d/>
-    <dgm:txPr/>
-    <dgm:style>
-      <a:lnRef idx="2">
-        <a:scrgbClr r="0" g="0" b="0"/>
-      </a:lnRef>
-      <a:fillRef idx="1">
-        <a:scrgbClr r="0" g="0" b="0"/>
-      </a:fillRef>
-      <a:effectRef idx="0">
-        <a:scrgbClr r="0" g="0" b="0"/>
-      </a:effectRef>
-      <a:fontRef idx="minor"/>
-    </dgm:style>
-  </dgm:styleLbl>
-  <dgm:styleLbl name="alignAcc1">
-    <dgm:scene3d>
-      <a:camera prst="orthographicFront"/>
-      <a:lightRig rig="threePt" dir="t"/>
-    </dgm:scene3d>
-    <dgm:sp3d/>
-    <dgm:txPr/>
-    <dgm:style>
-      <a:lnRef idx="2">
-        <a:scrgbClr r="0" g="0" b="0"/>
-      </a:lnRef>
-      <a:fillRef idx="1">
-        <a:scrgbClr r="0" g="0" b="0"/>
-      </a:fillRef>
-      <a:effectRef idx="0">
-        <a:scrgbClr r="0" g="0" b="0"/>
-      </a:effectRef>
-      <a:fontRef idx="minor"/>
-    </dgm:style>
-  </dgm:styleLbl>
-  <dgm:styleLbl name="trAlignAcc1">
-    <dgm:scene3d>
-      <a:camera prst="orthographicFront"/>
-      <a:lightRig rig="threePt" dir="t"/>
-    </dgm:scene3d>
-    <dgm:sp3d/>
-    <dgm:txPr/>
-    <dgm:style>
-      <a:lnRef idx="1">
-        <a:scrgbClr r="0" g="0" b="0"/>
-      </a:lnRef>
-      <a:fillRef idx="1">
-        <a:scrgbClr r="0" g="0" b="0"/>
-      </a:fillRef>
-      <a:effectRef idx="0">
-        <a:scrgbClr r="0" g="0" b="0"/>
-      </a:effectRef>
-      <a:fontRef idx="minor"/>
-    </dgm:style>
-  </dgm:styleLbl>
-  <dgm:styleLbl name="bgAcc1">
-    <dgm:scene3d>
-      <a:camera prst="orthographicFront"/>
-      <a:lightRig rig="threePt" dir="t"/>
-    </dgm:scene3d>
-    <dgm:sp3d/>
-    <dgm:txPr/>
-    <dgm:style>
-      <a:lnRef idx="2">
-        <a:scrgbClr r="0" g="0" b="0"/>
-      </a:lnRef>
-      <a:fillRef idx="1">
-        <a:scrgbClr r="0" g="0" b="0"/>
-      </a:fillRef>
-      <a:effectRef idx="0">
-        <a:scrgbClr r="0" g="0" b="0"/>
-      </a:effectRef>
-      <a:fontRef idx="minor"/>
-    </dgm:style>
-  </dgm:styleLbl>
-  <dgm:styleLbl name="solidFgAcc1">
-    <dgm:scene3d>
-      <a:camera prst="orthographicFront"/>
-      <a:lightRig rig="threePt" dir="t"/>
-    </dgm:scene3d>
-    <dgm:sp3d/>
-    <dgm:txPr/>
-    <dgm:style>
-      <a:lnRef idx="2">
-        <a:scrgbClr r="0" g="0" b="0"/>
-      </a:lnRef>
-      <a:fillRef idx="1">
-        <a:scrgbClr r="0" g="0" b="0"/>
-      </a:fillRef>
-      <a:effectRef idx="0">
-        <a:scrgbClr r="0" g="0" b="0"/>
-      </a:effectRef>
-      <a:fontRef idx="minor"/>
-    </dgm:style>
-  </dgm:styleLbl>
-  <dgm:styleLbl name="solidAlignAcc1">
-    <dgm:scene3d>
-      <a:camera prst="orthographicFront"/>
-      <a:lightRig rig="threePt" dir="t"/>
-    </dgm:scene3d>
-    <dgm:sp3d/>
-    <dgm:txPr/>
-    <dgm:style>
-      <a:lnRef idx="2">
-        <a:scrgbClr r="0" g="0" b="0"/>
-      </a:lnRef>
-      <a:fillRef idx="1">
-        <a:scrgbClr r="0" g="0" b="0"/>
-      </a:fillRef>
-      <a:effectRef idx="0">
-        <a:scrgbClr r="0" g="0" b="0"/>
-      </a:effectRef>
-      <a:fontRef idx="minor"/>
-    </dgm:style>
-  </dgm:styleLbl>
-  <dgm:styleLbl name="solidBgAcc1">
-    <dgm:scene3d>
-      <a:camera prst="orthographicFront"/>
-      <a:lightRig rig="threePt" dir="t"/>
-    </dgm:scene3d>
-    <dgm:sp3d/>
-    <dgm:txPr/>
-    <dgm:style>
-      <a:lnRef idx="2">
-        <a:scrgbClr r="0" g="0" b="0"/>
-      </a:lnRef>
-      <a:fillRef idx="1">
-        <a:scrgbClr r="0" g="0" b="0"/>
-      </a:fillRef>
-      <a:effectRef idx="0">
-        <a:scrgbClr r="0" g="0" b="0"/>
-      </a:effectRef>
-      <a:fontRef idx="minor"/>
-    </dgm:style>
-  </dgm:styleLbl>
-  <dgm:styleLbl name="fgAccFollowNode1">
-    <dgm:scene3d>
-      <a:camera prst="orthographicFront"/>
-      <a:lightRig rig="threePt" dir="t"/>
-    </dgm:scene3d>
-    <dgm:sp3d/>
-    <dgm:txPr/>
-    <dgm:style>
-      <a:lnRef idx="2">
-        <a:scrgbClr r="0" g="0" b="0"/>
-      </a:lnRef>
-      <a:fillRef idx="1">
-        <a:scrgbClr r="0" g="0" b="0"/>
-      </a:fillRef>
-      <a:effectRef idx="0">
-        <a:scrgbClr r="0" g="0" b="0"/>
-      </a:effectRef>
-      <a:fontRef idx="minor"/>
-    </dgm:style>
-  </dgm:styleLbl>
-  <dgm:styleLbl name="alignAccFollowNode1">
-    <dgm:scene3d>
-      <a:camera prst="orthographicFront"/>
-      <a:lightRig rig="threePt" dir="t"/>
-    </dgm:scene3d>
-    <dgm:sp3d/>
-    <dgm:txPr/>
-    <dgm:style>
-      <a:lnRef idx="2">
-        <a:scrgbClr r="0" g="0" b="0"/>
-      </a:lnRef>
-      <a:fillRef idx="1">
-        <a:scrgbClr r="0" g="0" b="0"/>
-      </a:fillRef>
-      <a:effectRef idx="0">
-        <a:scrgbClr r="0" g="0" b="0"/>
-      </a:effectRef>
-      <a:fontRef idx="minor"/>
-    </dgm:style>
-  </dgm:styleLbl>
-  <dgm:styleLbl name="bgAccFollowNode1">
-    <dgm:scene3d>
-      <a:camera prst="orthographicFront"/>
-      <a:lightRig rig="threePt" dir="t"/>
-    </dgm:scene3d>
-    <dgm:sp3d/>
-    <dgm:txPr/>
-    <dgm:style>
-      <a:lnRef idx="2">
-        <a:scrgbClr r="0" g="0" b="0"/>
-      </a:lnRef>
-      <a:fillRef idx="1">
-        <a:scrgbClr r="0" g="0" b="0"/>
-      </a:fillRef>
-      <a:effectRef idx="0">
-        <a:scrgbClr r="0" g="0" b="0"/>
-      </a:effectRef>
-      <a:fontRef idx="minor"/>
-    </dgm:style>
-  </dgm:styleLbl>
-  <dgm:styleLbl name="fgAcc0">
-    <dgm:scene3d>
-      <a:camera prst="orthographicFront"/>
-      <a:lightRig rig="threePt" dir="t"/>
-    </dgm:scene3d>
-    <dgm:sp3d/>
-    <dgm:txPr/>
-    <dgm:style>
-      <a:lnRef idx="2">
-        <a:scrgbClr r="0" g="0" b="0"/>
-      </a:lnRef>
-      <a:fillRef idx="1">
-        <a:scrgbClr r="0" g="0" b="0"/>
-      </a:fillRef>
-      <a:effectRef idx="0">
-        <a:scrgbClr r="0" g="0" b="0"/>
-      </a:effectRef>
-      <a:fontRef idx="minor"/>
-    </dgm:style>
-  </dgm:styleLbl>
-  <dgm:styleLbl name="fgAcc2">
-    <dgm:scene3d>
-      <a:camera prst="orthographicFront"/>
-      <a:lightRig rig="threePt" dir="t"/>
-    </dgm:scene3d>
-    <dgm:sp3d/>
-    <dgm:txPr/>
-    <dgm:style>
-      <a:lnRef idx="2">
-        <a:scrgbClr r="0" g="0" b="0"/>
-      </a:lnRef>
-      <a:fillRef idx="1">
-        <a:scrgbClr r="0" g="0" b="0"/>
-      </a:fillRef>
-      <a:effectRef idx="0">
-        <a:scrgbClr r="0" g="0" b="0"/>
-      </a:effectRef>
-      <a:fontRef idx="minor"/>
-    </dgm:style>
-  </dgm:styleLbl>
-  <dgm:styleLbl name="fgAcc3">
-    <dgm:scene3d>
-      <a:camera prst="orthographicFront"/>
-      <a:lightRig rig="threePt" dir="t"/>
-    </dgm:scene3d>
-    <dgm:sp3d/>
-    <dgm:txPr/>
-    <dgm:style>
-      <a:lnRef idx="2">
-        <a:scrgbClr r="0" g="0" b="0"/>
-      </a:lnRef>
-      <a:fillRef idx="1">
-        <a:scrgbClr r="0" g="0" b="0"/>
-      </a:fillRef>
-      <a:effectRef idx="0">
-        <a:scrgbClr r="0" g="0" b="0"/>
-      </a:effectRef>
-      <a:fontRef idx="minor"/>
-    </dgm:style>
-  </dgm:styleLbl>
-  <dgm:styleLbl name="fgAcc4">
-    <dgm:scene3d>
-      <a:camera prst="orthographicFront"/>
-      <a:lightRig rig="threePt" dir="t"/>
-    </dgm:scene3d>
-    <dgm:sp3d/>
-    <dgm:txPr/>
-    <dgm:style>
-      <a:lnRef idx="2">
-        <a:scrgbClr r="0" g="0" b="0"/>
-      </a:lnRef>
-      <a:fillRef idx="1">
-        <a:scrgbClr r="0" g="0" b="0"/>
-      </a:fillRef>
-      <a:effectRef idx="0">
-        <a:scrgbClr r="0" g="0" b="0"/>
-      </a:effectRef>
-      <a:fontRef idx="minor"/>
-    </dgm:style>
-  </dgm:styleLbl>
-  <dgm:styleLbl name="bgShp">
-    <dgm:scene3d>
-      <a:camera prst="orthographicFront"/>
-      <a:lightRig rig="threePt" dir="t"/>
-    </dgm:scene3d>
-    <dgm:sp3d/>
-    <dgm:txPr/>
-    <dgm:style>
-      <a:lnRef idx="0">
-        <a:scrgbClr r="0" g="0" b="0"/>
-      </a:lnRef>
-      <a:fillRef idx="1">
-        <a:scrgbClr r="0" g="0" b="0"/>
-      </a:fillRef>
-      <a:effectRef idx="0">
-        <a:scrgbClr r="0" g="0" b="0"/>
-      </a:effectRef>
-      <a:fontRef idx="minor"/>
-    </dgm:style>
-  </dgm:styleLbl>
-  <dgm:styleLbl name="dkBgShp">
-    <dgm:scene3d>
-      <a:camera prst="orthographicFront"/>
-      <a:lightRig rig="threePt" dir="t"/>
-    </dgm:scene3d>
-    <dgm:sp3d/>
-    <dgm:txPr/>
-    <dgm:style>
-      <a:lnRef idx="0">
-        <a:scrgbClr r="0" g="0" b="0"/>
-      </a:lnRef>
-      <a:fillRef idx="1">
-        <a:scrgbClr r="0" g="0" b="0"/>
-      </a:fillRef>
-      <a:effectRef idx="0">
-        <a:scrgbClr r="0" g="0" b="0"/>
-      </a:effectRef>
-      <a:fontRef idx="minor"/>
-    </dgm:style>
-  </dgm:styleLbl>
-  <dgm:styleLbl name="trBgShp">
-    <dgm:scene3d>
-      <a:camera prst="orthographicFront"/>
-      <a:lightRig rig="threePt" dir="t"/>
-    </dgm:scene3d>
-    <dgm:sp3d/>
-    <dgm:txPr/>
-    <dgm:style>
-      <a:lnRef idx="0">
-        <a:scrgbClr r="0" g="0" b="0"/>
-      </a:lnRef>
-      <a:fillRef idx="1">
-        <a:scrgbClr r="0" g="0" b="0"/>
-      </a:fillRef>
-      <a:effectRef idx="0">
-        <a:scrgbClr r="0" g="0" b="0"/>
-      </a:effectRef>
-      <a:fontRef idx="minor"/>
-    </dgm:style>
-  </dgm:styleLbl>
-  <dgm:styleLbl name="fgShp">
-    <dgm:scene3d>
-      <a:camera prst="orthographicFront"/>
-      <a:lightRig rig="threePt" dir="t"/>
-    </dgm:scene3d>
-    <dgm:sp3d/>
-    <dgm:txPr/>
-    <dgm:style>
-      <a:lnRef idx="3">
-        <a:scrgbClr r="0" g="0" b="0"/>
-      </a:lnRef>
-      <a:fillRef idx="1">
-        <a:scrgbClr r="0" g="0" b="0"/>
-      </a:fillRef>
-      <a:effectRef idx="1">
-        <a:scrgbClr r="0" g="0" b="0"/>
-      </a:effectRef>
-      <a:fontRef idx="minor"/>
-    </dgm:style>
-  </dgm:styleLbl>
-  <dgm:styleLbl name="revTx">
-    <dgm:scene3d>
-      <a:camera prst="orthographicFront"/>
-      <a:lightRig rig="threePt" dir="t"/>
-    </dgm:scene3d>
-    <dgm:sp3d/>
-    <dgm:txPr/>
-    <dgm:style>
-      <a:lnRef idx="0">
-        <a:scrgbClr r="0" g="0" b="0"/>
-      </a:lnRef>
-      <a:fillRef idx="0">
-        <a:scrgbClr r="0" g="0" b="0"/>
-      </a:fillRef>
-      <a:effectRef idx="0">
-        <a:scrgbClr r="0" g="0" b="0"/>
-      </a:effectRef>
-      <a:fontRef idx="minor"/>
-    </dgm:style>
-  </dgm:styleLbl>
-</dgm:styleDef>
-</file>
-
 <file path=ppt/slideLayouts/slideLayout1.xml><?xml version="1.0" encoding="utf-8"?>
 <p:sldLayout xmlns:a="http://schemas.openxmlformats.org/drawingml/2006/main" xmlns:r="http://schemas.openxmlformats.org/officeDocument/2006/relationships" xmlns:p="http://schemas.openxmlformats.org/presentationml/2006/main" type="title" preserve="1">
   <p:cSld name="Title Slide">
@@ -3136,7 +320,7 @@
           <a:p>
             <a:fld id="{5BCAD085-E8A6-8845-BD4E-CB4CCA059FC4}" type="datetimeFigureOut">
               <a:rPr lang="en-US" smtClean="0"/>
-              <a:t>5/5/2025</a:t>
+              <a:t>5/6/2025</a:t>
             </a:fld>
             <a:endParaRPr lang="en-US"/>
           </a:p>
@@ -3304,7 +488,7 @@
           <a:p>
             <a:fld id="{5BCAD085-E8A6-8845-BD4E-CB4CCA059FC4}" type="datetimeFigureOut">
               <a:rPr lang="en-US" smtClean="0"/>
-              <a:t>5/5/2025</a:t>
+              <a:t>5/6/2025</a:t>
             </a:fld>
             <a:endParaRPr lang="en-US"/>
           </a:p>
@@ -3482,7 +666,7 @@
           <a:p>
             <a:fld id="{5BCAD085-E8A6-8845-BD4E-CB4CCA059FC4}" type="datetimeFigureOut">
               <a:rPr lang="en-US" smtClean="0"/>
-              <a:t>5/5/2025</a:t>
+              <a:t>5/6/2025</a:t>
             </a:fld>
             <a:endParaRPr lang="en-US"/>
           </a:p>
@@ -3650,7 +834,7 @@
           <a:p>
             <a:fld id="{5BCAD085-E8A6-8845-BD4E-CB4CCA059FC4}" type="datetimeFigureOut">
               <a:rPr lang="en-US" smtClean="0"/>
-              <a:t>5/5/2025</a:t>
+              <a:t>5/6/2025</a:t>
             </a:fld>
             <a:endParaRPr lang="en-US"/>
           </a:p>
@@ -3895,7 +1079,7 @@
           <a:p>
             <a:fld id="{5BCAD085-E8A6-8845-BD4E-CB4CCA059FC4}" type="datetimeFigureOut">
               <a:rPr lang="en-US" smtClean="0"/>
-              <a:t>5/5/2025</a:t>
+              <a:t>5/6/2025</a:t>
             </a:fld>
             <a:endParaRPr lang="en-US"/>
           </a:p>
@@ -4180,7 +1364,7 @@
           <a:p>
             <a:fld id="{5BCAD085-E8A6-8845-BD4E-CB4CCA059FC4}" type="datetimeFigureOut">
               <a:rPr lang="en-US" smtClean="0"/>
-              <a:t>5/5/2025</a:t>
+              <a:t>5/6/2025</a:t>
             </a:fld>
             <a:endParaRPr lang="en-US"/>
           </a:p>
@@ -4599,7 +1783,7 @@
           <a:p>
             <a:fld id="{5BCAD085-E8A6-8845-BD4E-CB4CCA059FC4}" type="datetimeFigureOut">
               <a:rPr lang="en-US" smtClean="0"/>
-              <a:t>5/5/2025</a:t>
+              <a:t>5/6/2025</a:t>
             </a:fld>
             <a:endParaRPr lang="en-US"/>
           </a:p>
@@ -4716,7 +1900,7 @@
           <a:p>
             <a:fld id="{5BCAD085-E8A6-8845-BD4E-CB4CCA059FC4}" type="datetimeFigureOut">
               <a:rPr lang="en-US" smtClean="0"/>
-              <a:t>5/5/2025</a:t>
+              <a:t>5/6/2025</a:t>
             </a:fld>
             <a:endParaRPr lang="en-US"/>
           </a:p>
@@ -4811,7 +1995,7 @@
           <a:p>
             <a:fld id="{5BCAD085-E8A6-8845-BD4E-CB4CCA059FC4}" type="datetimeFigureOut">
               <a:rPr lang="en-US" smtClean="0"/>
-              <a:t>5/5/2025</a:t>
+              <a:t>5/6/2025</a:t>
             </a:fld>
             <a:endParaRPr lang="en-US"/>
           </a:p>
@@ -5086,7 +2270,7 @@
           <a:p>
             <a:fld id="{5BCAD085-E8A6-8845-BD4E-CB4CCA059FC4}" type="datetimeFigureOut">
               <a:rPr lang="en-US" smtClean="0"/>
-              <a:t>5/5/2025</a:t>
+              <a:t>5/6/2025</a:t>
             </a:fld>
             <a:endParaRPr lang="en-US"/>
           </a:p>
@@ -5338,7 +2522,7 @@
           <a:p>
             <a:fld id="{5BCAD085-E8A6-8845-BD4E-CB4CCA059FC4}" type="datetimeFigureOut">
               <a:rPr lang="en-US" smtClean="0"/>
-              <a:t>5/5/2025</a:t>
+              <a:t>5/6/2025</a:t>
             </a:fld>
             <a:endParaRPr lang="en-US"/>
           </a:p>
@@ -5549,7 +2733,7 @@
           <a:p>
             <a:fld id="{5BCAD085-E8A6-8845-BD4E-CB4CCA059FC4}" type="datetimeFigureOut">
               <a:rPr lang="en-US" smtClean="0"/>
-              <a:t>5/5/2025</a:t>
+              <a:t>5/6/2025</a:t>
             </a:fld>
             <a:endParaRPr lang="en-US"/>
           </a:p>
@@ -7069,7 +4253,7 @@
               </a:defRPr>
             </a:pPr>
             <a:r>
-              <a:rPr lang="en-US" sz="1700" dirty="0">
+              <a:rPr lang="en-US" sz="1700">
                 <a:solidFill>
                   <a:srgbClr val="595959"/>
                 </a:solidFill>
@@ -7154,7 +4338,7 @@
               </a:defRPr>
             </a:pPr>
             <a:r>
-              <a:rPr lang="en-US" sz="1700" dirty="0">
+              <a:rPr lang="en-US" sz="1700">
                 <a:solidFill>
                   <a:srgbClr val="595959"/>
                 </a:solidFill>
@@ -8139,7 +5323,7 @@
       </p:grpSpPr>
       <p:sp useBgFill="1">
         <p:nvSpPr>
-          <p:cNvPr id="51" name="Rectangle 50">
+          <p:cNvPr id="59" name="Rectangle 58">
             <a:extLst>
               <a:ext uri="{FF2B5EF4-FFF2-40B4-BE49-F238E27FC236}">
                 <a16:creationId xmlns:a16="http://schemas.microsoft.com/office/drawing/2014/main" id="{700E0F77-E936-4985-B7B1-B9823486AC33}"/>
@@ -8225,9 +5409,20 @@
           </a:bodyPr>
           <a:lstStyle/>
           <a:p>
-            <a:pPr defTabSz="914400"/>
-            <a:r>
-              <a:rPr lang="en-US" sz="2800"/>
+            <a:pPr algn="l" defTabSz="914400">
+              <a:lnSpc>
+                <a:spcPct val="90000"/>
+              </a:lnSpc>
+            </a:pPr>
+            <a:r>
+              <a:rPr lang="en-US" sz="2800" kern="1200">
+                <a:solidFill>
+                  <a:schemeClr val="tx1"/>
+                </a:solidFill>
+                <a:latin typeface="+mj-lt"/>
+                <a:ea typeface="+mj-ea"/>
+                <a:cs typeface="+mj-cs"/>
+              </a:rPr>
               <a:t>Average Input Time </a:t>
             </a:r>
           </a:p>
@@ -8235,7 +5430,7 @@
       </p:sp>
       <p:sp>
         <p:nvSpPr>
-          <p:cNvPr id="52" name="Rectangle 51">
+          <p:cNvPr id="61" name="Rectangle 60">
             <a:extLst>
               <a:ext uri="{FF2B5EF4-FFF2-40B4-BE49-F238E27FC236}">
                 <a16:creationId xmlns:a16="http://schemas.microsoft.com/office/drawing/2014/main" id="{95C8260E-968F-44E8-A823-ABB431311926}"/>
@@ -8298,7 +5493,7 @@
       </p:sp>
       <p:sp>
         <p:nvSpPr>
-          <p:cNvPr id="53" name="Rectangle 52">
+          <p:cNvPr id="63" name="Rectangle 62">
             <a:extLst>
               <a:ext uri="{FF2B5EF4-FFF2-40B4-BE49-F238E27FC236}">
                 <a16:creationId xmlns:a16="http://schemas.microsoft.com/office/drawing/2014/main" id="{2C1BBA94-3F40-40AA-8BB9-E69E25E537C1}"/>
@@ -8387,8 +5582,8 @@
         </p:blipFill>
         <p:spPr>
           <a:xfrm>
-            <a:off x="901268" y="257804"/>
-            <a:ext cx="7341462" cy="4072575"/>
+            <a:off x="460456" y="-2666"/>
+            <a:ext cx="8295128" cy="4601610"/>
           </a:xfrm>
           <a:prstGeom prst="rect">
             <a:avLst/>
@@ -8397,7 +5592,7 @@
       </p:pic>
       <p:sp>
         <p:nvSpPr>
-          <p:cNvPr id="54" name="Rectangle 53">
+          <p:cNvPr id="65" name="Rectangle 64">
             <a:extLst>
               <a:ext uri="{FF2B5EF4-FFF2-40B4-BE49-F238E27FC236}">
                 <a16:creationId xmlns:a16="http://schemas.microsoft.com/office/drawing/2014/main" id="{FE43805F-24A6-46A4-B19B-54F28347355C}"/>
@@ -8458,34 +5653,130 @@
           </a:p>
         </p:txBody>
       </p:sp>
-      <p:graphicFrame>
-        <p:nvGraphicFramePr>
-          <p:cNvPr id="38" name="TextBox 11">
+      <p:sp>
+        <p:nvSpPr>
+          <p:cNvPr id="3" name="TextBox 2">
             <a:extLst>
               <a:ext uri="{FF2B5EF4-FFF2-40B4-BE49-F238E27FC236}">
-                <a16:creationId xmlns:a16="http://schemas.microsoft.com/office/drawing/2014/main" id="{D8A1C1B5-047A-8E7E-9CDE-3B4129C37689}"/>
+                <a16:creationId xmlns:a16="http://schemas.microsoft.com/office/drawing/2014/main" id="{4B7A196E-8E95-E4E6-A039-242560CC399E}"/>
               </a:ext>
             </a:extLst>
           </p:cNvPr>
-          <p:cNvGraphicFramePr/>
-          <p:nvPr>
-            <p:extLst>
-              <p:ext uri="{D42A27DB-BD31-4B8C-83A1-F6EECF244321}">
-                <p14:modId xmlns:p14="http://schemas.microsoft.com/office/powerpoint/2010/main" val="3652498363"/>
-              </p:ext>
-            </p:extLst>
-          </p:nvPr>
-        </p:nvGraphicFramePr>
-        <p:xfrm>
-          <a:off x="3872039" y="4883544"/>
-          <a:ext cx="4940186" cy="1556907"/>
-        </p:xfrm>
-        <a:graphic>
-          <a:graphicData uri="http://schemas.openxmlformats.org/drawingml/2006/diagram">
-            <dgm:relIds xmlns:dgm="http://schemas.openxmlformats.org/drawingml/2006/diagram" xmlns:r="http://schemas.openxmlformats.org/officeDocument/2006/relationships" r:dm="rId3" r:lo="rId4" r:qs="rId5" r:cs="rId6"/>
-          </a:graphicData>
-        </a:graphic>
-      </p:graphicFrame>
+          <p:cNvSpPr txBox="1"/>
+          <p:nvPr/>
+        </p:nvSpPr>
+        <p:spPr>
+          <a:xfrm>
+            <a:off x="3872039" y="4883544"/>
+            <a:ext cx="4940186" cy="1556907"/>
+          </a:xfrm>
+          <a:prstGeom prst="rect">
+            <a:avLst/>
+          </a:prstGeom>
+        </p:spPr>
+        <p:txBody>
+          <a:bodyPr vert="horz" lIns="91440" tIns="45720" rIns="91440" bIns="45720" rtlCol="0" anchor="ctr">
+            <a:normAutofit lnSpcReduction="10000"/>
+          </a:bodyPr>
+          <a:lstStyle/>
+          <a:p>
+            <a:pPr marL="285750" indent="-228600" defTabSz="914400">
+              <a:lnSpc>
+                <a:spcPct val="90000"/>
+              </a:lnSpc>
+              <a:spcAft>
+                <a:spcPts val="600"/>
+              </a:spcAft>
+              <a:buFont typeface="Arial" panose="020B0604020202020204" pitchFamily="34" charset="0"/>
+              <a:buChar char="•"/>
+            </a:pPr>
+            <a:r>
+              <a:rPr lang="en-US" sz="1400" dirty="0"/>
+              <a:t>Tutorial Input Average</a:t>
+            </a:r>
+          </a:p>
+          <a:p>
+            <a:pPr marL="285750" indent="-228600" defTabSz="914400">
+              <a:lnSpc>
+                <a:spcPct val="90000"/>
+              </a:lnSpc>
+              <a:spcAft>
+                <a:spcPts val="600"/>
+              </a:spcAft>
+              <a:buFont typeface="Arial" panose="020B0604020202020204" pitchFamily="34" charset="0"/>
+              <a:buChar char="•"/>
+            </a:pPr>
+            <a:r>
+              <a:rPr lang="en-US" sz="1400" dirty="0"/>
+              <a:t>Glyph Lesson Input Average</a:t>
+            </a:r>
+          </a:p>
+          <a:p>
+            <a:pPr marL="285750" indent="-228600" defTabSz="914400">
+              <a:lnSpc>
+                <a:spcPct val="90000"/>
+              </a:lnSpc>
+              <a:spcAft>
+                <a:spcPts val="600"/>
+              </a:spcAft>
+              <a:buFont typeface="Arial" panose="020B0604020202020204" pitchFamily="34" charset="0"/>
+              <a:buChar char="•"/>
+            </a:pPr>
+            <a:r>
+              <a:rPr lang="en-US" sz="1400" dirty="0"/>
+              <a:t>Spell Lesson Input Average</a:t>
+            </a:r>
+          </a:p>
+          <a:p>
+            <a:pPr marL="285750" indent="-228600" defTabSz="914400">
+              <a:lnSpc>
+                <a:spcPct val="90000"/>
+              </a:lnSpc>
+              <a:spcAft>
+                <a:spcPts val="600"/>
+              </a:spcAft>
+              <a:buFont typeface="Arial" panose="020B0604020202020204" pitchFamily="34" charset="0"/>
+              <a:buChar char="•"/>
+            </a:pPr>
+            <a:r>
+              <a:rPr lang="en-US" sz="1400" dirty="0"/>
+              <a:t>Slowest: Gesture Two-Handed Combined</a:t>
+            </a:r>
+          </a:p>
+          <a:p>
+            <a:pPr marL="742950" lvl="1" indent="-228600" defTabSz="914400">
+              <a:lnSpc>
+                <a:spcPct val="90000"/>
+              </a:lnSpc>
+              <a:spcAft>
+                <a:spcPts val="600"/>
+              </a:spcAft>
+              <a:buFont typeface="Arial" panose="020B0604020202020204" pitchFamily="34" charset="0"/>
+              <a:buChar char="•"/>
+            </a:pPr>
+            <a:r>
+              <a:rPr lang="en-US" sz="1400" dirty="0"/>
+              <a:t>Less Present in the Tutorial Lesson </a:t>
+            </a:r>
+          </a:p>
+          <a:p>
+            <a:pPr marL="285750" indent="-228600" defTabSz="914400">
+              <a:lnSpc>
+                <a:spcPct val="90000"/>
+              </a:lnSpc>
+              <a:spcAft>
+                <a:spcPts val="600"/>
+              </a:spcAft>
+              <a:buFont typeface="Arial" panose="020B0604020202020204" pitchFamily="34" charset="0"/>
+              <a:buChar char="•"/>
+            </a:pPr>
+            <a:r>
+              <a:rPr lang="en-US" sz="1400" dirty="0"/>
+              <a:t>All other control types are in the normal range of each other</a:t>
+            </a:r>
+          </a:p>
+        </p:txBody>
+      </p:sp>
     </p:spTree>
     <p:extLst>
       <p:ext uri="{BB962C8B-B14F-4D97-AF65-F5344CB8AC3E}">
@@ -8500,440 +5791,6 @@
 </file>
 
 <file path=ppt/slides/slide14.xml><?xml version="1.0" encoding="utf-8"?>
-<p:sld xmlns:a="http://schemas.openxmlformats.org/drawingml/2006/main" xmlns:r="http://schemas.openxmlformats.org/officeDocument/2006/relationships" xmlns:p="http://schemas.openxmlformats.org/presentationml/2006/main">
-  <p:cSld>
-    <p:bg>
-      <p:bgPr>
-        <a:solidFill>
-          <a:schemeClr val="bg1"/>
-        </a:solidFill>
-        <a:effectLst/>
-      </p:bgPr>
-    </p:bg>
-    <p:spTree>
-      <p:nvGrpSpPr>
-        <p:cNvPr id="1" name="">
-          <a:extLst>
-            <a:ext uri="{FF2B5EF4-FFF2-40B4-BE49-F238E27FC236}">
-              <a16:creationId xmlns:a16="http://schemas.microsoft.com/office/drawing/2014/main" id="{236D9C1D-5F5C-3031-7D83-4AE326F8C36C}"/>
-            </a:ext>
-          </a:extLst>
-        </p:cNvPr>
-        <p:cNvGrpSpPr/>
-        <p:nvPr/>
-      </p:nvGrpSpPr>
-      <p:grpSpPr>
-        <a:xfrm>
-          <a:off x="0" y="0"/>
-          <a:ext cx="0" cy="0"/>
-          <a:chOff x="0" y="0"/>
-          <a:chExt cx="0" cy="0"/>
-        </a:xfrm>
-      </p:grpSpPr>
-      <p:sp useBgFill="1">
-        <p:nvSpPr>
-          <p:cNvPr id="54" name="Rectangle 53">
-            <a:extLst>
-              <a:ext uri="{FF2B5EF4-FFF2-40B4-BE49-F238E27FC236}">
-                <a16:creationId xmlns:a16="http://schemas.microsoft.com/office/drawing/2014/main" id="{700E0F77-E936-4985-B7B1-B9823486AC33}"/>
-              </a:ext>
-              <a:ext uri="{C183D7F6-B498-43B3-948B-1728B52AA6E4}">
-                <adec:decorative xmlns:adec="http://schemas.microsoft.com/office/drawing/2017/decorative" val="1"/>
-              </a:ext>
-            </a:extLst>
-          </p:cNvPr>
-          <p:cNvSpPr>
-            <a:spLocks noGrp="1" noRot="1" noChangeAspect="1" noMove="1" noResize="1" noEditPoints="1" noAdjustHandles="1" noChangeArrowheads="1" noChangeShapeType="1" noTextEdit="1"/>
-          </p:cNvSpPr>
-          <p:nvPr>
-            <p:extLst>
-              <p:ext uri="{386F3935-93C4-4BCD-93E2-E3B085C9AB24}">
-                <p16:designElem xmlns:p16="http://schemas.microsoft.com/office/powerpoint/2015/main" val="1"/>
-              </p:ext>
-            </p:extLst>
-          </p:nvPr>
-        </p:nvSpPr>
-        <p:spPr>
-          <a:xfrm>
-            <a:off x="0" y="0"/>
-            <a:ext cx="9143999" cy="6857365"/>
-          </a:xfrm>
-          <a:prstGeom prst="rect">
-            <a:avLst/>
-          </a:prstGeom>
-          <a:ln>
-            <a:noFill/>
-          </a:ln>
-        </p:spPr>
-        <p:style>
-          <a:lnRef idx="2">
-            <a:schemeClr val="accent1">
-              <a:shade val="50000"/>
-            </a:schemeClr>
-          </a:lnRef>
-          <a:fillRef idx="1">
-            <a:schemeClr val="accent1"/>
-          </a:fillRef>
-          <a:effectRef idx="0">
-            <a:schemeClr val="accent1"/>
-          </a:effectRef>
-          <a:fontRef idx="minor">
-            <a:schemeClr val="lt1"/>
-          </a:fontRef>
-        </p:style>
-        <p:txBody>
-          <a:bodyPr rtlCol="0" anchor="ctr"/>
-          <a:lstStyle/>
-          <a:p>
-            <a:pPr algn="ctr"/>
-            <a:endParaRPr lang="en-US"/>
-          </a:p>
-        </p:txBody>
-      </p:sp>
-      <p:sp>
-        <p:nvSpPr>
-          <p:cNvPr id="2" name="Title 1">
-            <a:extLst>
-              <a:ext uri="{FF2B5EF4-FFF2-40B4-BE49-F238E27FC236}">
-                <a16:creationId xmlns:a16="http://schemas.microsoft.com/office/drawing/2014/main" id="{C0618B37-7822-F6BF-B3EF-C2955C8E20DB}"/>
-              </a:ext>
-            </a:extLst>
-          </p:cNvPr>
-          <p:cNvSpPr>
-            <a:spLocks noGrp="1"/>
-          </p:cNvSpPr>
-          <p:nvPr>
-            <p:ph type="title"/>
-          </p:nvPr>
-        </p:nvSpPr>
-        <p:spPr>
-          <a:xfrm>
-            <a:off x="388416" y="4883544"/>
-            <a:ext cx="2907065" cy="1556907"/>
-          </a:xfrm>
-        </p:spPr>
-        <p:txBody>
-          <a:bodyPr vert="horz" lIns="91440" tIns="45720" rIns="91440" bIns="45720" rtlCol="0" anchor="ctr">
-            <a:normAutofit/>
-          </a:bodyPr>
-          <a:lstStyle/>
-          <a:p>
-            <a:pPr algn="l" defTabSz="914400">
-              <a:lnSpc>
-                <a:spcPct val="90000"/>
-              </a:lnSpc>
-            </a:pPr>
-            <a:r>
-              <a:rPr lang="en-US" sz="2800" kern="1200">
-                <a:solidFill>
-                  <a:schemeClr val="tx1"/>
-                </a:solidFill>
-                <a:latin typeface="+mj-lt"/>
-                <a:ea typeface="+mj-ea"/>
-                <a:cs typeface="+mj-cs"/>
-              </a:rPr>
-              <a:t>Completion Time </a:t>
-            </a:r>
-          </a:p>
-        </p:txBody>
-      </p:sp>
-      <p:sp>
-        <p:nvSpPr>
-          <p:cNvPr id="56" name="Rectangle 55">
-            <a:extLst>
-              <a:ext uri="{FF2B5EF4-FFF2-40B4-BE49-F238E27FC236}">
-                <a16:creationId xmlns:a16="http://schemas.microsoft.com/office/drawing/2014/main" id="{95C8260E-968F-44E8-A823-ABB431311926}"/>
-              </a:ext>
-              <a:ext uri="{C183D7F6-B498-43B3-948B-1728B52AA6E4}">
-                <adec:decorative xmlns:adec="http://schemas.microsoft.com/office/drawing/2017/decorative" val="1"/>
-              </a:ext>
-            </a:extLst>
-          </p:cNvPr>
-          <p:cNvSpPr>
-            <a:spLocks noGrp="1" noRot="1" noChangeAspect="1" noMove="1" noResize="1" noEditPoints="1" noAdjustHandles="1" noChangeArrowheads="1" noChangeShapeType="1" noTextEdit="1"/>
-          </p:cNvSpPr>
-          <p:nvPr>
-            <p:extLst>
-              <p:ext uri="{386F3935-93C4-4BCD-93E2-E3B085C9AB24}">
-                <p16:designElem xmlns:p16="http://schemas.microsoft.com/office/powerpoint/2015/main" val="1"/>
-              </p:ext>
-            </p:extLst>
-          </p:nvPr>
-        </p:nvSpPr>
-        <p:spPr>
-          <a:xfrm>
-            <a:off x="0" y="0"/>
-            <a:ext cx="9144000" cy="865848"/>
-          </a:xfrm>
-          <a:prstGeom prst="rect">
-            <a:avLst/>
-          </a:prstGeom>
-          <a:solidFill>
-            <a:schemeClr val="accent4"/>
-          </a:solidFill>
-          <a:ln>
-            <a:noFill/>
-          </a:ln>
-        </p:spPr>
-        <p:style>
-          <a:lnRef idx="2">
-            <a:schemeClr val="accent1">
-              <a:shade val="50000"/>
-            </a:schemeClr>
-          </a:lnRef>
-          <a:fillRef idx="1">
-            <a:schemeClr val="accent1"/>
-          </a:fillRef>
-          <a:effectRef idx="0">
-            <a:schemeClr val="accent1"/>
-          </a:effectRef>
-          <a:fontRef idx="minor">
-            <a:schemeClr val="lt1"/>
-          </a:fontRef>
-        </p:style>
-        <p:txBody>
-          <a:bodyPr rtlCol="0" anchor="ctr"/>
-          <a:lstStyle/>
-          <a:p>
-            <a:pPr algn="ctr"/>
-            <a:endParaRPr lang="en-US"/>
-          </a:p>
-        </p:txBody>
-      </p:sp>
-      <p:sp>
-        <p:nvSpPr>
-          <p:cNvPr id="58" name="Rectangle 57">
-            <a:extLst>
-              <a:ext uri="{FF2B5EF4-FFF2-40B4-BE49-F238E27FC236}">
-                <a16:creationId xmlns:a16="http://schemas.microsoft.com/office/drawing/2014/main" id="{2C1BBA94-3F40-40AA-8BB9-E69E25E537C1}"/>
-              </a:ext>
-              <a:ext uri="{C183D7F6-B498-43B3-948B-1728B52AA6E4}">
-                <adec:decorative xmlns:adec="http://schemas.microsoft.com/office/drawing/2017/decorative" val="1"/>
-              </a:ext>
-            </a:extLst>
-          </p:cNvPr>
-          <p:cNvSpPr>
-            <a:spLocks noGrp="1" noRot="1" noChangeAspect="1" noMove="1" noResize="1" noEditPoints="1" noAdjustHandles="1" noChangeArrowheads="1" noChangeShapeType="1" noTextEdit="1"/>
-          </p:cNvSpPr>
-          <p:nvPr>
-            <p:extLst>
-              <p:ext uri="{386F3935-93C4-4BCD-93E2-E3B085C9AB24}">
-                <p16:designElem xmlns:p16="http://schemas.microsoft.com/office/powerpoint/2015/main" val="1"/>
-              </p:ext>
-            </p:extLst>
-          </p:nvPr>
-        </p:nvSpPr>
-        <p:spPr>
-          <a:xfrm>
-            <a:off x="388416" y="0"/>
-            <a:ext cx="8423809" cy="4588184"/>
-          </a:xfrm>
-          <a:prstGeom prst="rect">
-            <a:avLst/>
-          </a:prstGeom>
-          <a:solidFill>
-            <a:schemeClr val="bg1"/>
-          </a:solidFill>
-          <a:ln>
-            <a:noFill/>
-          </a:ln>
-          <a:effectLst>
-            <a:outerShdw blurRad="139700" dist="127000" dir="5400000" algn="t" rotWithShape="0">
-              <a:prstClr val="black">
-                <a:alpha val="15000"/>
-              </a:prstClr>
-            </a:outerShdw>
-          </a:effectLst>
-        </p:spPr>
-        <p:style>
-          <a:lnRef idx="2">
-            <a:schemeClr val="accent1">
-              <a:shade val="50000"/>
-            </a:schemeClr>
-          </a:lnRef>
-          <a:fillRef idx="1">
-            <a:schemeClr val="accent1"/>
-          </a:fillRef>
-          <a:effectRef idx="0">
-            <a:schemeClr val="accent1"/>
-          </a:effectRef>
-          <a:fontRef idx="minor">
-            <a:schemeClr val="lt1"/>
-          </a:fontRef>
-        </p:style>
-        <p:txBody>
-          <a:bodyPr rtlCol="0" anchor="ctr"/>
-          <a:lstStyle/>
-          <a:p>
-            <a:pPr algn="ctr"/>
-            <a:endParaRPr lang="en-US"/>
-          </a:p>
-        </p:txBody>
-      </p:sp>
-      <p:pic>
-        <p:nvPicPr>
-          <p:cNvPr id="17" name="Picture 16" descr="A screen shot of a computer&#10;&#10;AI-generated content may be incorrect.">
-            <a:extLst>
-              <a:ext uri="{FF2B5EF4-FFF2-40B4-BE49-F238E27FC236}">
-                <a16:creationId xmlns:a16="http://schemas.microsoft.com/office/drawing/2014/main" id="{F0220145-9AA1-7146-8407-004C20E2571D}"/>
-              </a:ext>
-            </a:extLst>
-          </p:cNvPr>
-          <p:cNvPicPr>
-            <a:picLocks noChangeAspect="1"/>
-          </p:cNvPicPr>
-          <p:nvPr/>
-        </p:nvPicPr>
-        <p:blipFill>
-          <a:blip r:embed="rId2"/>
-          <a:stretch>
-            <a:fillRect/>
-          </a:stretch>
-        </p:blipFill>
-        <p:spPr>
-          <a:xfrm>
-            <a:off x="1259108" y="364142"/>
-            <a:ext cx="6697824" cy="3867993"/>
-          </a:xfrm>
-          <a:prstGeom prst="rect">
-            <a:avLst/>
-          </a:prstGeom>
-        </p:spPr>
-      </p:pic>
-      <p:sp>
-        <p:nvSpPr>
-          <p:cNvPr id="60" name="Rectangle 59">
-            <a:extLst>
-              <a:ext uri="{FF2B5EF4-FFF2-40B4-BE49-F238E27FC236}">
-                <a16:creationId xmlns:a16="http://schemas.microsoft.com/office/drawing/2014/main" id="{FE43805F-24A6-46A4-B19B-54F28347355C}"/>
-              </a:ext>
-              <a:ext uri="{C183D7F6-B498-43B3-948B-1728B52AA6E4}">
-                <adec:decorative xmlns:adec="http://schemas.microsoft.com/office/drawing/2017/decorative" val="1"/>
-              </a:ext>
-            </a:extLst>
-          </p:cNvPr>
-          <p:cNvSpPr>
-            <a:spLocks noGrp="1" noRot="1" noChangeAspect="1" noMove="1" noResize="1" noEditPoints="1" noAdjustHandles="1" noChangeArrowheads="1" noChangeShapeType="1" noTextEdit="1"/>
-          </p:cNvSpPr>
-          <p:nvPr>
-            <p:extLst>
-              <p:ext uri="{386F3935-93C4-4BCD-93E2-E3B085C9AB24}">
-                <p16:designElem xmlns:p16="http://schemas.microsoft.com/office/powerpoint/2015/main" val="1"/>
-              </p:ext>
-            </p:extLst>
-          </p:nvPr>
-        </p:nvSpPr>
-        <p:spPr>
-          <a:xfrm rot="5400000" flipH="1">
-            <a:off x="2817950" y="5666847"/>
-            <a:ext cx="1463040" cy="34289"/>
-          </a:xfrm>
-          <a:prstGeom prst="rect">
-            <a:avLst/>
-          </a:prstGeom>
-          <a:solidFill>
-            <a:schemeClr val="accent4"/>
-          </a:solidFill>
-          <a:ln>
-            <a:noFill/>
-          </a:ln>
-        </p:spPr>
-        <p:style>
-          <a:lnRef idx="2">
-            <a:schemeClr val="accent1">
-              <a:shade val="50000"/>
-            </a:schemeClr>
-          </a:lnRef>
-          <a:fillRef idx="1">
-            <a:schemeClr val="accent1"/>
-          </a:fillRef>
-          <a:effectRef idx="0">
-            <a:schemeClr val="accent1"/>
-          </a:effectRef>
-          <a:fontRef idx="minor">
-            <a:schemeClr val="lt1"/>
-          </a:fontRef>
-        </p:style>
-        <p:txBody>
-          <a:bodyPr rtlCol="0" anchor="ctr"/>
-          <a:lstStyle/>
-          <a:p>
-            <a:pPr algn="ctr"/>
-            <a:endParaRPr lang="en-US"/>
-          </a:p>
-        </p:txBody>
-      </p:sp>
-      <p:sp>
-        <p:nvSpPr>
-          <p:cNvPr id="12" name="TextBox 11">
-            <a:extLst>
-              <a:ext uri="{FF2B5EF4-FFF2-40B4-BE49-F238E27FC236}">
-                <a16:creationId xmlns:a16="http://schemas.microsoft.com/office/drawing/2014/main" id="{16B29591-5089-6022-BC4E-6E26CC6DE102}"/>
-              </a:ext>
-            </a:extLst>
-          </p:cNvPr>
-          <p:cNvSpPr txBox="1"/>
-          <p:nvPr/>
-        </p:nvSpPr>
-        <p:spPr>
-          <a:xfrm>
-            <a:off x="3872039" y="4883544"/>
-            <a:ext cx="4940186" cy="1556907"/>
-          </a:xfrm>
-          <a:prstGeom prst="rect">
-            <a:avLst/>
-          </a:prstGeom>
-        </p:spPr>
-        <p:txBody>
-          <a:bodyPr vert="horz" lIns="91440" tIns="45720" rIns="91440" bIns="45720" rtlCol="0" anchor="ctr">
-            <a:normAutofit/>
-          </a:bodyPr>
-          <a:lstStyle/>
-          <a:p>
-            <a:pPr marL="285750" indent="-228600" defTabSz="914400">
-              <a:lnSpc>
-                <a:spcPct val="90000"/>
-              </a:lnSpc>
-              <a:spcAft>
-                <a:spcPts val="600"/>
-              </a:spcAft>
-              <a:buFont typeface="Arial" panose="020B0604020202020204" pitchFamily="34" charset="0"/>
-              <a:buChar char="•"/>
-            </a:pPr>
-            <a:r>
-              <a:rPr lang="en-US" sz="1600"/>
-              <a:t>Spell lesson input average  </a:t>
-            </a:r>
-          </a:p>
-          <a:p>
-            <a:pPr marL="285750" indent="-228600" defTabSz="914400">
-              <a:lnSpc>
-                <a:spcPct val="90000"/>
-              </a:lnSpc>
-              <a:spcAft>
-                <a:spcPts val="600"/>
-              </a:spcAft>
-              <a:buFont typeface="Arial" panose="020B0604020202020204" pitchFamily="34" charset="0"/>
-              <a:buChar char="•"/>
-            </a:pPr>
-            <a:endParaRPr lang="en-US" sz="1600"/>
-          </a:p>
-        </p:txBody>
-      </p:sp>
-    </p:spTree>
-    <p:extLst>
-      <p:ext uri="{BB962C8B-B14F-4D97-AF65-F5344CB8AC3E}">
-        <p14:creationId xmlns:p14="http://schemas.microsoft.com/office/powerpoint/2010/main" val="858429038"/>
-      </p:ext>
-    </p:extLst>
-  </p:cSld>
-  <p:clrMapOvr>
-    <a:masterClrMapping/>
-  </p:clrMapOvr>
-</p:sld>
-</file>
-
-<file path=ppt/slides/slide15.xml><?xml version="1.0" encoding="utf-8"?>
 <p:sld xmlns:a="http://schemas.openxmlformats.org/drawingml/2006/main" xmlns:r="http://schemas.openxmlformats.org/officeDocument/2006/relationships" xmlns:p="http://schemas.openxmlformats.org/presentationml/2006/main">
   <p:cSld>
     <p:bg>
@@ -9042,13 +5899,13 @@
         </p:nvSpPr>
         <p:spPr>
           <a:xfrm>
-            <a:off x="5409727" y="501651"/>
-            <a:ext cx="2710751" cy="1716255"/>
+            <a:off x="5409727" y="1567453"/>
+            <a:ext cx="2710751" cy="663677"/>
           </a:xfrm>
         </p:spPr>
         <p:txBody>
           <a:bodyPr vert="horz" lIns="91440" tIns="45720" rIns="91440" bIns="45720" rtlCol="0" anchor="b">
-            <a:normAutofit/>
+            <a:normAutofit fontScale="90000"/>
           </a:bodyPr>
           <a:lstStyle/>
           <a:p>
@@ -9306,8 +6163,8 @@
         </p:nvSpPr>
         <p:spPr>
           <a:xfrm>
-            <a:off x="5409727" y="2645922"/>
-            <a:ext cx="2710751" cy="3710427"/>
+            <a:off x="5249373" y="2421362"/>
+            <a:ext cx="3279894" cy="5101896"/>
           </a:xfrm>
           <a:prstGeom prst="rect">
             <a:avLst/>
@@ -9331,8 +6188,69 @@
             </a:pPr>
             <a:r>
               <a:rPr lang="en-US" sz="1700" dirty="0"/>
-              <a:t>Spell lesson input average  </a:t>
-            </a:r>
+              <a:t>Gesture One-Hand was significantly less accurate in the tutorial</a:t>
+            </a:r>
+          </a:p>
+          <a:p>
+            <a:pPr marL="285750" indent="-228600" defTabSz="914400">
+              <a:lnSpc>
+                <a:spcPct val="90000"/>
+              </a:lnSpc>
+              <a:spcAft>
+                <a:spcPts val="600"/>
+              </a:spcAft>
+              <a:buFont typeface="Arial" panose="020B0604020202020204" pitchFamily="34" charset="0"/>
+              <a:buChar char="•"/>
+            </a:pPr>
+            <a:r>
+              <a:rPr lang="en-US" sz="1700" dirty="0"/>
+              <a:t>During the other lessons, it became more accurate</a:t>
+            </a:r>
+          </a:p>
+          <a:p>
+            <a:pPr marL="285750" indent="-228600" defTabSz="914400">
+              <a:lnSpc>
+                <a:spcPct val="90000"/>
+              </a:lnSpc>
+              <a:spcAft>
+                <a:spcPts val="600"/>
+              </a:spcAft>
+              <a:buFont typeface="Arial" panose="020B0604020202020204" pitchFamily="34" charset="0"/>
+              <a:buChar char="•"/>
+            </a:pPr>
+            <a:r>
+              <a:rPr lang="en-US" sz="1700" dirty="0"/>
+              <a:t>Over spell and glyph lessons, gestures were slightly more accurate</a:t>
+            </a:r>
+          </a:p>
+          <a:p>
+            <a:pPr marL="285750" indent="-228600" defTabSz="914400">
+              <a:lnSpc>
+                <a:spcPct val="90000"/>
+              </a:lnSpc>
+              <a:spcAft>
+                <a:spcPts val="600"/>
+              </a:spcAft>
+              <a:buFont typeface="Arial" panose="020B0604020202020204" pitchFamily="34" charset="0"/>
+              <a:buChar char="•"/>
+            </a:pPr>
+            <a:r>
+              <a:rPr lang="en-US" sz="1700" dirty="0"/>
+              <a:t>Gesture Two-Hand Combined was accurate to learn, but hard to reproduce over the lessons.</a:t>
+            </a:r>
+          </a:p>
+          <a:p>
+            <a:pPr marL="285750" indent="-228600" defTabSz="914400">
+              <a:lnSpc>
+                <a:spcPct val="90000"/>
+              </a:lnSpc>
+              <a:spcAft>
+                <a:spcPts val="600"/>
+              </a:spcAft>
+              <a:buFont typeface="Arial" panose="020B0604020202020204" pitchFamily="34" charset="0"/>
+              <a:buChar char="•"/>
+            </a:pPr>
+            <a:endParaRPr lang="en-US" sz="1700" dirty="0"/>
           </a:p>
           <a:p>
             <a:pPr marL="285750" indent="-228600" defTabSz="914400">
@@ -9639,6 +6557,490 @@
     <p:extLst>
       <p:ext uri="{BB962C8B-B14F-4D97-AF65-F5344CB8AC3E}">
         <p14:creationId xmlns:p14="http://schemas.microsoft.com/office/powerpoint/2010/main" val="1960050473"/>
+      </p:ext>
+    </p:extLst>
+  </p:cSld>
+  <p:clrMapOvr>
+    <a:masterClrMapping/>
+  </p:clrMapOvr>
+</p:sld>
+</file>
+
+<file path=ppt/slides/slide15.xml><?xml version="1.0" encoding="utf-8"?>
+<p:sld xmlns:a="http://schemas.openxmlformats.org/drawingml/2006/main" xmlns:r="http://schemas.openxmlformats.org/officeDocument/2006/relationships" xmlns:p="http://schemas.openxmlformats.org/presentationml/2006/main">
+  <p:cSld>
+    <p:bg>
+      <p:bgPr>
+        <a:solidFill>
+          <a:schemeClr val="bg1"/>
+        </a:solidFill>
+        <a:effectLst/>
+      </p:bgPr>
+    </p:bg>
+    <p:spTree>
+      <p:nvGrpSpPr>
+        <p:cNvPr id="1" name="">
+          <a:extLst>
+            <a:ext uri="{FF2B5EF4-FFF2-40B4-BE49-F238E27FC236}">
+              <a16:creationId xmlns:a16="http://schemas.microsoft.com/office/drawing/2014/main" id="{7C990F14-8CE6-2E1F-C05A-981C714CAA38}"/>
+            </a:ext>
+          </a:extLst>
+        </p:cNvPr>
+        <p:cNvGrpSpPr/>
+        <p:nvPr/>
+      </p:nvGrpSpPr>
+      <p:grpSpPr>
+        <a:xfrm>
+          <a:off x="0" y="0"/>
+          <a:ext cx="0" cy="0"/>
+          <a:chOff x="0" y="0"/>
+          <a:chExt cx="0" cy="0"/>
+        </a:xfrm>
+      </p:grpSpPr>
+      <p:sp useBgFill="1">
+        <p:nvSpPr>
+          <p:cNvPr id="59" name="Rectangle 58">
+            <a:extLst>
+              <a:ext uri="{FF2B5EF4-FFF2-40B4-BE49-F238E27FC236}">
+                <a16:creationId xmlns:a16="http://schemas.microsoft.com/office/drawing/2014/main" id="{C6D6ECC8-F4A2-1E33-08D3-DDECABA26D45}"/>
+              </a:ext>
+              <a:ext uri="{C183D7F6-B498-43B3-948B-1728B52AA6E4}">
+                <adec:decorative xmlns:adec="http://schemas.microsoft.com/office/drawing/2017/decorative" val="1"/>
+              </a:ext>
+            </a:extLst>
+          </p:cNvPr>
+          <p:cNvSpPr>
+            <a:spLocks noGrp="1" noRot="1" noChangeAspect="1" noMove="1" noResize="1" noEditPoints="1" noAdjustHandles="1" noChangeArrowheads="1" noChangeShapeType="1" noTextEdit="1"/>
+          </p:cNvSpPr>
+          <p:nvPr>
+            <p:extLst>
+              <p:ext uri="{386F3935-93C4-4BCD-93E2-E3B085C9AB24}">
+                <p16:designElem xmlns:p16="http://schemas.microsoft.com/office/powerpoint/2015/main" val="1"/>
+              </p:ext>
+            </p:extLst>
+          </p:nvPr>
+        </p:nvSpPr>
+        <p:spPr>
+          <a:xfrm>
+            <a:off x="0" y="0"/>
+            <a:ext cx="9143999" cy="6857365"/>
+          </a:xfrm>
+          <a:prstGeom prst="rect">
+            <a:avLst/>
+          </a:prstGeom>
+          <a:ln>
+            <a:noFill/>
+          </a:ln>
+        </p:spPr>
+        <p:style>
+          <a:lnRef idx="2">
+            <a:schemeClr val="accent1">
+              <a:shade val="50000"/>
+            </a:schemeClr>
+          </a:lnRef>
+          <a:fillRef idx="1">
+            <a:schemeClr val="accent1"/>
+          </a:fillRef>
+          <a:effectRef idx="0">
+            <a:schemeClr val="accent1"/>
+          </a:effectRef>
+          <a:fontRef idx="minor">
+            <a:schemeClr val="lt1"/>
+          </a:fontRef>
+        </p:style>
+        <p:txBody>
+          <a:bodyPr rtlCol="0" anchor="ctr"/>
+          <a:lstStyle/>
+          <a:p>
+            <a:pPr algn="ctr"/>
+            <a:endParaRPr lang="en-US"/>
+          </a:p>
+        </p:txBody>
+      </p:sp>
+      <p:sp>
+        <p:nvSpPr>
+          <p:cNvPr id="2" name="Title 1">
+            <a:extLst>
+              <a:ext uri="{FF2B5EF4-FFF2-40B4-BE49-F238E27FC236}">
+                <a16:creationId xmlns:a16="http://schemas.microsoft.com/office/drawing/2014/main" id="{0C85708D-BAA8-69CB-9ADA-0C17E1A66304}"/>
+              </a:ext>
+            </a:extLst>
+          </p:cNvPr>
+          <p:cNvSpPr>
+            <a:spLocks noGrp="1"/>
+          </p:cNvSpPr>
+          <p:nvPr>
+            <p:ph type="title"/>
+          </p:nvPr>
+        </p:nvSpPr>
+        <p:spPr>
+          <a:xfrm>
+            <a:off x="388416" y="4883544"/>
+            <a:ext cx="2907065" cy="1556907"/>
+          </a:xfrm>
+        </p:spPr>
+        <p:txBody>
+          <a:bodyPr vert="horz" lIns="91440" tIns="45720" rIns="91440" bIns="45720" rtlCol="0" anchor="ctr">
+            <a:normAutofit/>
+          </a:bodyPr>
+          <a:lstStyle/>
+          <a:p>
+            <a:pPr algn="l" defTabSz="914400">
+              <a:lnSpc>
+                <a:spcPct val="90000"/>
+              </a:lnSpc>
+            </a:pPr>
+            <a:r>
+              <a:rPr lang="en-US" sz="2800" kern="1200" dirty="0">
+                <a:solidFill>
+                  <a:schemeClr val="tx1"/>
+                </a:solidFill>
+                <a:latin typeface="+mj-lt"/>
+                <a:ea typeface="+mj-ea"/>
+                <a:cs typeface="+mj-cs"/>
+              </a:rPr>
+              <a:t>Completion Time </a:t>
+            </a:r>
+          </a:p>
+        </p:txBody>
+      </p:sp>
+      <p:sp>
+        <p:nvSpPr>
+          <p:cNvPr id="61" name="Rectangle 60">
+            <a:extLst>
+              <a:ext uri="{FF2B5EF4-FFF2-40B4-BE49-F238E27FC236}">
+                <a16:creationId xmlns:a16="http://schemas.microsoft.com/office/drawing/2014/main" id="{0E9810BB-D0AA-0E15-623D-3F790CD538EF}"/>
+              </a:ext>
+              <a:ext uri="{C183D7F6-B498-43B3-948B-1728B52AA6E4}">
+                <adec:decorative xmlns:adec="http://schemas.microsoft.com/office/drawing/2017/decorative" val="1"/>
+              </a:ext>
+            </a:extLst>
+          </p:cNvPr>
+          <p:cNvSpPr>
+            <a:spLocks noGrp="1" noRot="1" noChangeAspect="1" noMove="1" noResize="1" noEditPoints="1" noAdjustHandles="1" noChangeArrowheads="1" noChangeShapeType="1" noTextEdit="1"/>
+          </p:cNvSpPr>
+          <p:nvPr>
+            <p:extLst>
+              <p:ext uri="{386F3935-93C4-4BCD-93E2-E3B085C9AB24}">
+                <p16:designElem xmlns:p16="http://schemas.microsoft.com/office/powerpoint/2015/main" val="1"/>
+              </p:ext>
+            </p:extLst>
+          </p:nvPr>
+        </p:nvSpPr>
+        <p:spPr>
+          <a:xfrm>
+            <a:off x="0" y="0"/>
+            <a:ext cx="9144000" cy="865848"/>
+          </a:xfrm>
+          <a:prstGeom prst="rect">
+            <a:avLst/>
+          </a:prstGeom>
+          <a:solidFill>
+            <a:schemeClr val="accent4"/>
+          </a:solidFill>
+          <a:ln>
+            <a:noFill/>
+          </a:ln>
+        </p:spPr>
+        <p:style>
+          <a:lnRef idx="2">
+            <a:schemeClr val="accent1">
+              <a:shade val="50000"/>
+            </a:schemeClr>
+          </a:lnRef>
+          <a:fillRef idx="1">
+            <a:schemeClr val="accent1"/>
+          </a:fillRef>
+          <a:effectRef idx="0">
+            <a:schemeClr val="accent1"/>
+          </a:effectRef>
+          <a:fontRef idx="minor">
+            <a:schemeClr val="lt1"/>
+          </a:fontRef>
+        </p:style>
+        <p:txBody>
+          <a:bodyPr rtlCol="0" anchor="ctr"/>
+          <a:lstStyle/>
+          <a:p>
+            <a:pPr algn="ctr"/>
+            <a:endParaRPr lang="en-US"/>
+          </a:p>
+        </p:txBody>
+      </p:sp>
+      <p:sp>
+        <p:nvSpPr>
+          <p:cNvPr id="63" name="Rectangle 62">
+            <a:extLst>
+              <a:ext uri="{FF2B5EF4-FFF2-40B4-BE49-F238E27FC236}">
+                <a16:creationId xmlns:a16="http://schemas.microsoft.com/office/drawing/2014/main" id="{6966EBED-68AA-33C1-B406-47827B64F83B}"/>
+              </a:ext>
+              <a:ext uri="{C183D7F6-B498-43B3-948B-1728B52AA6E4}">
+                <adec:decorative xmlns:adec="http://schemas.microsoft.com/office/drawing/2017/decorative" val="1"/>
+              </a:ext>
+            </a:extLst>
+          </p:cNvPr>
+          <p:cNvSpPr>
+            <a:spLocks noGrp="1" noRot="1" noChangeAspect="1" noMove="1" noResize="1" noEditPoints="1" noAdjustHandles="1" noChangeArrowheads="1" noChangeShapeType="1" noTextEdit="1"/>
+          </p:cNvSpPr>
+          <p:nvPr>
+            <p:extLst>
+              <p:ext uri="{386F3935-93C4-4BCD-93E2-E3B085C9AB24}">
+                <p16:designElem xmlns:p16="http://schemas.microsoft.com/office/powerpoint/2015/main" val="1"/>
+              </p:ext>
+            </p:extLst>
+          </p:nvPr>
+        </p:nvSpPr>
+        <p:spPr>
+          <a:xfrm>
+            <a:off x="388416" y="0"/>
+            <a:ext cx="8423809" cy="4588184"/>
+          </a:xfrm>
+          <a:prstGeom prst="rect">
+            <a:avLst/>
+          </a:prstGeom>
+          <a:solidFill>
+            <a:schemeClr val="bg1"/>
+          </a:solidFill>
+          <a:ln>
+            <a:noFill/>
+          </a:ln>
+          <a:effectLst>
+            <a:outerShdw blurRad="139700" dist="127000" dir="5400000" algn="t" rotWithShape="0">
+              <a:prstClr val="black">
+                <a:alpha val="15000"/>
+              </a:prstClr>
+            </a:outerShdw>
+          </a:effectLst>
+        </p:spPr>
+        <p:style>
+          <a:lnRef idx="2">
+            <a:schemeClr val="accent1">
+              <a:shade val="50000"/>
+            </a:schemeClr>
+          </a:lnRef>
+          <a:fillRef idx="1">
+            <a:schemeClr val="accent1"/>
+          </a:fillRef>
+          <a:effectRef idx="0">
+            <a:schemeClr val="accent1"/>
+          </a:effectRef>
+          <a:fontRef idx="minor">
+            <a:schemeClr val="lt1"/>
+          </a:fontRef>
+        </p:style>
+        <p:txBody>
+          <a:bodyPr rtlCol="0" anchor="ctr"/>
+          <a:lstStyle/>
+          <a:p>
+            <a:pPr algn="ctr"/>
+            <a:endParaRPr lang="en-US"/>
+          </a:p>
+        </p:txBody>
+      </p:sp>
+      <p:pic>
+        <p:nvPicPr>
+          <p:cNvPr id="36" name="Picture 35">
+            <a:extLst>
+              <a:ext uri="{FF2B5EF4-FFF2-40B4-BE49-F238E27FC236}">
+                <a16:creationId xmlns:a16="http://schemas.microsoft.com/office/drawing/2014/main" id="{F82209CD-93EC-1FCD-32D7-138CEF26DEDD}"/>
+              </a:ext>
+            </a:extLst>
+          </p:cNvPr>
+          <p:cNvPicPr>
+            <a:picLocks noChangeAspect="1"/>
+          </p:cNvPicPr>
+          <p:nvPr/>
+        </p:nvPicPr>
+        <p:blipFill>
+          <a:blip r:embed="rId2"/>
+          <a:srcRect l="-1" t="1964" r="414" b="64"/>
+          <a:stretch/>
+        </p:blipFill>
+        <p:spPr>
+          <a:xfrm>
+            <a:off x="494746" y="-182035"/>
+            <a:ext cx="8260838" cy="4692653"/>
+          </a:xfrm>
+          <a:prstGeom prst="rect">
+            <a:avLst/>
+          </a:prstGeom>
+        </p:spPr>
+      </p:pic>
+      <p:sp>
+        <p:nvSpPr>
+          <p:cNvPr id="65" name="Rectangle 64">
+            <a:extLst>
+              <a:ext uri="{FF2B5EF4-FFF2-40B4-BE49-F238E27FC236}">
+                <a16:creationId xmlns:a16="http://schemas.microsoft.com/office/drawing/2014/main" id="{03EFF3A9-3F0B-6DF7-7738-8B2CD99BB988}"/>
+              </a:ext>
+              <a:ext uri="{C183D7F6-B498-43B3-948B-1728B52AA6E4}">
+                <adec:decorative xmlns:adec="http://schemas.microsoft.com/office/drawing/2017/decorative" val="1"/>
+              </a:ext>
+            </a:extLst>
+          </p:cNvPr>
+          <p:cNvSpPr>
+            <a:spLocks noGrp="1" noRot="1" noChangeAspect="1" noMove="1" noResize="1" noEditPoints="1" noAdjustHandles="1" noChangeArrowheads="1" noChangeShapeType="1" noTextEdit="1"/>
+          </p:cNvSpPr>
+          <p:nvPr>
+            <p:extLst>
+              <p:ext uri="{386F3935-93C4-4BCD-93E2-E3B085C9AB24}">
+                <p16:designElem xmlns:p16="http://schemas.microsoft.com/office/powerpoint/2015/main" val="1"/>
+              </p:ext>
+            </p:extLst>
+          </p:nvPr>
+        </p:nvSpPr>
+        <p:spPr>
+          <a:xfrm rot="5400000" flipH="1">
+            <a:off x="2817950" y="5666847"/>
+            <a:ext cx="1463040" cy="34289"/>
+          </a:xfrm>
+          <a:prstGeom prst="rect">
+            <a:avLst/>
+          </a:prstGeom>
+          <a:solidFill>
+            <a:schemeClr val="accent4"/>
+          </a:solidFill>
+          <a:ln>
+            <a:noFill/>
+          </a:ln>
+        </p:spPr>
+        <p:style>
+          <a:lnRef idx="2">
+            <a:schemeClr val="accent1">
+              <a:shade val="50000"/>
+            </a:schemeClr>
+          </a:lnRef>
+          <a:fillRef idx="1">
+            <a:schemeClr val="accent1"/>
+          </a:fillRef>
+          <a:effectRef idx="0">
+            <a:schemeClr val="accent1"/>
+          </a:effectRef>
+          <a:fontRef idx="minor">
+            <a:schemeClr val="lt1"/>
+          </a:fontRef>
+        </p:style>
+        <p:txBody>
+          <a:bodyPr rtlCol="0" anchor="ctr"/>
+          <a:lstStyle/>
+          <a:p>
+            <a:pPr algn="ctr"/>
+            <a:endParaRPr lang="en-US"/>
+          </a:p>
+        </p:txBody>
+      </p:sp>
+      <p:sp>
+        <p:nvSpPr>
+          <p:cNvPr id="3" name="TextBox 2">
+            <a:extLst>
+              <a:ext uri="{FF2B5EF4-FFF2-40B4-BE49-F238E27FC236}">
+                <a16:creationId xmlns:a16="http://schemas.microsoft.com/office/drawing/2014/main" id="{82BF048E-A551-645B-31F8-1BC14D3DBC63}"/>
+              </a:ext>
+            </a:extLst>
+          </p:cNvPr>
+          <p:cNvSpPr txBox="1"/>
+          <p:nvPr/>
+        </p:nvSpPr>
+        <p:spPr>
+          <a:xfrm>
+            <a:off x="3872039" y="4883544"/>
+            <a:ext cx="4940186" cy="1556907"/>
+          </a:xfrm>
+          <a:prstGeom prst="rect">
+            <a:avLst/>
+          </a:prstGeom>
+        </p:spPr>
+        <p:txBody>
+          <a:bodyPr vert="horz" lIns="91440" tIns="45720" rIns="91440" bIns="45720" rtlCol="0" anchor="ctr">
+            <a:normAutofit/>
+          </a:bodyPr>
+          <a:lstStyle/>
+          <a:p>
+            <a:pPr marL="285750" indent="-228600" defTabSz="914400">
+              <a:lnSpc>
+                <a:spcPct val="90000"/>
+              </a:lnSpc>
+              <a:spcAft>
+                <a:spcPts val="600"/>
+              </a:spcAft>
+              <a:buFont typeface="Arial" panose="020B0604020202020204" pitchFamily="34" charset="0"/>
+              <a:buChar char="•"/>
+            </a:pPr>
+            <a:r>
+              <a:rPr lang="en-US" sz="1400" dirty="0"/>
+              <a:t>Glyph Lesson (Left)</a:t>
+            </a:r>
+          </a:p>
+          <a:p>
+            <a:pPr marL="285750" indent="-228600" defTabSz="914400">
+              <a:lnSpc>
+                <a:spcPct val="90000"/>
+              </a:lnSpc>
+              <a:spcAft>
+                <a:spcPts val="600"/>
+              </a:spcAft>
+              <a:buFont typeface="Arial" panose="020B0604020202020204" pitchFamily="34" charset="0"/>
+              <a:buChar char="•"/>
+            </a:pPr>
+            <a:r>
+              <a:rPr lang="en-US" sz="1400" dirty="0"/>
+              <a:t>Spell Lesson (Right)</a:t>
+            </a:r>
+          </a:p>
+          <a:p>
+            <a:pPr marL="285750" indent="-228600" defTabSz="914400">
+              <a:lnSpc>
+                <a:spcPct val="90000"/>
+              </a:lnSpc>
+              <a:spcAft>
+                <a:spcPts val="600"/>
+              </a:spcAft>
+              <a:buFont typeface="Arial" panose="020B0604020202020204" pitchFamily="34" charset="0"/>
+              <a:buChar char="•"/>
+            </a:pPr>
+            <a:r>
+              <a:rPr lang="en-US" sz="1400" dirty="0"/>
+              <a:t>Slowest: Gesture Two-Handed Combined</a:t>
+            </a:r>
+          </a:p>
+          <a:p>
+            <a:pPr marL="285750" indent="-228600" defTabSz="914400">
+              <a:lnSpc>
+                <a:spcPct val="90000"/>
+              </a:lnSpc>
+              <a:spcAft>
+                <a:spcPts val="600"/>
+              </a:spcAft>
+              <a:buFont typeface="Arial" panose="020B0604020202020204" pitchFamily="34" charset="0"/>
+              <a:buChar char="•"/>
+            </a:pPr>
+            <a:r>
+              <a:rPr lang="en-US" sz="1400" dirty="0"/>
+              <a:t>All other control types are in the normal range of each other</a:t>
+            </a:r>
+          </a:p>
+          <a:p>
+            <a:pPr marL="285750" indent="-228600" defTabSz="914400">
+              <a:lnSpc>
+                <a:spcPct val="90000"/>
+              </a:lnSpc>
+              <a:spcAft>
+                <a:spcPts val="600"/>
+              </a:spcAft>
+              <a:buFont typeface="Arial" panose="020B0604020202020204" pitchFamily="34" charset="0"/>
+              <a:buChar char="•"/>
+            </a:pPr>
+            <a:r>
+              <a:rPr lang="en-US" sz="1400" dirty="0"/>
+              <a:t>Lines up with the data found in Average Input Time</a:t>
+            </a:r>
+          </a:p>
+        </p:txBody>
+      </p:sp>
+    </p:spTree>
+    <p:extLst>
+      <p:ext uri="{BB962C8B-B14F-4D97-AF65-F5344CB8AC3E}">
+        <p14:creationId xmlns:p14="http://schemas.microsoft.com/office/powerpoint/2010/main" val="3688562093"/>
       </p:ext>
     </p:extLst>
   </p:cSld>
@@ -9679,12 +7081,70 @@
           <a:chExt cx="0" cy="0"/>
         </a:xfrm>
       </p:grpSpPr>
-      <p:sp useBgFill="1">
-        <p:nvSpPr>
-          <p:cNvPr id="67" name="Rectangle 66">
+      <p:sp>
+        <p:nvSpPr>
+          <p:cNvPr id="2" name="Title 1">
             <a:extLst>
               <a:ext uri="{FF2B5EF4-FFF2-40B4-BE49-F238E27FC236}">
-                <a16:creationId xmlns:a16="http://schemas.microsoft.com/office/drawing/2014/main" id="{DBC6133C-0615-4CE4-9132-37E609A9BDFA}"/>
+                <a16:creationId xmlns:a16="http://schemas.microsoft.com/office/drawing/2014/main" id="{654A32AB-0227-754E-2C5B-BB6233DAEC97}"/>
+              </a:ext>
+            </a:extLst>
+          </p:cNvPr>
+          <p:cNvSpPr>
+            <a:spLocks noGrp="1"/>
+          </p:cNvSpPr>
+          <p:nvPr>
+            <p:ph type="title"/>
+          </p:nvPr>
+        </p:nvSpPr>
+        <p:spPr>
+          <a:xfrm>
+            <a:off x="6115050" y="1128094"/>
+            <a:ext cx="2575635" cy="1415270"/>
+          </a:xfrm>
+        </p:spPr>
+        <p:txBody>
+          <a:bodyPr vert="horz" lIns="91440" tIns="45720" rIns="91440" bIns="45720" rtlCol="0" anchor="t">
+            <a:normAutofit/>
+          </a:bodyPr>
+          <a:lstStyle/>
+          <a:p>
+            <a:pPr algn="l" defTabSz="914400">
+              <a:lnSpc>
+                <a:spcPct val="90000"/>
+              </a:lnSpc>
+            </a:pPr>
+            <a:r>
+              <a:rPr lang="en-US" sz="2800" kern="1200" dirty="0">
+                <a:solidFill>
+                  <a:schemeClr val="tx1"/>
+                </a:solidFill>
+                <a:latin typeface="+mj-lt"/>
+                <a:ea typeface="+mj-ea"/>
+                <a:cs typeface="+mj-cs"/>
+              </a:rPr>
+              <a:t>Accuracy vs. </a:t>
+            </a:r>
+            <a:r>
+              <a:rPr lang="en-US" sz="2800" kern="1200">
+                <a:solidFill>
+                  <a:schemeClr val="tx1"/>
+                </a:solidFill>
+                <a:latin typeface="+mj-lt"/>
+                <a:ea typeface="+mj-ea"/>
+                <a:cs typeface="+mj-cs"/>
+              </a:rPr>
+              <a:t>Input Time</a:t>
+            </a:r>
+          </a:p>
+        </p:txBody>
+      </p:sp>
+      <p:sp>
+        <p:nvSpPr>
+          <p:cNvPr id="80" name="Rectangle 79">
+            <a:extLst>
+              <a:ext uri="{FF2B5EF4-FFF2-40B4-BE49-F238E27FC236}">
+                <a16:creationId xmlns:a16="http://schemas.microsoft.com/office/drawing/2014/main" id="{7ED7575E-88D2-B771-681D-46A7E55415DD}"/>
               </a:ext>
               <a:ext uri="{C183D7F6-B498-43B3-948B-1728B52AA6E4}">
                 <adec:decorative xmlns:adec="http://schemas.microsoft.com/office/drawing/2017/decorative" val="1"/>
@@ -9705,11 +7165,17 @@
         <p:spPr>
           <a:xfrm>
             <a:off x="0" y="0"/>
-            <a:ext cx="9143999" cy="6857365"/>
+            <a:ext cx="5682342" cy="6858000"/>
           </a:xfrm>
           <a:prstGeom prst="rect">
             <a:avLst/>
           </a:prstGeom>
+          <a:solidFill>
+            <a:schemeClr val="bg1">
+              <a:lumMod val="95000"/>
+              <a:alpha val="65000"/>
+            </a:schemeClr>
+          </a:solidFill>
           <a:ln>
             <a:noFill/>
           </a:ln>
@@ -9739,381 +7205,6 @@
           </a:p>
         </p:txBody>
       </p:sp>
-      <p:sp>
-        <p:nvSpPr>
-          <p:cNvPr id="2" name="Title 1">
-            <a:extLst>
-              <a:ext uri="{FF2B5EF4-FFF2-40B4-BE49-F238E27FC236}">
-                <a16:creationId xmlns:a16="http://schemas.microsoft.com/office/drawing/2014/main" id="{654A32AB-0227-754E-2C5B-BB6233DAEC97}"/>
-              </a:ext>
-            </a:extLst>
-          </p:cNvPr>
-          <p:cNvSpPr>
-            <a:spLocks noGrp="1"/>
-          </p:cNvSpPr>
-          <p:nvPr>
-            <p:ph type="title"/>
-          </p:nvPr>
-        </p:nvSpPr>
-        <p:spPr>
-          <a:xfrm>
-            <a:off x="104328" y="525982"/>
-            <a:ext cx="4013540" cy="1200361"/>
-          </a:xfrm>
-        </p:spPr>
-        <p:txBody>
-          <a:bodyPr vert="horz" lIns="91440" tIns="45720" rIns="91440" bIns="45720" rtlCol="0" anchor="b">
-            <a:normAutofit/>
-          </a:bodyPr>
-          <a:lstStyle/>
-          <a:p>
-            <a:pPr defTabSz="914400">
-              <a:lnSpc>
-                <a:spcPct val="90000"/>
-              </a:lnSpc>
-            </a:pPr>
-            <a:r>
-              <a:rPr lang="en-US" sz="2800" kern="1200" dirty="0">
-                <a:solidFill>
-                  <a:schemeClr val="tx1"/>
-                </a:solidFill>
-                <a:latin typeface="+mj-lt"/>
-                <a:ea typeface="+mj-ea"/>
-                <a:cs typeface="+mj-cs"/>
-              </a:rPr>
-              <a:t>Accuracy vs. </a:t>
-            </a:r>
-            <a:r>
-              <a:rPr lang="en-US" sz="2800" dirty="0"/>
-              <a:t>Input Time</a:t>
-            </a:r>
-            <a:endParaRPr lang="en-US" sz="2800" kern="1200" dirty="0">
-              <a:solidFill>
-                <a:schemeClr val="tx1"/>
-              </a:solidFill>
-              <a:latin typeface="+mj-lt"/>
-              <a:ea typeface="+mj-ea"/>
-              <a:cs typeface="+mj-cs"/>
-            </a:endParaRPr>
-          </a:p>
-        </p:txBody>
-      </p:sp>
-      <p:sp>
-        <p:nvSpPr>
-          <p:cNvPr id="69" name="Rectangle 68">
-            <a:extLst>
-              <a:ext uri="{FF2B5EF4-FFF2-40B4-BE49-F238E27FC236}">
-                <a16:creationId xmlns:a16="http://schemas.microsoft.com/office/drawing/2014/main" id="{169CC832-2974-4E8D-90ED-3E2941BA7336}"/>
-              </a:ext>
-              <a:ext uri="{C183D7F6-B498-43B3-948B-1728B52AA6E4}">
-                <adec:decorative xmlns:adec="http://schemas.microsoft.com/office/drawing/2017/decorative" val="1"/>
-              </a:ext>
-            </a:extLst>
-          </p:cNvPr>
-          <p:cNvSpPr>
-            <a:spLocks noGrp="1" noRot="1" noChangeAspect="1" noMove="1" noResize="1" noEditPoints="1" noAdjustHandles="1" noChangeArrowheads="1" noChangeShapeType="1" noTextEdit="1"/>
-          </p:cNvSpPr>
-          <p:nvPr>
-            <p:extLst>
-              <p:ext uri="{386F3935-93C4-4BCD-93E2-E3B085C9AB24}">
-                <p16:designElem xmlns:p16="http://schemas.microsoft.com/office/powerpoint/2015/main" val="1"/>
-              </p:ext>
-            </p:extLst>
-          </p:nvPr>
-        </p:nvSpPr>
-        <p:spPr>
-          <a:xfrm flipH="1">
-            <a:off x="462399" y="1944913"/>
-            <a:ext cx="3017520" cy="27432"/>
-          </a:xfrm>
-          <a:prstGeom prst="rect">
-            <a:avLst/>
-          </a:prstGeom>
-          <a:solidFill>
-            <a:schemeClr val="accent4"/>
-          </a:solidFill>
-          <a:ln>
-            <a:noFill/>
-          </a:ln>
-        </p:spPr>
-        <p:style>
-          <a:lnRef idx="2">
-            <a:schemeClr val="accent1">
-              <a:shade val="50000"/>
-            </a:schemeClr>
-          </a:lnRef>
-          <a:fillRef idx="1">
-            <a:schemeClr val="accent1"/>
-          </a:fillRef>
-          <a:effectRef idx="0">
-            <a:schemeClr val="accent1"/>
-          </a:effectRef>
-          <a:fontRef idx="minor">
-            <a:schemeClr val="lt1"/>
-          </a:fontRef>
-        </p:style>
-        <p:txBody>
-          <a:bodyPr rtlCol="0" anchor="ctr"/>
-          <a:lstStyle/>
-          <a:p>
-            <a:pPr algn="ctr"/>
-            <a:endParaRPr lang="en-US"/>
-          </a:p>
-        </p:txBody>
-      </p:sp>
-      <p:sp>
-        <p:nvSpPr>
-          <p:cNvPr id="12" name="TextBox 11">
-            <a:extLst>
-              <a:ext uri="{FF2B5EF4-FFF2-40B4-BE49-F238E27FC236}">
-                <a16:creationId xmlns:a16="http://schemas.microsoft.com/office/drawing/2014/main" id="{0AF4090D-75EC-9CD3-CD2D-5DE4EE88596D}"/>
-              </a:ext>
-            </a:extLst>
-          </p:cNvPr>
-          <p:cNvSpPr txBox="1"/>
-          <p:nvPr/>
-        </p:nvSpPr>
-        <p:spPr>
-          <a:xfrm>
-            <a:off x="483799" y="2031101"/>
-            <a:ext cx="3212238" cy="3511943"/>
-          </a:xfrm>
-          <a:prstGeom prst="rect">
-            <a:avLst/>
-          </a:prstGeom>
-        </p:spPr>
-        <p:txBody>
-          <a:bodyPr vert="horz" lIns="91440" tIns="45720" rIns="91440" bIns="45720" rtlCol="0" anchor="ctr">
-            <a:normAutofit/>
-          </a:bodyPr>
-          <a:lstStyle/>
-          <a:p>
-            <a:pPr marL="285750" indent="-228600" defTabSz="914400">
-              <a:lnSpc>
-                <a:spcPct val="90000"/>
-              </a:lnSpc>
-              <a:spcAft>
-                <a:spcPts val="600"/>
-              </a:spcAft>
-              <a:buFont typeface="Arial" panose="020B0604020202020204" pitchFamily="34" charset="0"/>
-              <a:buChar char="•"/>
-            </a:pPr>
-            <a:r>
-              <a:rPr lang="en-US" sz="1600" dirty="0"/>
-              <a:t>Spell lesson input average  </a:t>
-            </a:r>
-          </a:p>
-          <a:p>
-            <a:pPr marL="285750" indent="-228600" defTabSz="914400">
-              <a:lnSpc>
-                <a:spcPct val="90000"/>
-              </a:lnSpc>
-              <a:spcAft>
-                <a:spcPts val="600"/>
-              </a:spcAft>
-              <a:buFont typeface="Arial" panose="020B0604020202020204" pitchFamily="34" charset="0"/>
-              <a:buChar char="•"/>
-            </a:pPr>
-            <a:endParaRPr lang="en-US" sz="1600" dirty="0"/>
-          </a:p>
-        </p:txBody>
-      </p:sp>
-      <p:sp>
-        <p:nvSpPr>
-          <p:cNvPr id="71" name="Rectangle 70">
-            <a:extLst>
-              <a:ext uri="{FF2B5EF4-FFF2-40B4-BE49-F238E27FC236}">
-                <a16:creationId xmlns:a16="http://schemas.microsoft.com/office/drawing/2014/main" id="{55222F96-971A-4F90-B841-6BAB416C7AC1}"/>
-              </a:ext>
-              <a:ext uri="{C183D7F6-B498-43B3-948B-1728B52AA6E4}">
-                <adec:decorative xmlns:adec="http://schemas.microsoft.com/office/drawing/2017/decorative" val="1"/>
-              </a:ext>
-            </a:extLst>
-          </p:cNvPr>
-          <p:cNvSpPr>
-            <a:spLocks noGrp="1" noRot="1" noChangeAspect="1" noMove="1" noResize="1" noEditPoints="1" noAdjustHandles="1" noChangeArrowheads="1" noChangeShapeType="1" noTextEdit="1"/>
-          </p:cNvSpPr>
-          <p:nvPr>
-            <p:extLst>
-              <p:ext uri="{386F3935-93C4-4BCD-93E2-E3B085C9AB24}">
-                <p16:designElem xmlns:p16="http://schemas.microsoft.com/office/powerpoint/2015/main" val="1"/>
-              </p:ext>
-            </p:extLst>
-          </p:nvPr>
-        </p:nvSpPr>
-        <p:spPr>
-          <a:xfrm rot="5400000">
-            <a:off x="-261965" y="6072626"/>
-            <a:ext cx="740664" cy="115593"/>
-          </a:xfrm>
-          <a:prstGeom prst="rect">
-            <a:avLst/>
-          </a:prstGeom>
-          <a:solidFill>
-            <a:schemeClr val="accent4"/>
-          </a:solidFill>
-          <a:ln>
-            <a:noFill/>
-          </a:ln>
-        </p:spPr>
-        <p:style>
-          <a:lnRef idx="2">
-            <a:schemeClr val="accent1">
-              <a:shade val="50000"/>
-            </a:schemeClr>
-          </a:lnRef>
-          <a:fillRef idx="1">
-            <a:schemeClr val="accent1"/>
-          </a:fillRef>
-          <a:effectRef idx="0">
-            <a:schemeClr val="accent1"/>
-          </a:effectRef>
-          <a:fontRef idx="minor">
-            <a:schemeClr val="lt1"/>
-          </a:fontRef>
-        </p:style>
-        <p:txBody>
-          <a:bodyPr rtlCol="0" anchor="ctr"/>
-          <a:lstStyle/>
-          <a:p>
-            <a:pPr algn="ctr"/>
-            <a:endParaRPr lang="en-US"/>
-          </a:p>
-        </p:txBody>
-      </p:sp>
-      <p:sp>
-        <p:nvSpPr>
-          <p:cNvPr id="73" name="Rectangle 72">
-            <a:extLst>
-              <a:ext uri="{FF2B5EF4-FFF2-40B4-BE49-F238E27FC236}">
-                <a16:creationId xmlns:a16="http://schemas.microsoft.com/office/drawing/2014/main" id="{08980754-6F4B-43C9-B9BE-127B6BED6586}"/>
-              </a:ext>
-              <a:ext uri="{C183D7F6-B498-43B3-948B-1728B52AA6E4}">
-                <adec:decorative xmlns:adec="http://schemas.microsoft.com/office/drawing/2017/decorative" val="1"/>
-              </a:ext>
-            </a:extLst>
-          </p:cNvPr>
-          <p:cNvSpPr>
-            <a:spLocks noGrp="1" noRot="1" noChangeAspect="1" noMove="1" noResize="1" noEditPoints="1" noAdjustHandles="1" noChangeArrowheads="1" noChangeShapeType="1" noTextEdit="1"/>
-          </p:cNvSpPr>
-          <p:nvPr>
-            <p:extLst>
-              <p:ext uri="{386F3935-93C4-4BCD-93E2-E3B085C9AB24}">
-                <p16:designElem xmlns:p16="http://schemas.microsoft.com/office/powerpoint/2015/main" val="1"/>
-              </p:ext>
-            </p:extLst>
-          </p:nvPr>
-        </p:nvSpPr>
-        <p:spPr>
-          <a:xfrm rot="5400000">
-            <a:off x="4336109" y="1694387"/>
-            <a:ext cx="740664" cy="8875118"/>
-          </a:xfrm>
-          <a:prstGeom prst="rect">
-            <a:avLst/>
-          </a:prstGeom>
-          <a:solidFill>
-            <a:schemeClr val="accent4"/>
-          </a:solidFill>
-          <a:ln>
-            <a:noFill/>
-          </a:ln>
-        </p:spPr>
-        <p:style>
-          <a:lnRef idx="2">
-            <a:schemeClr val="accent1">
-              <a:shade val="50000"/>
-            </a:schemeClr>
-          </a:lnRef>
-          <a:fillRef idx="1">
-            <a:schemeClr val="accent1"/>
-          </a:fillRef>
-          <a:effectRef idx="0">
-            <a:schemeClr val="accent1"/>
-          </a:effectRef>
-          <a:fontRef idx="minor">
-            <a:schemeClr val="lt1"/>
-          </a:fontRef>
-        </p:style>
-        <p:txBody>
-          <a:bodyPr rtlCol="0" anchor="ctr"/>
-          <a:lstStyle/>
-          <a:p>
-            <a:pPr algn="ctr"/>
-            <a:endParaRPr lang="en-US"/>
-          </a:p>
-        </p:txBody>
-      </p:sp>
-      <p:sp>
-        <p:nvSpPr>
-          <p:cNvPr id="75" name="Rectangle 74">
-            <a:extLst>
-              <a:ext uri="{FF2B5EF4-FFF2-40B4-BE49-F238E27FC236}">
-                <a16:creationId xmlns:a16="http://schemas.microsoft.com/office/drawing/2014/main" id="{2C1BBA94-3F40-40AA-8BB9-E69E25E537C1}"/>
-              </a:ext>
-              <a:ext uri="{C183D7F6-B498-43B3-948B-1728B52AA6E4}">
-                <adec:decorative xmlns:adec="http://schemas.microsoft.com/office/drawing/2017/decorative" val="1"/>
-              </a:ext>
-            </a:extLst>
-          </p:cNvPr>
-          <p:cNvSpPr>
-            <a:spLocks noGrp="1" noRot="1" noChangeAspect="1" noMove="1" noResize="1" noEditPoints="1" noAdjustHandles="1" noChangeArrowheads="1" noChangeShapeType="1" noTextEdit="1"/>
-          </p:cNvSpPr>
-          <p:nvPr>
-            <p:extLst>
-              <p:ext uri="{386F3935-93C4-4BCD-93E2-E3B085C9AB24}">
-                <p16:designElem xmlns:p16="http://schemas.microsoft.com/office/powerpoint/2015/main" val="1"/>
-              </p:ext>
-            </p:extLst>
-          </p:nvPr>
-        </p:nvSpPr>
-        <p:spPr>
-          <a:xfrm>
-            <a:off x="4272594" y="354959"/>
-            <a:ext cx="4638730" cy="5915212"/>
-          </a:xfrm>
-          <a:prstGeom prst="rect">
-            <a:avLst/>
-          </a:prstGeom>
-          <a:solidFill>
-            <a:schemeClr val="bg1"/>
-          </a:solidFill>
-          <a:ln>
-            <a:noFill/>
-          </a:ln>
-          <a:effectLst>
-            <a:outerShdw blurRad="139700" dist="127000" dir="5400000" algn="t" rotWithShape="0">
-              <a:prstClr val="black">
-                <a:alpha val="15000"/>
-              </a:prstClr>
-            </a:outerShdw>
-          </a:effectLst>
-        </p:spPr>
-        <p:style>
-          <a:lnRef idx="2">
-            <a:schemeClr val="accent1">
-              <a:shade val="50000"/>
-            </a:schemeClr>
-          </a:lnRef>
-          <a:fillRef idx="1">
-            <a:schemeClr val="accent1"/>
-          </a:fillRef>
-          <a:effectRef idx="0">
-            <a:schemeClr val="accent1"/>
-          </a:effectRef>
-          <a:fontRef idx="minor">
-            <a:schemeClr val="lt1"/>
-          </a:fontRef>
-        </p:style>
-        <p:txBody>
-          <a:bodyPr rtlCol="0" anchor="ctr"/>
-          <a:lstStyle/>
-          <a:p>
-            <a:pPr algn="ctr"/>
-            <a:endParaRPr lang="en-US"/>
-          </a:p>
-        </p:txBody>
-      </p:sp>
       <p:pic>
         <p:nvPicPr>
           <p:cNvPr id="4" name="Picture 3">
@@ -10136,14 +7227,363 @@
         </p:blipFill>
         <p:spPr>
           <a:xfrm>
-            <a:off x="4490803" y="1866868"/>
-            <a:ext cx="4221014" cy="2891394"/>
+            <a:off x="8708" y="1496208"/>
+            <a:ext cx="5652858" cy="3872206"/>
           </a:xfrm>
           <a:prstGeom prst="rect">
             <a:avLst/>
           </a:prstGeom>
         </p:spPr>
       </p:pic>
+      <p:cxnSp>
+        <p:nvCxnSpPr>
+          <p:cNvPr id="82" name="Straight Connector 81">
+            <a:extLst>
+              <a:ext uri="{FF2B5EF4-FFF2-40B4-BE49-F238E27FC236}">
+                <a16:creationId xmlns:a16="http://schemas.microsoft.com/office/drawing/2014/main" id="{249EDD1B-F94D-B4E6-ACAA-566B9A26FDE3}"/>
+              </a:ext>
+              <a:ext uri="{C183D7F6-B498-43B3-948B-1728B52AA6E4}">
+                <adec:decorative xmlns:adec="http://schemas.microsoft.com/office/drawing/2017/decorative" val="1"/>
+              </a:ext>
+            </a:extLst>
+          </p:cNvPr>
+          <p:cNvCxnSpPr>
+            <a:cxnSpLocks noGrp="1" noRot="1" noChangeAspect="1" noMove="1" noResize="1" noEditPoints="1" noAdjustHandles="1" noChangeArrowheads="1" noChangeShapeType="1"/>
+          </p:cNvCxnSpPr>
+          <p:nvPr>
+            <p:extLst>
+              <p:ext uri="{386F3935-93C4-4BCD-93E2-E3B085C9AB24}">
+                <p16:designElem xmlns:p16="http://schemas.microsoft.com/office/powerpoint/2015/main" val="1"/>
+              </p:ext>
+            </p:extLst>
+          </p:nvPr>
+        </p:nvCxnSpPr>
+        <p:spPr>
+          <a:xfrm>
+            <a:off x="6149542" y="871146"/>
+            <a:ext cx="552704" cy="0"/>
+          </a:xfrm>
+          <a:prstGeom prst="line">
+            <a:avLst/>
+          </a:prstGeom>
+          <a:ln w="57150">
+            <a:solidFill>
+              <a:schemeClr val="accent4"/>
+            </a:solidFill>
+          </a:ln>
+        </p:spPr>
+        <p:style>
+          <a:lnRef idx="1">
+            <a:schemeClr val="accent1"/>
+          </a:lnRef>
+          <a:fillRef idx="0">
+            <a:schemeClr val="accent1"/>
+          </a:fillRef>
+          <a:effectRef idx="0">
+            <a:schemeClr val="accent1"/>
+          </a:effectRef>
+          <a:fontRef idx="minor">
+            <a:schemeClr val="tx1"/>
+          </a:fontRef>
+        </p:style>
+      </p:cxnSp>
+      <p:sp>
+        <p:nvSpPr>
+          <p:cNvPr id="12" name="TextBox 11">
+            <a:extLst>
+              <a:ext uri="{FF2B5EF4-FFF2-40B4-BE49-F238E27FC236}">
+                <a16:creationId xmlns:a16="http://schemas.microsoft.com/office/drawing/2014/main" id="{0AF4090D-75EC-9CD3-CD2D-5DE4EE88596D}"/>
+              </a:ext>
+            </a:extLst>
+          </p:cNvPr>
+          <p:cNvSpPr txBox="1"/>
+          <p:nvPr/>
+        </p:nvSpPr>
+        <p:spPr>
+          <a:xfrm>
+            <a:off x="5915051" y="2009710"/>
+            <a:ext cx="3216887" cy="3599019"/>
+          </a:xfrm>
+          <a:prstGeom prst="rect">
+            <a:avLst/>
+          </a:prstGeom>
+        </p:spPr>
+        <p:txBody>
+          <a:bodyPr vert="horz" lIns="91440" tIns="45720" rIns="91440" bIns="45720" rtlCol="0">
+            <a:noAutofit/>
+          </a:bodyPr>
+          <a:lstStyle/>
+          <a:p>
+            <a:pPr marL="285750" indent="-228600" defTabSz="914400">
+              <a:lnSpc>
+                <a:spcPct val="90000"/>
+              </a:lnSpc>
+              <a:spcAft>
+                <a:spcPts val="600"/>
+              </a:spcAft>
+              <a:buFont typeface="Arial" panose="020B0604020202020204" pitchFamily="34" charset="0"/>
+              <a:buChar char="•"/>
+            </a:pPr>
+            <a:r>
+              <a:rPr lang="en-US" sz="1200" dirty="0"/>
+              <a:t>Controller One-Hand (Blue)</a:t>
+            </a:r>
+          </a:p>
+          <a:p>
+            <a:pPr marL="742950" lvl="1" indent="-228600" defTabSz="914400">
+              <a:lnSpc>
+                <a:spcPct val="90000"/>
+              </a:lnSpc>
+              <a:spcAft>
+                <a:spcPts val="600"/>
+              </a:spcAft>
+              <a:buFont typeface="Arial" panose="020B0604020202020204" pitchFamily="34" charset="0"/>
+              <a:buChar char="•"/>
+            </a:pPr>
+            <a:r>
+              <a:rPr lang="en-US" sz="1200" dirty="0"/>
+              <a:t>Inaccurate</a:t>
+            </a:r>
+          </a:p>
+          <a:p>
+            <a:pPr marL="742950" lvl="1" indent="-228600" defTabSz="914400">
+              <a:lnSpc>
+                <a:spcPct val="90000"/>
+              </a:lnSpc>
+              <a:spcAft>
+                <a:spcPts val="600"/>
+              </a:spcAft>
+              <a:buFont typeface="Arial" panose="020B0604020202020204" pitchFamily="34" charset="0"/>
+              <a:buChar char="•"/>
+            </a:pPr>
+            <a:r>
+              <a:rPr lang="en-US" sz="1200" dirty="0"/>
+              <a:t>Very Fast</a:t>
+            </a:r>
+          </a:p>
+          <a:p>
+            <a:pPr marL="285750" indent="-228600" defTabSz="914400">
+              <a:lnSpc>
+                <a:spcPct val="90000"/>
+              </a:lnSpc>
+              <a:spcAft>
+                <a:spcPts val="600"/>
+              </a:spcAft>
+              <a:buFont typeface="Arial" panose="020B0604020202020204" pitchFamily="34" charset="0"/>
+              <a:buChar char="•"/>
+            </a:pPr>
+            <a:r>
+              <a:rPr lang="en-US" sz="1200" dirty="0"/>
+              <a:t>Controller Two-Hand (Red)</a:t>
+            </a:r>
+          </a:p>
+          <a:p>
+            <a:pPr marL="742950" lvl="1" indent="-228600" defTabSz="914400">
+              <a:lnSpc>
+                <a:spcPct val="90000"/>
+              </a:lnSpc>
+              <a:spcAft>
+                <a:spcPts val="600"/>
+              </a:spcAft>
+              <a:buFont typeface="Arial" panose="020B0604020202020204" pitchFamily="34" charset="0"/>
+              <a:buChar char="•"/>
+            </a:pPr>
+            <a:r>
+              <a:rPr lang="en-US" sz="1200" dirty="0"/>
+              <a:t>Slightly Accurate</a:t>
+            </a:r>
+          </a:p>
+          <a:p>
+            <a:pPr marL="742950" lvl="1" indent="-228600" defTabSz="914400">
+              <a:lnSpc>
+                <a:spcPct val="90000"/>
+              </a:lnSpc>
+              <a:spcAft>
+                <a:spcPts val="600"/>
+              </a:spcAft>
+              <a:buFont typeface="Arial" panose="020B0604020202020204" pitchFamily="34" charset="0"/>
+              <a:buChar char="•"/>
+            </a:pPr>
+            <a:r>
+              <a:rPr lang="en-US" sz="1200" dirty="0"/>
+              <a:t>Moderate Input Speed</a:t>
+            </a:r>
+          </a:p>
+          <a:p>
+            <a:pPr marL="285750" indent="-228600" defTabSz="914400">
+              <a:lnSpc>
+                <a:spcPct val="90000"/>
+              </a:lnSpc>
+              <a:spcAft>
+                <a:spcPts val="600"/>
+              </a:spcAft>
+              <a:buFont typeface="Arial" panose="020B0604020202020204" pitchFamily="34" charset="0"/>
+              <a:buChar char="•"/>
+            </a:pPr>
+            <a:r>
+              <a:rPr lang="en-US" sz="1200" dirty="0"/>
+              <a:t>Gesture One-Hand (Purple)</a:t>
+            </a:r>
+          </a:p>
+          <a:p>
+            <a:pPr marL="742950" lvl="1" indent="-228600" defTabSz="914400">
+              <a:lnSpc>
+                <a:spcPct val="90000"/>
+              </a:lnSpc>
+              <a:spcAft>
+                <a:spcPts val="600"/>
+              </a:spcAft>
+              <a:buFont typeface="Arial" panose="020B0604020202020204" pitchFamily="34" charset="0"/>
+              <a:buChar char="•"/>
+            </a:pPr>
+            <a:r>
+              <a:rPr lang="en-US" sz="1200" dirty="0"/>
+              <a:t>Very Inaccurate </a:t>
+            </a:r>
+          </a:p>
+          <a:p>
+            <a:pPr marL="742950" lvl="1" indent="-228600" defTabSz="914400">
+              <a:lnSpc>
+                <a:spcPct val="90000"/>
+              </a:lnSpc>
+              <a:spcAft>
+                <a:spcPts val="600"/>
+              </a:spcAft>
+              <a:buFont typeface="Arial" panose="020B0604020202020204" pitchFamily="34" charset="0"/>
+              <a:buChar char="•"/>
+            </a:pPr>
+            <a:r>
+              <a:rPr lang="en-US" sz="1200" dirty="0"/>
+              <a:t>Fast</a:t>
+            </a:r>
+          </a:p>
+          <a:p>
+            <a:pPr marL="285750" indent="-228600" defTabSz="914400">
+              <a:lnSpc>
+                <a:spcPct val="90000"/>
+              </a:lnSpc>
+              <a:spcAft>
+                <a:spcPts val="600"/>
+              </a:spcAft>
+              <a:buFont typeface="Arial" panose="020B0604020202020204" pitchFamily="34" charset="0"/>
+              <a:buChar char="•"/>
+            </a:pPr>
+            <a:r>
+              <a:rPr lang="en-US" sz="1200" dirty="0"/>
+              <a:t>Gesture Two-Hand (Orange)</a:t>
+            </a:r>
+          </a:p>
+          <a:p>
+            <a:pPr marL="742950" lvl="1" indent="-228600" defTabSz="914400">
+              <a:lnSpc>
+                <a:spcPct val="90000"/>
+              </a:lnSpc>
+              <a:spcAft>
+                <a:spcPts val="600"/>
+              </a:spcAft>
+              <a:buFont typeface="Arial" panose="020B0604020202020204" pitchFamily="34" charset="0"/>
+              <a:buChar char="•"/>
+            </a:pPr>
+            <a:r>
+              <a:rPr lang="en-US" sz="1200" dirty="0"/>
+              <a:t>Very Accurate</a:t>
+            </a:r>
+          </a:p>
+          <a:p>
+            <a:pPr marL="742950" lvl="1" indent="-228600" defTabSz="914400">
+              <a:lnSpc>
+                <a:spcPct val="90000"/>
+              </a:lnSpc>
+              <a:spcAft>
+                <a:spcPts val="600"/>
+              </a:spcAft>
+              <a:buFont typeface="Arial" panose="020B0604020202020204" pitchFamily="34" charset="0"/>
+              <a:buChar char="•"/>
+            </a:pPr>
+            <a:r>
+              <a:rPr lang="en-US" sz="1200" dirty="0"/>
+              <a:t>Fast</a:t>
+            </a:r>
+          </a:p>
+          <a:p>
+            <a:pPr marL="285750" indent="-228600" defTabSz="914400">
+              <a:lnSpc>
+                <a:spcPct val="90000"/>
+              </a:lnSpc>
+              <a:spcAft>
+                <a:spcPts val="600"/>
+              </a:spcAft>
+              <a:buFont typeface="Arial" panose="020B0604020202020204" pitchFamily="34" charset="0"/>
+              <a:buChar char="•"/>
+            </a:pPr>
+            <a:r>
+              <a:rPr lang="en-US" sz="1200" dirty="0"/>
+              <a:t>Gesture Combined (Green)</a:t>
+            </a:r>
+          </a:p>
+          <a:p>
+            <a:pPr marL="742950" lvl="1" indent="-228600" defTabSz="914400">
+              <a:lnSpc>
+                <a:spcPct val="90000"/>
+              </a:lnSpc>
+              <a:spcAft>
+                <a:spcPts val="600"/>
+              </a:spcAft>
+              <a:buFont typeface="Arial" panose="020B0604020202020204" pitchFamily="34" charset="0"/>
+              <a:buChar char="•"/>
+            </a:pPr>
+            <a:r>
+              <a:rPr lang="en-US" sz="1200" dirty="0"/>
+              <a:t>Accurate</a:t>
+            </a:r>
+          </a:p>
+          <a:p>
+            <a:pPr marL="742950" lvl="1" indent="-228600" defTabSz="914400">
+              <a:lnSpc>
+                <a:spcPct val="90000"/>
+              </a:lnSpc>
+              <a:spcAft>
+                <a:spcPts val="600"/>
+              </a:spcAft>
+              <a:buFont typeface="Arial" panose="020B0604020202020204" pitchFamily="34" charset="0"/>
+              <a:buChar char="•"/>
+            </a:pPr>
+            <a:r>
+              <a:rPr lang="en-US" sz="1200" dirty="0"/>
+              <a:t>Very Slow</a:t>
+            </a:r>
+          </a:p>
+          <a:p>
+            <a:pPr marL="342900" indent="-228600" defTabSz="914400">
+              <a:lnSpc>
+                <a:spcPct val="90000"/>
+              </a:lnSpc>
+              <a:spcAft>
+                <a:spcPts val="600"/>
+              </a:spcAft>
+              <a:buFont typeface="Arial" panose="020B0604020202020204" pitchFamily="34" charset="0"/>
+              <a:buChar char="•"/>
+            </a:pPr>
+            <a:r>
+              <a:rPr lang="en-US" sz="1200" dirty="0"/>
+              <a:t>Gesture Two-Hand was the most efficient, looking at accuracy vs time</a:t>
+            </a:r>
+          </a:p>
+          <a:p>
+            <a:pPr marL="285750" indent="-228600" defTabSz="914400">
+              <a:lnSpc>
+                <a:spcPct val="90000"/>
+              </a:lnSpc>
+              <a:spcAft>
+                <a:spcPts val="600"/>
+              </a:spcAft>
+              <a:buFont typeface="Arial" panose="020B0604020202020204" pitchFamily="34" charset="0"/>
+              <a:buChar char="•"/>
+            </a:pPr>
+            <a:endParaRPr lang="en-US" sz="1200" dirty="0"/>
+          </a:p>
+        </p:txBody>
+      </p:sp>
     </p:spTree>
     <p:extLst>
       <p:ext uri="{BB962C8B-B14F-4D97-AF65-F5344CB8AC3E}">
@@ -10173,7 +7613,7 @@
         <p:cNvPr id="1" name="">
           <a:extLst>
             <a:ext uri="{FF2B5EF4-FFF2-40B4-BE49-F238E27FC236}">
-              <a16:creationId xmlns:a16="http://schemas.microsoft.com/office/drawing/2014/main" id="{5F631FA4-8BD6-DC46-5AC3-D5E65BC3A1C1}"/>
+              <a16:creationId xmlns:a16="http://schemas.microsoft.com/office/drawing/2014/main" id="{97BE5DBE-B3B2-901E-7ABE-040E9D659473}"/>
             </a:ext>
           </a:extLst>
         </p:cNvPr>
@@ -10190,10 +7630,10 @@
       </p:grpSpPr>
       <p:sp useBgFill="1">
         <p:nvSpPr>
-          <p:cNvPr id="67" name="Rectangle 66">
+          <p:cNvPr id="59" name="Rectangle 58">
             <a:extLst>
               <a:ext uri="{FF2B5EF4-FFF2-40B4-BE49-F238E27FC236}">
-                <a16:creationId xmlns:a16="http://schemas.microsoft.com/office/drawing/2014/main" id="{700E0F77-E936-4985-B7B1-B9823486AC33}"/>
+                <a16:creationId xmlns:a16="http://schemas.microsoft.com/office/drawing/2014/main" id="{8A8A7075-6D6B-D34E-12AF-1EA90F271C26}"/>
               </a:ext>
               <a:ext uri="{C183D7F6-B498-43B3-948B-1728B52AA6E4}">
                 <adec:decorative xmlns:adec="http://schemas.microsoft.com/office/drawing/2017/decorative" val="1"/>
@@ -10253,7 +7693,7 @@
           <p:cNvPr id="2" name="Title 1">
             <a:extLst>
               <a:ext uri="{FF2B5EF4-FFF2-40B4-BE49-F238E27FC236}">
-                <a16:creationId xmlns:a16="http://schemas.microsoft.com/office/drawing/2014/main" id="{00B3846A-DA79-7154-6EB8-DDD074206CD3}"/>
+                <a16:creationId xmlns:a16="http://schemas.microsoft.com/office/drawing/2014/main" id="{2978CB71-EEC0-608D-2C96-5D360884E939}"/>
               </a:ext>
             </a:extLst>
           </p:cNvPr>
@@ -10282,7 +7722,7 @@
               </a:lnSpc>
             </a:pPr>
             <a:r>
-              <a:rPr lang="en-US" sz="2800" kern="1200">
+              <a:rPr lang="en-US" sz="2800" kern="1200" dirty="0">
                 <a:solidFill>
                   <a:schemeClr val="tx1"/>
                 </a:solidFill>
@@ -10297,10 +7737,10 @@
       </p:sp>
       <p:sp>
         <p:nvSpPr>
-          <p:cNvPr id="69" name="Rectangle 68">
+          <p:cNvPr id="61" name="Rectangle 60">
             <a:extLst>
               <a:ext uri="{FF2B5EF4-FFF2-40B4-BE49-F238E27FC236}">
-                <a16:creationId xmlns:a16="http://schemas.microsoft.com/office/drawing/2014/main" id="{95C8260E-968F-44E8-A823-ABB431311926}"/>
+                <a16:creationId xmlns:a16="http://schemas.microsoft.com/office/drawing/2014/main" id="{C764BCA5-147B-1ACD-7EC5-7FE9DE401CDB}"/>
               </a:ext>
               <a:ext uri="{C183D7F6-B498-43B3-948B-1728B52AA6E4}">
                 <adec:decorative xmlns:adec="http://schemas.microsoft.com/office/drawing/2017/decorative" val="1"/>
@@ -10360,10 +7800,10 @@
       </p:sp>
       <p:sp>
         <p:nvSpPr>
-          <p:cNvPr id="71" name="Rectangle 70">
+          <p:cNvPr id="63" name="Rectangle 62">
             <a:extLst>
               <a:ext uri="{FF2B5EF4-FFF2-40B4-BE49-F238E27FC236}">
-                <a16:creationId xmlns:a16="http://schemas.microsoft.com/office/drawing/2014/main" id="{2C1BBA94-3F40-40AA-8BB9-E69E25E537C1}"/>
+                <a16:creationId xmlns:a16="http://schemas.microsoft.com/office/drawing/2014/main" id="{A1B0D7CB-E03F-B51A-91EF-C493A9EBFD93}"/>
               </a:ext>
               <a:ext uri="{C183D7F6-B498-43B3-948B-1728B52AA6E4}">
                 <adec:decorative xmlns:adec="http://schemas.microsoft.com/office/drawing/2017/decorative" val="1"/>
@@ -10430,10 +7870,10 @@
       </p:sp>
       <p:pic>
         <p:nvPicPr>
-          <p:cNvPr id="8" name="Picture 7" descr="A screenshot of a computer&#10;&#10;AI-generated content may be incorrect.">
+          <p:cNvPr id="36" name="Picture 35">
             <a:extLst>
               <a:ext uri="{FF2B5EF4-FFF2-40B4-BE49-F238E27FC236}">
-                <a16:creationId xmlns:a16="http://schemas.microsoft.com/office/drawing/2014/main" id="{1E2B8E11-E3E5-C9AB-B5F6-84AA844EBF81}"/>
+                <a16:creationId xmlns:a16="http://schemas.microsoft.com/office/drawing/2014/main" id="{FB8A6C4D-029F-DD92-8F68-60F860B095B8}"/>
               </a:ext>
             </a:extLst>
           </p:cNvPr>
@@ -10444,14 +7884,13 @@
         </p:nvPicPr>
         <p:blipFill>
           <a:blip r:embed="rId2"/>
-          <a:stretch>
-            <a:fillRect/>
-          </a:stretch>
+          <a:srcRect t="6496" b="6496"/>
+          <a:stretch/>
         </p:blipFill>
         <p:spPr>
           <a:xfrm>
-            <a:off x="1644041" y="364142"/>
-            <a:ext cx="5927958" cy="3867993"/>
+            <a:off x="494746" y="-182035"/>
+            <a:ext cx="8260838" cy="4692653"/>
           </a:xfrm>
           <a:prstGeom prst="rect">
             <a:avLst/>
@@ -10460,10 +7899,10 @@
       </p:pic>
       <p:sp>
         <p:nvSpPr>
-          <p:cNvPr id="73" name="Rectangle 72">
+          <p:cNvPr id="65" name="Rectangle 64">
             <a:extLst>
               <a:ext uri="{FF2B5EF4-FFF2-40B4-BE49-F238E27FC236}">
-                <a16:creationId xmlns:a16="http://schemas.microsoft.com/office/drawing/2014/main" id="{FE43805F-24A6-46A4-B19B-54F28347355C}"/>
+                <a16:creationId xmlns:a16="http://schemas.microsoft.com/office/drawing/2014/main" id="{5AFBF50A-FBB1-DD90-670E-E3A5B0FAC513}"/>
               </a:ext>
               <a:ext uri="{C183D7F6-B498-43B3-948B-1728B52AA6E4}">
                 <adec:decorative xmlns:adec="http://schemas.microsoft.com/office/drawing/2017/decorative" val="1"/>
@@ -10523,10 +7962,10 @@
       </p:sp>
       <p:sp>
         <p:nvSpPr>
-          <p:cNvPr id="12" name="TextBox 11">
+          <p:cNvPr id="3" name="TextBox 2">
             <a:extLst>
               <a:ext uri="{FF2B5EF4-FFF2-40B4-BE49-F238E27FC236}">
-                <a16:creationId xmlns:a16="http://schemas.microsoft.com/office/drawing/2014/main" id="{4DD9F452-8761-8C83-DB8F-11E467051523}"/>
+                <a16:creationId xmlns:a16="http://schemas.microsoft.com/office/drawing/2014/main" id="{DC8567B8-8C5B-ABC2-3C13-D7DDA7115F6F}"/>
               </a:ext>
             </a:extLst>
           </p:cNvPr>
@@ -10548,7 +7987,71 @@
           </a:bodyPr>
           <a:lstStyle/>
           <a:p>
-            <a:pPr marL="285750" indent="-228600" defTabSz="914400">
+            <a:pPr marL="340614" indent="-285750" algn="l" rtl="0" eaLnBrk="1" latinLnBrk="0" hangingPunct="1">
+              <a:lnSpc>
+                <a:spcPct val="90000"/>
+              </a:lnSpc>
+              <a:spcAft>
+                <a:spcPts val="600"/>
+              </a:spcAft>
+              <a:buClrTx/>
+              <a:buSzPts val="1700"/>
+              <a:buFont typeface="Arial" panose="020B0604020202020204" pitchFamily="34" charset="0"/>
+              <a:buChar char="•"/>
+            </a:pPr>
+            <a:r>
+              <a:rPr lang="en-US" sz="1800" kern="1200" dirty="0">
+                <a:solidFill>
+                  <a:srgbClr val="000000"/>
+                </a:solidFill>
+                <a:effectLst/>
+                <a:latin typeface="Calibri" panose="020F0502020204030204" pitchFamily="34" charset="0"/>
+                <a:ea typeface="+mn-ea"/>
+                <a:cs typeface="+mn-cs"/>
+              </a:rPr>
+              <a:t>Participants did not like </a:t>
+            </a:r>
+            <a:r>
+              <a:rPr lang="en-US" dirty="0">
+                <a:solidFill>
+                  <a:srgbClr val="000000"/>
+                </a:solidFill>
+                <a:latin typeface="Calibri" panose="020F0502020204030204" pitchFamily="34" charset="0"/>
+              </a:rPr>
+              <a:t>G2H-C</a:t>
+            </a:r>
+          </a:p>
+          <a:p>
+            <a:pPr marL="340614" indent="-285750" algn="l" rtl="0" eaLnBrk="1" latinLnBrk="0" hangingPunct="1">
+              <a:lnSpc>
+                <a:spcPct val="90000"/>
+              </a:lnSpc>
+              <a:spcAft>
+                <a:spcPts val="600"/>
+              </a:spcAft>
+              <a:buClrTx/>
+              <a:buSzPts val="1700"/>
+              <a:buFont typeface="Arial" panose="020B0604020202020204" pitchFamily="34" charset="0"/>
+              <a:buChar char="•"/>
+            </a:pPr>
+            <a:r>
+              <a:rPr lang="en-US" sz="1800" kern="1200" dirty="0">
+                <a:solidFill>
+                  <a:srgbClr val="000000"/>
+                </a:solidFill>
+                <a:effectLst/>
+                <a:latin typeface="Calibri" panose="020F0502020204030204" pitchFamily="34" charset="0"/>
+                <a:ea typeface="+mn-ea"/>
+                <a:cs typeface="+mn-cs"/>
+              </a:rPr>
+              <a:t>Participants preferred gestures to controllers</a:t>
+            </a:r>
+            <a:endParaRPr lang="en-US" sz="1400" dirty="0">
+              <a:effectLst/>
+            </a:endParaRPr>
+          </a:p>
+          <a:p>
+            <a:pPr marL="340614" indent="-285750" algn="l" rtl="0" eaLnBrk="1" latinLnBrk="0" hangingPunct="1">
               <a:lnSpc>
                 <a:spcPct val="90000"/>
               </a:lnSpc>
@@ -10559,29 +8062,27 @@
               <a:buChar char="•"/>
             </a:pPr>
             <a:r>
-              <a:rPr lang="en-US" sz="1600"/>
-              <a:t>Spell lesson input average  </a:t>
-            </a:r>
-          </a:p>
-          <a:p>
-            <a:pPr marL="285750" indent="-228600" defTabSz="914400">
-              <a:lnSpc>
-                <a:spcPct val="90000"/>
-              </a:lnSpc>
-              <a:spcAft>
-                <a:spcPts val="600"/>
-              </a:spcAft>
-              <a:buFont typeface="Arial" panose="020B0604020202020204" pitchFamily="34" charset="0"/>
-              <a:buChar char="•"/>
-            </a:pPr>
-            <a:endParaRPr lang="en-US" sz="1600"/>
+              <a:rPr lang="en-US" sz="1800" kern="1200" dirty="0">
+                <a:solidFill>
+                  <a:srgbClr val="000000"/>
+                </a:solidFill>
+                <a:effectLst/>
+                <a:latin typeface="Calibri" panose="020F0502020204030204" pitchFamily="34" charset="0"/>
+                <a:ea typeface="+mn-ea"/>
+                <a:cs typeface="+mn-cs"/>
+              </a:rPr>
+              <a:t>Participants preferred one hand over two</a:t>
+            </a:r>
+            <a:endParaRPr lang="en-US" sz="1400" dirty="0">
+              <a:effectLst/>
+            </a:endParaRPr>
           </a:p>
         </p:txBody>
       </p:sp>
     </p:spTree>
     <p:extLst>
       <p:ext uri="{BB962C8B-B14F-4D97-AF65-F5344CB8AC3E}">
-        <p14:creationId xmlns:p14="http://schemas.microsoft.com/office/powerpoint/2010/main" val="643281829"/>
+        <p14:creationId xmlns:p14="http://schemas.microsoft.com/office/powerpoint/2010/main" val="366039146"/>
       </p:ext>
     </p:extLst>
   </p:cSld>
@@ -11336,7 +8837,26 @@
                   </a:schemeClr>
                 </a:solidFill>
               </a:rPr>
-              <a:t>Learn to form spells with three-input glyphs</a:t>
+              <a:t>Most Efficient Control Type</a:t>
+            </a:r>
+          </a:p>
+          <a:p>
+            <a:pPr lvl="1">
+              <a:defRPr sz="2000">
+                <a:solidFill>
+                  <a:srgbClr val="FFFFFF"/>
+                </a:solidFill>
+              </a:defRPr>
+            </a:pPr>
+            <a:r>
+              <a:rPr lang="en-US" sz="1300" dirty="0">
+                <a:solidFill>
+                  <a:schemeClr val="tx1">
+                    <a:alpha val="80000"/>
+                  </a:schemeClr>
+                </a:solidFill>
+              </a:rPr>
+              <a:t>Gesture two-handed</a:t>
             </a:r>
           </a:p>
           <a:p>
@@ -11355,7 +8875,55 @@
                   </a:schemeClr>
                 </a:solidFill>
               </a:rPr>
-              <a:t>Understand Defense, Attack, Healing, Buff</a:t>
+              <a:t>Participant Preferred Control Type</a:t>
+            </a:r>
+          </a:p>
+          <a:p>
+            <a:pPr lvl="1">
+              <a:defRPr sz="2000">
+                <a:solidFill>
+                  <a:srgbClr val="FFFFFF"/>
+                </a:solidFill>
+              </a:defRPr>
+            </a:pPr>
+            <a:r>
+              <a:rPr lang="en-US" sz="1300" dirty="0">
+                <a:solidFill>
+                  <a:schemeClr val="tx1">
+                    <a:alpha val="80000"/>
+                  </a:schemeClr>
+                </a:solidFill>
+              </a:rPr>
+              <a:t>Gesture one-handed</a:t>
+            </a:r>
+          </a:p>
+          <a:p>
+            <a:pPr lvl="1">
+              <a:defRPr sz="2000">
+                <a:solidFill>
+                  <a:srgbClr val="FFFFFF"/>
+                </a:solidFill>
+              </a:defRPr>
+            </a:pPr>
+            <a:r>
+              <a:rPr lang="en-US" sz="1400" dirty="0">
+                <a:solidFill>
+                  <a:schemeClr val="tx1">
+                    <a:alpha val="80000"/>
+                  </a:schemeClr>
+                </a:solidFill>
+              </a:rPr>
+              <a:t>Less accurate than its two-handed counterpart</a:t>
+            </a:r>
+            <a:r>
+              <a:rPr lang="en-US" sz="1300" dirty="0">
+                <a:solidFill>
+                  <a:schemeClr val="tx1">
+                    <a:alpha val="80000"/>
+                  </a:schemeClr>
+                </a:solidFill>
+              </a:rPr>
+              <a:t> </a:t>
             </a:r>
           </a:p>
           <a:p>
@@ -11374,27 +8942,24 @@
                   </a:schemeClr>
                 </a:solidFill>
               </a:rPr>
-              <a:t>Practice accuracy and speed</a:t>
-            </a:r>
-          </a:p>
-          <a:p>
-            <a:pPr>
+              <a:t>G2H-C was almost universally disliked</a:t>
+            </a:r>
+          </a:p>
+          <a:p>
+            <a:pPr lvl="1">
               <a:defRPr sz="2000">
                 <a:solidFill>
                   <a:srgbClr val="FFFFFF"/>
                 </a:solidFill>
               </a:defRPr>
             </a:pPr>
-            <a:r>
-              <a:rPr lang="en-US" sz="1700" dirty="0">
-                <a:solidFill>
-                  <a:schemeClr val="tx1">
-                    <a:alpha val="80000"/>
-                  </a:schemeClr>
-                </a:solidFill>
-              </a:rPr>
-              <a:t>Complete class lesson with 8–16 spells</a:t>
-            </a:r>
+            <a:endParaRPr lang="en-US" sz="1300" dirty="0">
+              <a:solidFill>
+                <a:schemeClr val="tx1">
+                  <a:alpha val="80000"/>
+                </a:schemeClr>
+              </a:solidFill>
+            </a:endParaRPr>
           </a:p>
         </p:txBody>
       </p:sp>
@@ -14425,10 +11990,10 @@
       </p:grpSpPr>
       <p:sp useBgFill="1">
         <p:nvSpPr>
-          <p:cNvPr id="51" name="Rectangle 50">
+          <p:cNvPr id="61" name="Rectangle 60">
             <a:extLst>
               <a:ext uri="{FF2B5EF4-FFF2-40B4-BE49-F238E27FC236}">
-                <a16:creationId xmlns:a16="http://schemas.microsoft.com/office/drawing/2014/main" id="{DBC6133C-0615-4CE4-9132-37E609A9BDFA}"/>
+                <a16:creationId xmlns:a16="http://schemas.microsoft.com/office/drawing/2014/main" id="{700E0F77-E936-4985-B7B1-B9823486AC33}"/>
               </a:ext>
               <a:ext uri="{C183D7F6-B498-43B3-948B-1728B52AA6E4}">
                 <adec:decorative xmlns:adec="http://schemas.microsoft.com/office/drawing/2017/decorative" val="1"/>
@@ -14495,12 +12060,12 @@
         </p:nvSpPr>
         <p:spPr>
           <a:xfrm>
-            <a:off x="483798" y="525982"/>
-            <a:ext cx="3212237" cy="1200361"/>
-          </a:xfrm>
-        </p:spPr>
-        <p:txBody>
-          <a:bodyPr vert="horz" lIns="91440" tIns="45720" rIns="91440" bIns="45720" rtlCol="0" anchor="b">
+            <a:off x="388416" y="4883544"/>
+            <a:ext cx="2907065" cy="1556907"/>
+          </a:xfrm>
+        </p:spPr>
+        <p:txBody>
+          <a:bodyPr vert="horz" lIns="91440" tIns="45720" rIns="91440" bIns="45720" rtlCol="0" anchor="ctr">
             <a:normAutofit/>
           </a:bodyPr>
           <a:lstStyle/>
@@ -14511,7 +12076,7 @@
               </a:lnSpc>
             </a:pPr>
             <a:r>
-              <a:rPr lang="en-US" sz="3100" kern="1200" dirty="0">
+              <a:rPr lang="en-US" sz="2800" kern="1200">
                 <a:solidFill>
                   <a:schemeClr val="tx1"/>
                 </a:solidFill>
@@ -14526,10 +12091,10 @@
       </p:sp>
       <p:sp>
         <p:nvSpPr>
-          <p:cNvPr id="50" name="Rectangle 49">
+          <p:cNvPr id="63" name="Rectangle 62">
             <a:extLst>
               <a:ext uri="{FF2B5EF4-FFF2-40B4-BE49-F238E27FC236}">
-                <a16:creationId xmlns:a16="http://schemas.microsoft.com/office/drawing/2014/main" id="{169CC832-2974-4E8D-90ED-3E2941BA7336}"/>
+                <a16:creationId xmlns:a16="http://schemas.microsoft.com/office/drawing/2014/main" id="{95C8260E-968F-44E8-A823-ABB431311926}"/>
               </a:ext>
               <a:ext uri="{C183D7F6-B498-43B3-948B-1728B52AA6E4}">
                 <adec:decorative xmlns:adec="http://schemas.microsoft.com/office/drawing/2017/decorative" val="1"/>
@@ -14548,9 +12113,9 @@
           </p:nvPr>
         </p:nvSpPr>
         <p:spPr>
-          <a:xfrm flipH="1">
-            <a:off x="462399" y="1944913"/>
-            <a:ext cx="3017520" cy="27432"/>
+          <a:xfrm>
+            <a:off x="0" y="0"/>
+            <a:ext cx="9144000" cy="865848"/>
           </a:xfrm>
           <a:prstGeom prst="rect">
             <a:avLst/>
@@ -14589,6 +12154,169 @@
       </p:sp>
       <p:sp>
         <p:nvSpPr>
+          <p:cNvPr id="65" name="Rectangle 64">
+            <a:extLst>
+              <a:ext uri="{FF2B5EF4-FFF2-40B4-BE49-F238E27FC236}">
+                <a16:creationId xmlns:a16="http://schemas.microsoft.com/office/drawing/2014/main" id="{2C1BBA94-3F40-40AA-8BB9-E69E25E537C1}"/>
+              </a:ext>
+              <a:ext uri="{C183D7F6-B498-43B3-948B-1728B52AA6E4}">
+                <adec:decorative xmlns:adec="http://schemas.microsoft.com/office/drawing/2017/decorative" val="1"/>
+              </a:ext>
+            </a:extLst>
+          </p:cNvPr>
+          <p:cNvSpPr>
+            <a:spLocks noGrp="1" noRot="1" noChangeAspect="1" noMove="1" noResize="1" noEditPoints="1" noAdjustHandles="1" noChangeArrowheads="1" noChangeShapeType="1" noTextEdit="1"/>
+          </p:cNvSpPr>
+          <p:nvPr>
+            <p:extLst>
+              <p:ext uri="{386F3935-93C4-4BCD-93E2-E3B085C9AB24}">
+                <p16:designElem xmlns:p16="http://schemas.microsoft.com/office/powerpoint/2015/main" val="1"/>
+              </p:ext>
+            </p:extLst>
+          </p:nvPr>
+        </p:nvSpPr>
+        <p:spPr>
+          <a:xfrm>
+            <a:off x="388416" y="0"/>
+            <a:ext cx="8423809" cy="4588184"/>
+          </a:xfrm>
+          <a:prstGeom prst="rect">
+            <a:avLst/>
+          </a:prstGeom>
+          <a:solidFill>
+            <a:schemeClr val="bg1"/>
+          </a:solidFill>
+          <a:ln>
+            <a:noFill/>
+          </a:ln>
+          <a:effectLst>
+            <a:outerShdw blurRad="139700" dist="127000" dir="5400000" algn="t" rotWithShape="0">
+              <a:prstClr val="black">
+                <a:alpha val="15000"/>
+              </a:prstClr>
+            </a:outerShdw>
+          </a:effectLst>
+        </p:spPr>
+        <p:style>
+          <a:lnRef idx="2">
+            <a:schemeClr val="accent1">
+              <a:shade val="50000"/>
+            </a:schemeClr>
+          </a:lnRef>
+          <a:fillRef idx="1">
+            <a:schemeClr val="accent1"/>
+          </a:fillRef>
+          <a:effectRef idx="0">
+            <a:schemeClr val="accent1"/>
+          </a:effectRef>
+          <a:fontRef idx="minor">
+            <a:schemeClr val="lt1"/>
+          </a:fontRef>
+        </p:style>
+        <p:txBody>
+          <a:bodyPr rtlCol="0" anchor="ctr"/>
+          <a:lstStyle/>
+          <a:p>
+            <a:pPr algn="ctr"/>
+            <a:endParaRPr lang="en-US"/>
+          </a:p>
+        </p:txBody>
+      </p:sp>
+      <p:pic>
+        <p:nvPicPr>
+          <p:cNvPr id="7" name="Picture 6" descr="A table with black text and black text&#10;&#10;AI-generated content may be incorrect.">
+            <a:extLst>
+              <a:ext uri="{FF2B5EF4-FFF2-40B4-BE49-F238E27FC236}">
+                <a16:creationId xmlns:a16="http://schemas.microsoft.com/office/drawing/2014/main" id="{CBD60655-DF7C-07BE-A932-F4601FFC0E1A}"/>
+              </a:ext>
+            </a:extLst>
+          </p:cNvPr>
+          <p:cNvPicPr>
+            <a:picLocks noChangeAspect="1"/>
+          </p:cNvPicPr>
+          <p:nvPr/>
+        </p:nvPicPr>
+        <p:blipFill>
+          <a:blip r:embed="rId2"/>
+          <a:stretch>
+            <a:fillRect/>
+          </a:stretch>
+        </p:blipFill>
+        <p:spPr>
+          <a:xfrm>
+            <a:off x="719403" y="591163"/>
+            <a:ext cx="7777234" cy="3413951"/>
+          </a:xfrm>
+          <a:prstGeom prst="rect">
+            <a:avLst/>
+          </a:prstGeom>
+        </p:spPr>
+      </p:pic>
+      <p:sp>
+        <p:nvSpPr>
+          <p:cNvPr id="67" name="Rectangle 66">
+            <a:extLst>
+              <a:ext uri="{FF2B5EF4-FFF2-40B4-BE49-F238E27FC236}">
+                <a16:creationId xmlns:a16="http://schemas.microsoft.com/office/drawing/2014/main" id="{FE43805F-24A6-46A4-B19B-54F28347355C}"/>
+              </a:ext>
+              <a:ext uri="{C183D7F6-B498-43B3-948B-1728B52AA6E4}">
+                <adec:decorative xmlns:adec="http://schemas.microsoft.com/office/drawing/2017/decorative" val="1"/>
+              </a:ext>
+            </a:extLst>
+          </p:cNvPr>
+          <p:cNvSpPr>
+            <a:spLocks noGrp="1" noRot="1" noChangeAspect="1" noMove="1" noResize="1" noEditPoints="1" noAdjustHandles="1" noChangeArrowheads="1" noChangeShapeType="1" noTextEdit="1"/>
+          </p:cNvSpPr>
+          <p:nvPr>
+            <p:extLst>
+              <p:ext uri="{386F3935-93C4-4BCD-93E2-E3B085C9AB24}">
+                <p16:designElem xmlns:p16="http://schemas.microsoft.com/office/powerpoint/2015/main" val="1"/>
+              </p:ext>
+            </p:extLst>
+          </p:nvPr>
+        </p:nvSpPr>
+        <p:spPr>
+          <a:xfrm rot="5400000" flipH="1">
+            <a:off x="2817950" y="5666847"/>
+            <a:ext cx="1463040" cy="34289"/>
+          </a:xfrm>
+          <a:prstGeom prst="rect">
+            <a:avLst/>
+          </a:prstGeom>
+          <a:solidFill>
+            <a:schemeClr val="accent4"/>
+          </a:solidFill>
+          <a:ln>
+            <a:noFill/>
+          </a:ln>
+        </p:spPr>
+        <p:style>
+          <a:lnRef idx="2">
+            <a:schemeClr val="accent1">
+              <a:shade val="50000"/>
+            </a:schemeClr>
+          </a:lnRef>
+          <a:fillRef idx="1">
+            <a:schemeClr val="accent1"/>
+          </a:fillRef>
+          <a:effectRef idx="0">
+            <a:schemeClr val="accent1"/>
+          </a:effectRef>
+          <a:fontRef idx="minor">
+            <a:schemeClr val="lt1"/>
+          </a:fontRef>
+        </p:style>
+        <p:txBody>
+          <a:bodyPr rtlCol="0" anchor="ctr"/>
+          <a:lstStyle/>
+          <a:p>
+            <a:pPr algn="ctr"/>
+            <a:endParaRPr lang="en-US"/>
+          </a:p>
+        </p:txBody>
+      </p:sp>
+      <p:sp>
+        <p:nvSpPr>
           <p:cNvPr id="9" name="TextBox 8">
             <a:extLst>
               <a:ext uri="{FF2B5EF4-FFF2-40B4-BE49-F238E27FC236}">
@@ -14601,8 +12329,8 @@
         </p:nvSpPr>
         <p:spPr>
           <a:xfrm>
-            <a:off x="483799" y="2031101"/>
-            <a:ext cx="3212238" cy="3511943"/>
+            <a:off x="3872039" y="4883544"/>
+            <a:ext cx="4940186" cy="1556907"/>
           </a:xfrm>
           <a:prstGeom prst="rect">
             <a:avLst/>
@@ -14614,13 +12342,15 @@
           </a:bodyPr>
           <a:lstStyle/>
           <a:p>
-            <a:pPr algn="ctr" defTabSz="914400">
+            <a:pPr indent="-228600" defTabSz="914400">
               <a:lnSpc>
                 <a:spcPct val="90000"/>
               </a:lnSpc>
               <a:spcAft>
                 <a:spcPts val="600"/>
               </a:spcAft>
+              <a:buFont typeface="Arial" panose="020B0604020202020204" pitchFamily="34" charset="0"/>
+              <a:buChar char="•"/>
               <a:defRPr sz="2000">
                 <a:solidFill>
                   <a:srgbClr val="FFFFFF"/>
@@ -14661,232 +12391,6 @@
           </a:p>
         </p:txBody>
       </p:sp>
-      <p:sp>
-        <p:nvSpPr>
-          <p:cNvPr id="52" name="Rectangle 51">
-            <a:extLst>
-              <a:ext uri="{FF2B5EF4-FFF2-40B4-BE49-F238E27FC236}">
-                <a16:creationId xmlns:a16="http://schemas.microsoft.com/office/drawing/2014/main" id="{55222F96-971A-4F90-B841-6BAB416C7AC1}"/>
-              </a:ext>
-              <a:ext uri="{C183D7F6-B498-43B3-948B-1728B52AA6E4}">
-                <adec:decorative xmlns:adec="http://schemas.microsoft.com/office/drawing/2017/decorative" val="1"/>
-              </a:ext>
-            </a:extLst>
-          </p:cNvPr>
-          <p:cNvSpPr>
-            <a:spLocks noGrp="1" noRot="1" noChangeAspect="1" noMove="1" noResize="1" noEditPoints="1" noAdjustHandles="1" noChangeArrowheads="1" noChangeShapeType="1" noTextEdit="1"/>
-          </p:cNvSpPr>
-          <p:nvPr>
-            <p:extLst>
-              <p:ext uri="{386F3935-93C4-4BCD-93E2-E3B085C9AB24}">
-                <p16:designElem xmlns:p16="http://schemas.microsoft.com/office/powerpoint/2015/main" val="1"/>
-              </p:ext>
-            </p:extLst>
-          </p:nvPr>
-        </p:nvSpPr>
-        <p:spPr>
-          <a:xfrm rot="5400000">
-            <a:off x="-261965" y="6072626"/>
-            <a:ext cx="740664" cy="115593"/>
-          </a:xfrm>
-          <a:prstGeom prst="rect">
-            <a:avLst/>
-          </a:prstGeom>
-          <a:solidFill>
-            <a:schemeClr val="accent4"/>
-          </a:solidFill>
-          <a:ln>
-            <a:noFill/>
-          </a:ln>
-        </p:spPr>
-        <p:style>
-          <a:lnRef idx="2">
-            <a:schemeClr val="accent1">
-              <a:shade val="50000"/>
-            </a:schemeClr>
-          </a:lnRef>
-          <a:fillRef idx="1">
-            <a:schemeClr val="accent1"/>
-          </a:fillRef>
-          <a:effectRef idx="0">
-            <a:schemeClr val="accent1"/>
-          </a:effectRef>
-          <a:fontRef idx="minor">
-            <a:schemeClr val="lt1"/>
-          </a:fontRef>
-        </p:style>
-        <p:txBody>
-          <a:bodyPr rtlCol="0" anchor="ctr"/>
-          <a:lstStyle/>
-          <a:p>
-            <a:pPr algn="ctr"/>
-            <a:endParaRPr lang="en-US"/>
-          </a:p>
-        </p:txBody>
-      </p:sp>
-      <p:sp>
-        <p:nvSpPr>
-          <p:cNvPr id="54" name="Rectangle 53">
-            <a:extLst>
-              <a:ext uri="{FF2B5EF4-FFF2-40B4-BE49-F238E27FC236}">
-                <a16:creationId xmlns:a16="http://schemas.microsoft.com/office/drawing/2014/main" id="{08980754-6F4B-43C9-B9BE-127B6BED6586}"/>
-              </a:ext>
-              <a:ext uri="{C183D7F6-B498-43B3-948B-1728B52AA6E4}">
-                <adec:decorative xmlns:adec="http://schemas.microsoft.com/office/drawing/2017/decorative" val="1"/>
-              </a:ext>
-            </a:extLst>
-          </p:cNvPr>
-          <p:cNvSpPr>
-            <a:spLocks noGrp="1" noRot="1" noChangeAspect="1" noMove="1" noResize="1" noEditPoints="1" noAdjustHandles="1" noChangeArrowheads="1" noChangeShapeType="1" noTextEdit="1"/>
-          </p:cNvSpPr>
-          <p:nvPr>
-            <p:extLst>
-              <p:ext uri="{386F3935-93C4-4BCD-93E2-E3B085C9AB24}">
-                <p16:designElem xmlns:p16="http://schemas.microsoft.com/office/powerpoint/2015/main" val="1"/>
-              </p:ext>
-            </p:extLst>
-          </p:nvPr>
-        </p:nvSpPr>
-        <p:spPr>
-          <a:xfrm rot="5400000">
-            <a:off x="4336109" y="1694387"/>
-            <a:ext cx="740664" cy="8875118"/>
-          </a:xfrm>
-          <a:prstGeom prst="rect">
-            <a:avLst/>
-          </a:prstGeom>
-          <a:solidFill>
-            <a:schemeClr val="accent4"/>
-          </a:solidFill>
-          <a:ln>
-            <a:noFill/>
-          </a:ln>
-        </p:spPr>
-        <p:style>
-          <a:lnRef idx="2">
-            <a:schemeClr val="accent1">
-              <a:shade val="50000"/>
-            </a:schemeClr>
-          </a:lnRef>
-          <a:fillRef idx="1">
-            <a:schemeClr val="accent1"/>
-          </a:fillRef>
-          <a:effectRef idx="0">
-            <a:schemeClr val="accent1"/>
-          </a:effectRef>
-          <a:fontRef idx="minor">
-            <a:schemeClr val="lt1"/>
-          </a:fontRef>
-        </p:style>
-        <p:txBody>
-          <a:bodyPr rtlCol="0" anchor="ctr"/>
-          <a:lstStyle/>
-          <a:p>
-            <a:pPr algn="ctr"/>
-            <a:endParaRPr lang="en-US"/>
-          </a:p>
-        </p:txBody>
-      </p:sp>
-      <p:sp>
-        <p:nvSpPr>
-          <p:cNvPr id="56" name="Rectangle 55">
-            <a:extLst>
-              <a:ext uri="{FF2B5EF4-FFF2-40B4-BE49-F238E27FC236}">
-                <a16:creationId xmlns:a16="http://schemas.microsoft.com/office/drawing/2014/main" id="{2C1BBA94-3F40-40AA-8BB9-E69E25E537C1}"/>
-              </a:ext>
-              <a:ext uri="{C183D7F6-B498-43B3-948B-1728B52AA6E4}">
-                <adec:decorative xmlns:adec="http://schemas.microsoft.com/office/drawing/2017/decorative" val="1"/>
-              </a:ext>
-            </a:extLst>
-          </p:cNvPr>
-          <p:cNvSpPr>
-            <a:spLocks noGrp="1" noRot="1" noChangeAspect="1" noMove="1" noResize="1" noEditPoints="1" noAdjustHandles="1" noChangeArrowheads="1" noChangeShapeType="1" noTextEdit="1"/>
-          </p:cNvSpPr>
-          <p:nvPr>
-            <p:extLst>
-              <p:ext uri="{386F3935-93C4-4BCD-93E2-E3B085C9AB24}">
-                <p16:designElem xmlns:p16="http://schemas.microsoft.com/office/powerpoint/2015/main" val="1"/>
-              </p:ext>
-            </p:extLst>
-          </p:nvPr>
-        </p:nvSpPr>
-        <p:spPr>
-          <a:xfrm>
-            <a:off x="4272594" y="354959"/>
-            <a:ext cx="4638730" cy="5915212"/>
-          </a:xfrm>
-          <a:prstGeom prst="rect">
-            <a:avLst/>
-          </a:prstGeom>
-          <a:solidFill>
-            <a:schemeClr val="bg1"/>
-          </a:solidFill>
-          <a:ln>
-            <a:noFill/>
-          </a:ln>
-          <a:effectLst>
-            <a:outerShdw blurRad="139700" dist="127000" dir="5400000" algn="t" rotWithShape="0">
-              <a:prstClr val="black">
-                <a:alpha val="15000"/>
-              </a:prstClr>
-            </a:outerShdw>
-          </a:effectLst>
-        </p:spPr>
-        <p:style>
-          <a:lnRef idx="2">
-            <a:schemeClr val="accent1">
-              <a:shade val="50000"/>
-            </a:schemeClr>
-          </a:lnRef>
-          <a:fillRef idx="1">
-            <a:schemeClr val="accent1"/>
-          </a:fillRef>
-          <a:effectRef idx="0">
-            <a:schemeClr val="accent1"/>
-          </a:effectRef>
-          <a:fontRef idx="minor">
-            <a:schemeClr val="lt1"/>
-          </a:fontRef>
-        </p:style>
-        <p:txBody>
-          <a:bodyPr rtlCol="0" anchor="ctr"/>
-          <a:lstStyle/>
-          <a:p>
-            <a:pPr algn="ctr"/>
-            <a:endParaRPr lang="en-US"/>
-          </a:p>
-        </p:txBody>
-      </p:sp>
-      <p:pic>
-        <p:nvPicPr>
-          <p:cNvPr id="7" name="Picture 6" descr="A table with black text and black text&#10;&#10;AI-generated content may be incorrect.">
-            <a:extLst>
-              <a:ext uri="{FF2B5EF4-FFF2-40B4-BE49-F238E27FC236}">
-                <a16:creationId xmlns:a16="http://schemas.microsoft.com/office/drawing/2014/main" id="{CBD60655-DF7C-07BE-A932-F4601FFC0E1A}"/>
-              </a:ext>
-            </a:extLst>
-          </p:cNvPr>
-          <p:cNvPicPr>
-            <a:picLocks noChangeAspect="1"/>
-          </p:cNvPicPr>
-          <p:nvPr/>
-        </p:nvPicPr>
-        <p:blipFill>
-          <a:blip r:embed="rId2"/>
-          <a:stretch>
-            <a:fillRect/>
-          </a:stretch>
-        </p:blipFill>
-        <p:spPr>
-          <a:xfrm>
-            <a:off x="4490803" y="2386122"/>
-            <a:ext cx="4221014" cy="1852886"/>
-          </a:xfrm>
-          <a:prstGeom prst="rect">
-            <a:avLst/>
-          </a:prstGeom>
-        </p:spPr>
-      </p:pic>
     </p:spTree>
   </p:cSld>
   <p:clrMapOvr>
@@ -15263,10 +12767,10 @@
       </p:grpSpPr>
       <p:sp useBgFill="1">
         <p:nvSpPr>
-          <p:cNvPr id="16" name="Rectangle 15">
+          <p:cNvPr id="22" name="Rectangle 21">
             <a:extLst>
               <a:ext uri="{FF2B5EF4-FFF2-40B4-BE49-F238E27FC236}">
-                <a16:creationId xmlns:a16="http://schemas.microsoft.com/office/drawing/2014/main" id="{66E48AFA-8884-4F68-A44F-D2C1E8609C5A}"/>
+                <a16:creationId xmlns:a16="http://schemas.microsoft.com/office/drawing/2014/main" id="{700E0F77-E936-4985-B7B1-B9823486AC33}"/>
               </a:ext>
               <a:ext uri="{C183D7F6-B498-43B3-948B-1728B52AA6E4}">
                 <adec:decorative xmlns:adec="http://schemas.microsoft.com/office/drawing/2017/decorative" val="1"/>
@@ -15284,10 +12788,10 @@
             </p:extLst>
           </p:nvPr>
         </p:nvSpPr>
-        <p:spPr bwMode="white">
+        <p:spPr>
           <a:xfrm>
             <a:off x="0" y="0"/>
-            <a:ext cx="9144000" cy="6858000"/>
+            <a:ext cx="9143999" cy="6857365"/>
           </a:xfrm>
           <a:prstGeom prst="rect">
             <a:avLst/>
@@ -15314,101 +12818,7 @@
         </p:style>
         <p:txBody>
           <a:bodyPr rtlCol="0" anchor="ctr"/>
-          <a:lstStyle>
-            <a:defPPr>
-              <a:defRPr lang="en-US"/>
-            </a:defPPr>
-            <a:lvl1pPr marL="0" algn="l" defTabSz="914400" rtl="0" eaLnBrk="1" latinLnBrk="0" hangingPunct="1">
-              <a:defRPr sz="1800" kern="1200">
-                <a:solidFill>
-                  <a:schemeClr val="lt1"/>
-                </a:solidFill>
-                <a:latin typeface="+mn-lt"/>
-                <a:ea typeface="+mn-ea"/>
-                <a:cs typeface="+mn-cs"/>
-              </a:defRPr>
-            </a:lvl1pPr>
-            <a:lvl2pPr marL="457200" algn="l" defTabSz="914400" rtl="0" eaLnBrk="1" latinLnBrk="0" hangingPunct="1">
-              <a:defRPr sz="1800" kern="1200">
-                <a:solidFill>
-                  <a:schemeClr val="lt1"/>
-                </a:solidFill>
-                <a:latin typeface="+mn-lt"/>
-                <a:ea typeface="+mn-ea"/>
-                <a:cs typeface="+mn-cs"/>
-              </a:defRPr>
-            </a:lvl2pPr>
-            <a:lvl3pPr marL="914400" algn="l" defTabSz="914400" rtl="0" eaLnBrk="1" latinLnBrk="0" hangingPunct="1">
-              <a:defRPr sz="1800" kern="1200">
-                <a:solidFill>
-                  <a:schemeClr val="lt1"/>
-                </a:solidFill>
-                <a:latin typeface="+mn-lt"/>
-                <a:ea typeface="+mn-ea"/>
-                <a:cs typeface="+mn-cs"/>
-              </a:defRPr>
-            </a:lvl3pPr>
-            <a:lvl4pPr marL="1371600" algn="l" defTabSz="914400" rtl="0" eaLnBrk="1" latinLnBrk="0" hangingPunct="1">
-              <a:defRPr sz="1800" kern="1200">
-                <a:solidFill>
-                  <a:schemeClr val="lt1"/>
-                </a:solidFill>
-                <a:latin typeface="+mn-lt"/>
-                <a:ea typeface="+mn-ea"/>
-                <a:cs typeface="+mn-cs"/>
-              </a:defRPr>
-            </a:lvl4pPr>
-            <a:lvl5pPr marL="1828800" algn="l" defTabSz="914400" rtl="0" eaLnBrk="1" latinLnBrk="0" hangingPunct="1">
-              <a:defRPr sz="1800" kern="1200">
-                <a:solidFill>
-                  <a:schemeClr val="lt1"/>
-                </a:solidFill>
-                <a:latin typeface="+mn-lt"/>
-                <a:ea typeface="+mn-ea"/>
-                <a:cs typeface="+mn-cs"/>
-              </a:defRPr>
-            </a:lvl5pPr>
-            <a:lvl6pPr marL="2286000" algn="l" defTabSz="914400" rtl="0" eaLnBrk="1" latinLnBrk="0" hangingPunct="1">
-              <a:defRPr sz="1800" kern="1200">
-                <a:solidFill>
-                  <a:schemeClr val="lt1"/>
-                </a:solidFill>
-                <a:latin typeface="+mn-lt"/>
-                <a:ea typeface="+mn-ea"/>
-                <a:cs typeface="+mn-cs"/>
-              </a:defRPr>
-            </a:lvl6pPr>
-            <a:lvl7pPr marL="2743200" algn="l" defTabSz="914400" rtl="0" eaLnBrk="1" latinLnBrk="0" hangingPunct="1">
-              <a:defRPr sz="1800" kern="1200">
-                <a:solidFill>
-                  <a:schemeClr val="lt1"/>
-                </a:solidFill>
-                <a:latin typeface="+mn-lt"/>
-                <a:ea typeface="+mn-ea"/>
-                <a:cs typeface="+mn-cs"/>
-              </a:defRPr>
-            </a:lvl7pPr>
-            <a:lvl8pPr marL="3200400" algn="l" defTabSz="914400" rtl="0" eaLnBrk="1" latinLnBrk="0" hangingPunct="1">
-              <a:defRPr sz="1800" kern="1200">
-                <a:solidFill>
-                  <a:schemeClr val="lt1"/>
-                </a:solidFill>
-                <a:latin typeface="+mn-lt"/>
-                <a:ea typeface="+mn-ea"/>
-                <a:cs typeface="+mn-cs"/>
-              </a:defRPr>
-            </a:lvl8pPr>
-            <a:lvl9pPr marL="3657600" algn="l" defTabSz="914400" rtl="0" eaLnBrk="1" latinLnBrk="0" hangingPunct="1">
-              <a:defRPr sz="1800" kern="1200">
-                <a:solidFill>
-                  <a:schemeClr val="lt1"/>
-                </a:solidFill>
-                <a:latin typeface="+mn-lt"/>
-                <a:ea typeface="+mn-ea"/>
-                <a:cs typeface="+mn-cs"/>
-              </a:defRPr>
-            </a:lvl9pPr>
-          </a:lstStyle>
+          <a:lstStyle/>
           <a:p>
             <a:pPr algn="ctr"/>
             <a:endParaRPr lang="en-US"/>
@@ -15433,34 +12843,34 @@
         </p:nvSpPr>
         <p:spPr>
           <a:xfrm>
-            <a:off x="628650" y="3998018"/>
-            <a:ext cx="2986391" cy="2216513"/>
-          </a:xfrm>
-        </p:spPr>
-        <p:txBody>
-          <a:bodyPr>
+            <a:off x="388416" y="4883544"/>
+            <a:ext cx="2907065" cy="1556907"/>
+          </a:xfrm>
+        </p:spPr>
+        <p:txBody>
+          <a:bodyPr anchor="ctr">
             <a:normAutofit/>
           </a:bodyPr>
           <a:lstStyle/>
           <a:p>
             <a:r>
-              <a:rPr lang="en-US" kern="1200">
+              <a:rPr lang="en-US" sz="2800" kern="1200">
                 <a:latin typeface="+mj-lt"/>
                 <a:ea typeface="+mj-ea"/>
                 <a:cs typeface="+mj-cs"/>
               </a:rPr>
               <a:t>Controllers</a:t>
             </a:r>
-            <a:endParaRPr lang="en-US" dirty="0"/>
+            <a:endParaRPr lang="en-US" sz="2800"/>
           </a:p>
         </p:txBody>
       </p:sp>
       <p:sp>
         <p:nvSpPr>
-          <p:cNvPr id="17" name="Arc 16">
+          <p:cNvPr id="24" name="Rectangle 23">
             <a:extLst>
               <a:ext uri="{FF2B5EF4-FFF2-40B4-BE49-F238E27FC236}">
-                <a16:creationId xmlns:a16="http://schemas.microsoft.com/office/drawing/2014/main" id="{969D19A6-08CB-498C-93EC-3FFB021FC68A}"/>
+                <a16:creationId xmlns:a16="http://schemas.microsoft.com/office/drawing/2014/main" id="{95C8260E-968F-44E8-A823-ABB431311926}"/>
               </a:ext>
               <a:ext uri="{C183D7F6-B498-43B3-948B-1728B52AA6E4}">
                 <adec:decorative xmlns:adec="http://schemas.microsoft.com/office/drawing/2017/decorative" val="1"/>
@@ -15479,73 +12889,112 @@
           </p:nvPr>
         </p:nvSpPr>
         <p:spPr>
-          <a:xfrm rot="6269068">
-            <a:off x="6164896" y="3712762"/>
-            <a:ext cx="2987899" cy="2240924"/>
-          </a:xfrm>
-          <a:prstGeom prst="arc">
-            <a:avLst>
-              <a:gd name="adj1" fmla="val 14441841"/>
-              <a:gd name="adj2" fmla="val 0"/>
-            </a:avLst>
+          <a:xfrm>
+            <a:off x="0" y="0"/>
+            <a:ext cx="9144000" cy="865848"/>
+          </a:xfrm>
+          <a:prstGeom prst="rect">
+            <a:avLst/>
           </a:prstGeom>
-          <a:ln w="127000" cap="rnd">
-            <a:solidFill>
-              <a:schemeClr val="accent4"/>
-            </a:solidFill>
-            <a:prstDash val="dash"/>
-            <a:miter lim="800000"/>
+          <a:solidFill>
+            <a:schemeClr val="accent4"/>
+          </a:solidFill>
+          <a:ln>
+            <a:noFill/>
           </a:ln>
         </p:spPr>
         <p:style>
-          <a:lnRef idx="1">
-            <a:schemeClr val="accent1"/>
+          <a:lnRef idx="2">
+            <a:schemeClr val="accent1">
+              <a:shade val="50000"/>
+            </a:schemeClr>
           </a:lnRef>
-          <a:fillRef idx="0">
+          <a:fillRef idx="1">
             <a:schemeClr val="accent1"/>
           </a:fillRef>
           <a:effectRef idx="0">
             <a:schemeClr val="accent1"/>
           </a:effectRef>
           <a:fontRef idx="minor">
-            <a:schemeClr val="tx1"/>
+            <a:schemeClr val="lt1"/>
           </a:fontRef>
         </p:style>
         <p:txBody>
           <a:bodyPr rtlCol="0" anchor="ctr"/>
           <a:lstStyle/>
           <a:p>
-            <a:pPr marL="0" marR="0" lvl="0" indent="0" algn="ctr" defTabSz="914400" rtl="0" eaLnBrk="1" fontAlgn="auto" latinLnBrk="0" hangingPunct="1">
-              <a:lnSpc>
-                <a:spcPct val="100000"/>
-              </a:lnSpc>
-              <a:spcBef>
-                <a:spcPts val="0"/>
-              </a:spcBef>
-              <a:spcAft>
-                <a:spcPts val="0"/>
-              </a:spcAft>
-              <a:buClrTx/>
-              <a:buSzTx/>
-              <a:buFontTx/>
-              <a:buNone/>
-              <a:tabLst/>
-              <a:defRPr/>
-            </a:pPr>
-            <a:endParaRPr kumimoji="0" lang="en-US" sz="1800" b="0" i="0" u="none" strike="noStrike" kern="1200" cap="none" spc="0" normalizeH="0" baseline="0" noProof="0">
-              <a:ln>
-                <a:noFill/>
-              </a:ln>
-              <a:solidFill>
-                <a:srgbClr val="000000"/>
-              </a:solidFill>
-              <a:effectLst/>
-              <a:uLnTx/>
-              <a:uFillTx/>
-              <a:latin typeface="Calibri" panose="020F0502020204030204"/>
-              <a:ea typeface="+mn-ea"/>
-              <a:cs typeface="+mn-cs"/>
-            </a:endParaRPr>
+            <a:pPr algn="ctr"/>
+            <a:endParaRPr lang="en-US"/>
+          </a:p>
+        </p:txBody>
+      </p:sp>
+      <p:sp>
+        <p:nvSpPr>
+          <p:cNvPr id="26" name="Rectangle 25">
+            <a:extLst>
+              <a:ext uri="{FF2B5EF4-FFF2-40B4-BE49-F238E27FC236}">
+                <a16:creationId xmlns:a16="http://schemas.microsoft.com/office/drawing/2014/main" id="{2C1BBA94-3F40-40AA-8BB9-E69E25E537C1}"/>
+              </a:ext>
+              <a:ext uri="{C183D7F6-B498-43B3-948B-1728B52AA6E4}">
+                <adec:decorative xmlns:adec="http://schemas.microsoft.com/office/drawing/2017/decorative" val="1"/>
+              </a:ext>
+            </a:extLst>
+          </p:cNvPr>
+          <p:cNvSpPr>
+            <a:spLocks noGrp="1" noRot="1" noChangeAspect="1" noMove="1" noResize="1" noEditPoints="1" noAdjustHandles="1" noChangeArrowheads="1" noChangeShapeType="1" noTextEdit="1"/>
+          </p:cNvSpPr>
+          <p:nvPr>
+            <p:extLst>
+              <p:ext uri="{386F3935-93C4-4BCD-93E2-E3B085C9AB24}">
+                <p16:designElem xmlns:p16="http://schemas.microsoft.com/office/powerpoint/2015/main" val="1"/>
+              </p:ext>
+            </p:extLst>
+          </p:nvPr>
+        </p:nvSpPr>
+        <p:spPr>
+          <a:xfrm>
+            <a:off x="388416" y="0"/>
+            <a:ext cx="8423809" cy="4588184"/>
+          </a:xfrm>
+          <a:prstGeom prst="rect">
+            <a:avLst/>
+          </a:prstGeom>
+          <a:solidFill>
+            <a:schemeClr val="bg1"/>
+          </a:solidFill>
+          <a:ln>
+            <a:noFill/>
+          </a:ln>
+          <a:effectLst>
+            <a:outerShdw blurRad="139700" dist="127000" dir="5400000" algn="t" rotWithShape="0">
+              <a:prstClr val="black">
+                <a:alpha val="15000"/>
+              </a:prstClr>
+            </a:outerShdw>
+          </a:effectLst>
+        </p:spPr>
+        <p:style>
+          <a:lnRef idx="2">
+            <a:schemeClr val="accent1">
+              <a:shade val="50000"/>
+            </a:schemeClr>
+          </a:lnRef>
+          <a:fillRef idx="1">
+            <a:schemeClr val="accent1"/>
+          </a:fillRef>
+          <a:effectRef idx="0">
+            <a:schemeClr val="accent1"/>
+          </a:effectRef>
+          <a:fontRef idx="minor">
+            <a:schemeClr val="lt1"/>
+          </a:fontRef>
+        </p:style>
+        <p:txBody>
+          <a:bodyPr rtlCol="0" anchor="ctr"/>
+          <a:lstStyle/>
+          <a:p>
+            <a:pPr algn="ctr"/>
+            <a:endParaRPr lang="en-US"/>
           </a:p>
         </p:txBody>
       </p:sp>
@@ -15571,58 +13020,77 @@
         </p:blipFill>
         <p:spPr>
           <a:xfrm>
-            <a:off x="494935" y="1031470"/>
-            <a:ext cx="8154129" cy="2303540"/>
-          </a:xfrm>
-          <a:custGeom>
+            <a:off x="719403" y="1199604"/>
+            <a:ext cx="7777234" cy="2197068"/>
+          </a:xfrm>
+          <a:prstGeom prst="rect">
             <a:avLst/>
-            <a:gdLst/>
-            <a:ahLst/>
-            <a:cxnLst/>
-            <a:rect l="l" t="t" r="r" b="b"/>
-            <a:pathLst>
-              <a:path w="10580201" h="2957472">
-                <a:moveTo>
-                  <a:pt x="88961" y="0"/>
-                </a:moveTo>
-                <a:lnTo>
-                  <a:pt x="10491240" y="0"/>
-                </a:lnTo>
-                <a:cubicBezTo>
-                  <a:pt x="10540372" y="0"/>
-                  <a:pt x="10580201" y="39829"/>
-                  <a:pt x="10580201" y="88961"/>
-                </a:cubicBezTo>
-                <a:lnTo>
-                  <a:pt x="10580201" y="2868511"/>
-                </a:lnTo>
-                <a:cubicBezTo>
-                  <a:pt x="10580201" y="2917643"/>
-                  <a:pt x="10540372" y="2957472"/>
-                  <a:pt x="10491240" y="2957472"/>
-                </a:cubicBezTo>
-                <a:lnTo>
-                  <a:pt x="88961" y="2957472"/>
-                </a:lnTo>
-                <a:cubicBezTo>
-                  <a:pt x="39829" y="2957472"/>
-                  <a:pt x="0" y="2917643"/>
-                  <a:pt x="0" y="2868511"/>
-                </a:cubicBezTo>
-                <a:lnTo>
-                  <a:pt x="0" y="88961"/>
-                </a:lnTo>
-                <a:cubicBezTo>
-                  <a:pt x="0" y="39829"/>
-                  <a:pt x="39829" y="0"/>
-                  <a:pt x="88961" y="0"/>
-                </a:cubicBezTo>
-                <a:close/>
-              </a:path>
-            </a:pathLst>
-          </a:custGeom>
+          </a:prstGeom>
         </p:spPr>
       </p:pic>
+      <p:sp>
+        <p:nvSpPr>
+          <p:cNvPr id="28" name="Rectangle 27">
+            <a:extLst>
+              <a:ext uri="{FF2B5EF4-FFF2-40B4-BE49-F238E27FC236}">
+                <a16:creationId xmlns:a16="http://schemas.microsoft.com/office/drawing/2014/main" id="{FE43805F-24A6-46A4-B19B-54F28347355C}"/>
+              </a:ext>
+              <a:ext uri="{C183D7F6-B498-43B3-948B-1728B52AA6E4}">
+                <adec:decorative xmlns:adec="http://schemas.microsoft.com/office/drawing/2017/decorative" val="1"/>
+              </a:ext>
+            </a:extLst>
+          </p:cNvPr>
+          <p:cNvSpPr>
+            <a:spLocks noGrp="1" noRot="1" noChangeAspect="1" noMove="1" noResize="1" noEditPoints="1" noAdjustHandles="1" noChangeArrowheads="1" noChangeShapeType="1" noTextEdit="1"/>
+          </p:cNvSpPr>
+          <p:nvPr>
+            <p:extLst>
+              <p:ext uri="{386F3935-93C4-4BCD-93E2-E3B085C9AB24}">
+                <p16:designElem xmlns:p16="http://schemas.microsoft.com/office/powerpoint/2015/main" val="1"/>
+              </p:ext>
+            </p:extLst>
+          </p:nvPr>
+        </p:nvSpPr>
+        <p:spPr>
+          <a:xfrm rot="5400000" flipH="1">
+            <a:off x="2817950" y="5666847"/>
+            <a:ext cx="1463040" cy="34289"/>
+          </a:xfrm>
+          <a:prstGeom prst="rect">
+            <a:avLst/>
+          </a:prstGeom>
+          <a:solidFill>
+            <a:schemeClr val="accent4"/>
+          </a:solidFill>
+          <a:ln>
+            <a:noFill/>
+          </a:ln>
+        </p:spPr>
+        <p:style>
+          <a:lnRef idx="2">
+            <a:schemeClr val="accent1">
+              <a:shade val="50000"/>
+            </a:schemeClr>
+          </a:lnRef>
+          <a:fillRef idx="1">
+            <a:schemeClr val="accent1"/>
+          </a:fillRef>
+          <a:effectRef idx="0">
+            <a:schemeClr val="accent1"/>
+          </a:effectRef>
+          <a:fontRef idx="minor">
+            <a:schemeClr val="lt1"/>
+          </a:fontRef>
+        </p:style>
+        <p:txBody>
+          <a:bodyPr rtlCol="0" anchor="ctr"/>
+          <a:lstStyle/>
+          <a:p>
+            <a:pPr algn="ctr"/>
+            <a:endParaRPr lang="en-US"/>
+          </a:p>
+        </p:txBody>
+      </p:sp>
       <p:sp>
         <p:nvSpPr>
           <p:cNvPr id="3" name="Content Placeholder 2">
@@ -15641,45 +13109,30 @@
         </p:nvSpPr>
         <p:spPr>
           <a:xfrm>
-            <a:off x="3728126" y="3998019"/>
-            <a:ext cx="4787224" cy="2216512"/>
-          </a:xfrm>
-        </p:spPr>
-        <p:txBody>
-          <a:bodyPr>
+            <a:off x="3872039" y="4883544"/>
+            <a:ext cx="4940186" cy="1556907"/>
+          </a:xfrm>
+        </p:spPr>
+        <p:txBody>
+          <a:bodyPr anchor="ctr">
             <a:normAutofit/>
           </a:bodyPr>
           <a:lstStyle/>
           <a:p>
-            <a:pPr>
-              <a:lnSpc>
-                <a:spcPct val="90000"/>
-              </a:lnSpc>
-            </a:pPr>
-            <a:r>
-              <a:rPr lang="en-US" sz="2200"/>
+            <a:r>
+              <a:rPr lang="en-US" sz="1600"/>
               <a:t>Controllers uses the button inputs to create glyphs</a:t>
             </a:r>
           </a:p>
           <a:p>
-            <a:pPr>
-              <a:lnSpc>
-                <a:spcPct val="90000"/>
-              </a:lnSpc>
-            </a:pPr>
-            <a:r>
-              <a:rPr lang="en-US" sz="2200"/>
+            <a:r>
+              <a:rPr lang="en-US" sz="1600"/>
               <a:t>C1H uses either hand to press the correct button for a glyph</a:t>
             </a:r>
           </a:p>
           <a:p>
-            <a:pPr>
-              <a:lnSpc>
-                <a:spcPct val="90000"/>
-              </a:lnSpc>
-            </a:pPr>
-            <a:r>
-              <a:rPr lang="en-US" sz="2200"/>
+            <a:r>
+              <a:rPr lang="en-US" sz="1600"/>
               <a:t>C2H uses both hands to press the correct button on both controller</a:t>
             </a:r>
           </a:p>
@@ -15714,7 +13167,7 @@
         <p:cNvPr id="1" name="">
           <a:extLst>
             <a:ext uri="{FF2B5EF4-FFF2-40B4-BE49-F238E27FC236}">
-              <a16:creationId xmlns:a16="http://schemas.microsoft.com/office/drawing/2014/main" id="{88C43BDF-0DDF-8291-5B7A-C8648D51D06B}"/>
+              <a16:creationId xmlns:a16="http://schemas.microsoft.com/office/drawing/2014/main" id="{F8A009B2-5E12-0C34-8FF6-4C4D04C60B77}"/>
             </a:ext>
           </a:extLst>
         </p:cNvPr>
@@ -15731,10 +13184,10 @@
       </p:grpSpPr>
       <p:sp useBgFill="1">
         <p:nvSpPr>
-          <p:cNvPr id="22" name="Rectangle 21">
+          <p:cNvPr id="44" name="Rectangle 43">
             <a:extLst>
               <a:ext uri="{FF2B5EF4-FFF2-40B4-BE49-F238E27FC236}">
-                <a16:creationId xmlns:a16="http://schemas.microsoft.com/office/drawing/2014/main" id="{CEF6118E-44FB-4509-B4D9-129052E4C6EE}"/>
+                <a16:creationId xmlns:a16="http://schemas.microsoft.com/office/drawing/2014/main" id="{7CBD15B8-0BC9-4CCF-A526-A1E45F6F7ECD}"/>
               </a:ext>
               <a:ext uri="{C183D7F6-B498-43B3-948B-1728B52AA6E4}">
                 <adec:decorative xmlns:adec="http://schemas.microsoft.com/office/drawing/2017/decorative" val="1"/>
@@ -15755,7 +13208,7 @@
         <p:spPr>
           <a:xfrm>
             <a:off x="0" y="0"/>
-            <a:ext cx="9141713" cy="6858000"/>
+            <a:ext cx="9143999" cy="6857365"/>
           </a:xfrm>
           <a:prstGeom prst="rect">
             <a:avLst/>
@@ -15791,10 +13244,76 @@
       </p:sp>
       <p:sp>
         <p:nvSpPr>
+          <p:cNvPr id="46" name="Rectangle 45">
+            <a:extLst>
+              <a:ext uri="{FF2B5EF4-FFF2-40B4-BE49-F238E27FC236}">
+                <a16:creationId xmlns:a16="http://schemas.microsoft.com/office/drawing/2014/main" id="{90464369-70FA-42AF-948F-80664CA7BFE5}"/>
+              </a:ext>
+              <a:ext uri="{C183D7F6-B498-43B3-948B-1728B52AA6E4}">
+                <adec:decorative xmlns:adec="http://schemas.microsoft.com/office/drawing/2017/decorative" val="1"/>
+              </a:ext>
+            </a:extLst>
+          </p:cNvPr>
+          <p:cNvSpPr>
+            <a:spLocks noGrp="1" noRot="1" noChangeAspect="1" noMove="1" noResize="1" noEditPoints="1" noAdjustHandles="1" noChangeArrowheads="1" noChangeShapeType="1" noTextEdit="1"/>
+          </p:cNvSpPr>
+          <p:nvPr>
+            <p:extLst>
+              <p:ext uri="{386F3935-93C4-4BCD-93E2-E3B085C9AB24}">
+                <p16:designElem xmlns:p16="http://schemas.microsoft.com/office/powerpoint/2015/main" val="1"/>
+              </p:ext>
+            </p:extLst>
+          </p:nvPr>
+        </p:nvSpPr>
+        <p:spPr>
+          <a:xfrm>
+            <a:off x="0" y="0"/>
+            <a:ext cx="9144000" cy="2146816"/>
+          </a:xfrm>
+          <a:prstGeom prst="rect">
+            <a:avLst/>
+          </a:prstGeom>
+          <a:solidFill>
+            <a:schemeClr val="bg1">
+              <a:lumMod val="85000"/>
+              <a:alpha val="35000"/>
+            </a:schemeClr>
+          </a:solidFill>
+          <a:ln>
+            <a:noFill/>
+          </a:ln>
+        </p:spPr>
+        <p:style>
+          <a:lnRef idx="2">
+            <a:schemeClr val="accent1">
+              <a:shade val="50000"/>
+            </a:schemeClr>
+          </a:lnRef>
+          <a:fillRef idx="1">
+            <a:schemeClr val="accent1"/>
+          </a:fillRef>
+          <a:effectRef idx="0">
+            <a:schemeClr val="accent1"/>
+          </a:effectRef>
+          <a:fontRef idx="minor">
+            <a:schemeClr val="lt1"/>
+          </a:fontRef>
+        </p:style>
+        <p:txBody>
+          <a:bodyPr rtlCol="0" anchor="ctr"/>
+          <a:lstStyle/>
+          <a:p>
+            <a:pPr algn="ctr"/>
+            <a:endParaRPr lang="en-US"/>
+          </a:p>
+        </p:txBody>
+      </p:sp>
+      <p:sp>
+        <p:nvSpPr>
           <p:cNvPr id="2" name="Title 1">
             <a:extLst>
               <a:ext uri="{FF2B5EF4-FFF2-40B4-BE49-F238E27FC236}">
-                <a16:creationId xmlns:a16="http://schemas.microsoft.com/office/drawing/2014/main" id="{2220422E-11E3-AEE4-85B8-6BAC069B3BF7}"/>
+                <a16:creationId xmlns:a16="http://schemas.microsoft.com/office/drawing/2014/main" id="{4E8B2A44-1DC3-274A-69E7-030F56375121}"/>
               </a:ext>
             </a:extLst>
           </p:cNvPr>
@@ -15807,8 +13326,8 @@
         </p:nvSpPr>
         <p:spPr>
           <a:xfrm>
-            <a:off x="626366" y="-1326218"/>
-            <a:ext cx="2989616" cy="2806506"/>
+            <a:off x="4323587" y="349664"/>
+            <a:ext cx="4384178" cy="1638377"/>
           </a:xfrm>
         </p:spPr>
         <p:txBody>
@@ -15818,14 +13337,84 @@
           <a:lstStyle/>
           <a:p>
             <a:r>
-              <a:rPr lang="en-US" sz="3500" kern="1200" dirty="0">
+              <a:rPr lang="en-US" sz="4200" kern="1200">
                 <a:latin typeface="+mj-lt"/>
                 <a:ea typeface="+mj-ea"/>
                 <a:cs typeface="+mj-cs"/>
               </a:rPr>
               <a:t>Gestures</a:t>
             </a:r>
-            <a:endParaRPr lang="en-US" sz="3500" dirty="0"/>
+            <a:endParaRPr lang="en-US" sz="4200"/>
+          </a:p>
+        </p:txBody>
+      </p:sp>
+      <p:sp>
+        <p:nvSpPr>
+          <p:cNvPr id="48" name="Rectangle 47">
+            <a:extLst>
+              <a:ext uri="{FF2B5EF4-FFF2-40B4-BE49-F238E27FC236}">
+                <a16:creationId xmlns:a16="http://schemas.microsoft.com/office/drawing/2014/main" id="{CC552A98-EF7D-4D42-AB69-066B786AB55B}"/>
+              </a:ext>
+              <a:ext uri="{C183D7F6-B498-43B3-948B-1728B52AA6E4}">
+                <adec:decorative xmlns:adec="http://schemas.microsoft.com/office/drawing/2017/decorative" val="1"/>
+              </a:ext>
+            </a:extLst>
+          </p:cNvPr>
+          <p:cNvSpPr>
+            <a:spLocks noGrp="1" noRot="1" noChangeAspect="1" noMove="1" noResize="1" noEditPoints="1" noAdjustHandles="1" noChangeArrowheads="1" noChangeShapeType="1" noTextEdit="1"/>
+          </p:cNvSpPr>
+          <p:nvPr>
+            <p:extLst>
+              <p:ext uri="{386F3935-93C4-4BCD-93E2-E3B085C9AB24}">
+                <p16:designElem xmlns:p16="http://schemas.microsoft.com/office/powerpoint/2015/main" val="1"/>
+              </p:ext>
+            </p:extLst>
+          </p:nvPr>
+        </p:nvSpPr>
+        <p:spPr>
+          <a:xfrm>
+            <a:off x="246888" y="424614"/>
+            <a:ext cx="3485526" cy="2779083"/>
+          </a:xfrm>
+          <a:prstGeom prst="rect">
+            <a:avLst/>
+          </a:prstGeom>
+          <a:solidFill>
+            <a:schemeClr val="bg1"/>
+          </a:solidFill>
+          <a:ln>
+            <a:noFill/>
+          </a:ln>
+          <a:effectLst>
+            <a:outerShdw blurRad="139700" dist="127000" dir="5400000" algn="t" rotWithShape="0">
+              <a:prstClr val="black">
+                <a:alpha val="15000"/>
+              </a:prstClr>
+            </a:outerShdw>
+          </a:effectLst>
+        </p:spPr>
+        <p:style>
+          <a:lnRef idx="2">
+            <a:schemeClr val="accent1">
+              <a:shade val="50000"/>
+            </a:schemeClr>
+          </a:lnRef>
+          <a:fillRef idx="1">
+            <a:schemeClr val="accent1"/>
+          </a:fillRef>
+          <a:effectRef idx="0">
+            <a:schemeClr val="accent1"/>
+          </a:effectRef>
+          <a:fontRef idx="minor">
+            <a:schemeClr val="lt1"/>
+          </a:fontRef>
+        </p:style>
+        <p:txBody>
+          <a:bodyPr rtlCol="0" anchor="ctr"/>
+          <a:lstStyle/>
+          <a:p>
+            <a:pPr algn="ctr"/>
+            <a:endParaRPr lang="en-US"/>
           </a:p>
         </p:txBody>
       </p:sp>
@@ -15834,7 +13423,7 @@
           <p:cNvPr id="8" name="Picture 7">
             <a:extLst>
               <a:ext uri="{FF2B5EF4-FFF2-40B4-BE49-F238E27FC236}">
-                <a16:creationId xmlns:a16="http://schemas.microsoft.com/office/drawing/2014/main" id="{F2567F13-A813-F383-AA15-5383539EADCE}"/>
+                <a16:creationId xmlns:a16="http://schemas.microsoft.com/office/drawing/2014/main" id="{43E04522-2B78-E103-FAAF-D7D017313121}"/>
               </a:ext>
             </a:extLst>
           </p:cNvPr>
@@ -15850,8 +13439,8 @@
         </p:blipFill>
         <p:spPr>
           <a:xfrm>
-            <a:off x="3615982" y="1059841"/>
-            <a:ext cx="5352322" cy="2081893"/>
+            <a:off x="400900" y="1196338"/>
+            <a:ext cx="3176637" cy="1235633"/>
           </a:xfrm>
           <a:prstGeom prst="rect">
             <a:avLst/>
@@ -15860,42 +13449,197 @@
       </p:pic>
       <p:sp>
         <p:nvSpPr>
-          <p:cNvPr id="3" name="Content Placeholder 2">
+          <p:cNvPr id="50" name="Rectangle 49">
             <a:extLst>
               <a:ext uri="{FF2B5EF4-FFF2-40B4-BE49-F238E27FC236}">
-                <a16:creationId xmlns:a16="http://schemas.microsoft.com/office/drawing/2014/main" id="{52599380-1055-EE7C-0498-CAB72DFF0AC0}"/>
+                <a16:creationId xmlns:a16="http://schemas.microsoft.com/office/drawing/2014/main" id="{A648176E-454C-437C-B0FC-9B82FCF32B24}"/>
+              </a:ext>
+              <a:ext uri="{C183D7F6-B498-43B3-948B-1728B52AA6E4}">
+                <adec:decorative xmlns:adec="http://schemas.microsoft.com/office/drawing/2017/decorative" val="1"/>
               </a:ext>
             </a:extLst>
           </p:cNvPr>
           <p:cNvSpPr>
-            <a:spLocks noGrp="1"/>
-          </p:cNvSpPr>
-          <p:nvPr>
-            <p:ph idx="1"/>
-          </p:nvPr>
-        </p:nvSpPr>
-        <p:spPr>
-          <a:xfrm>
-            <a:off x="626366" y="1634394"/>
-            <a:ext cx="2989616" cy="2588458"/>
-          </a:xfrm>
-        </p:spPr>
-        <p:txBody>
-          <a:bodyPr>
-            <a:normAutofit/>
-          </a:bodyPr>
+            <a:spLocks noGrp="1" noRot="1" noChangeAspect="1" noMove="1" noResize="1" noEditPoints="1" noAdjustHandles="1" noChangeArrowheads="1" noChangeShapeType="1" noTextEdit="1"/>
+          </p:cNvSpPr>
+          <p:nvPr>
+            <p:extLst>
+              <p:ext uri="{386F3935-93C4-4BCD-93E2-E3B085C9AB24}">
+                <p16:designElem xmlns:p16="http://schemas.microsoft.com/office/powerpoint/2015/main" val="1"/>
+              </p:ext>
+            </p:extLst>
+          </p:nvPr>
+        </p:nvSpPr>
+        <p:spPr>
+          <a:xfrm rot="5400000">
+            <a:off x="-145363" y="6150940"/>
+            <a:ext cx="524256" cy="114287"/>
+          </a:xfrm>
+          <a:prstGeom prst="rect">
+            <a:avLst/>
+          </a:prstGeom>
+          <a:solidFill>
+            <a:schemeClr val="accent4"/>
+          </a:solidFill>
+          <a:ln>
+            <a:noFill/>
+          </a:ln>
+        </p:spPr>
+        <p:style>
+          <a:lnRef idx="2">
+            <a:schemeClr val="accent1">
+              <a:shade val="50000"/>
+            </a:schemeClr>
+          </a:lnRef>
+          <a:fillRef idx="1">
+            <a:schemeClr val="accent1"/>
+          </a:fillRef>
+          <a:effectRef idx="0">
+            <a:schemeClr val="accent1"/>
+          </a:effectRef>
+          <a:fontRef idx="minor">
+            <a:schemeClr val="lt1"/>
+          </a:fontRef>
+        </p:style>
+        <p:txBody>
+          <a:bodyPr rtlCol="0" anchor="ctr"/>
           <a:lstStyle/>
           <a:p>
-            <a:r>
-              <a:rPr lang="en-US" sz="1700" dirty="0"/>
-              <a:t>G1H uses either hand to create a single gesture</a:t>
-            </a:r>
-          </a:p>
-          <a:p>
-            <a:r>
-              <a:rPr lang="en-US" sz="1700" dirty="0"/>
-              <a:t>G2H uses both hands to both doing the same gesture</a:t>
-            </a:r>
+            <a:pPr algn="ctr"/>
+            <a:endParaRPr lang="en-US"/>
+          </a:p>
+        </p:txBody>
+      </p:sp>
+      <p:sp>
+        <p:nvSpPr>
+          <p:cNvPr id="52" name="Rectangle 51">
+            <a:extLst>
+              <a:ext uri="{FF2B5EF4-FFF2-40B4-BE49-F238E27FC236}">
+                <a16:creationId xmlns:a16="http://schemas.microsoft.com/office/drawing/2014/main" id="{A6604B49-AD5C-4590-B051-06C8222ECD99}"/>
+              </a:ext>
+              <a:ext uri="{C183D7F6-B498-43B3-948B-1728B52AA6E4}">
+                <adec:decorative xmlns:adec="http://schemas.microsoft.com/office/drawing/2017/decorative" val="1"/>
+              </a:ext>
+            </a:extLst>
+          </p:cNvPr>
+          <p:cNvSpPr>
+            <a:spLocks noGrp="1" noRot="1" noChangeAspect="1" noMove="1" noResize="1" noEditPoints="1" noAdjustHandles="1" noChangeArrowheads="1" noChangeShapeType="1" noTextEdit="1"/>
+          </p:cNvSpPr>
+          <p:nvPr>
+            <p:extLst>
+              <p:ext uri="{386F3935-93C4-4BCD-93E2-E3B085C9AB24}">
+                <p16:designElem xmlns:p16="http://schemas.microsoft.com/office/powerpoint/2015/main" val="1"/>
+              </p:ext>
+            </p:extLst>
+          </p:nvPr>
+        </p:nvSpPr>
+        <p:spPr>
+          <a:xfrm rot="16200000" flipH="1">
+            <a:off x="4433100" y="1760836"/>
+            <a:ext cx="524256" cy="8897543"/>
+          </a:xfrm>
+          <a:prstGeom prst="rect">
+            <a:avLst/>
+          </a:prstGeom>
+          <a:solidFill>
+            <a:schemeClr val="accent4"/>
+          </a:solidFill>
+          <a:ln>
+            <a:noFill/>
+          </a:ln>
+        </p:spPr>
+        <p:style>
+          <a:lnRef idx="2">
+            <a:schemeClr val="accent1">
+              <a:shade val="50000"/>
+            </a:schemeClr>
+          </a:lnRef>
+          <a:fillRef idx="1">
+            <a:schemeClr val="accent1"/>
+          </a:fillRef>
+          <a:effectRef idx="0">
+            <a:schemeClr val="accent1"/>
+          </a:effectRef>
+          <a:fontRef idx="minor">
+            <a:schemeClr val="lt1"/>
+          </a:fontRef>
+        </p:style>
+        <p:txBody>
+          <a:bodyPr rtlCol="0" anchor="ctr"/>
+          <a:lstStyle/>
+          <a:p>
+            <a:pPr algn="ctr"/>
+            <a:endParaRPr lang="en-US"/>
+          </a:p>
+        </p:txBody>
+      </p:sp>
+      <p:sp>
+        <p:nvSpPr>
+          <p:cNvPr id="54" name="Rectangle 53">
+            <a:extLst>
+              <a:ext uri="{FF2B5EF4-FFF2-40B4-BE49-F238E27FC236}">
+                <a16:creationId xmlns:a16="http://schemas.microsoft.com/office/drawing/2014/main" id="{CD6F001B-9B1B-4EC4-9A93-3773EBC951C5}"/>
+              </a:ext>
+              <a:ext uri="{C183D7F6-B498-43B3-948B-1728B52AA6E4}">
+                <adec:decorative xmlns:adec="http://schemas.microsoft.com/office/drawing/2017/decorative" val="1"/>
+              </a:ext>
+            </a:extLst>
+          </p:cNvPr>
+          <p:cNvSpPr>
+            <a:spLocks noGrp="1" noRot="1" noChangeAspect="1" noMove="1" noResize="1" noEditPoints="1" noAdjustHandles="1" noChangeArrowheads="1" noChangeShapeType="1" noTextEdit="1"/>
+          </p:cNvSpPr>
+          <p:nvPr>
+            <p:extLst>
+              <p:ext uri="{386F3935-93C4-4BCD-93E2-E3B085C9AB24}">
+                <p16:designElem xmlns:p16="http://schemas.microsoft.com/office/powerpoint/2015/main" val="1"/>
+              </p:ext>
+            </p:extLst>
+          </p:nvPr>
+        </p:nvSpPr>
+        <p:spPr>
+          <a:xfrm>
+            <a:off x="246456" y="3428999"/>
+            <a:ext cx="3485526" cy="2779083"/>
+          </a:xfrm>
+          <a:prstGeom prst="rect">
+            <a:avLst/>
+          </a:prstGeom>
+          <a:solidFill>
+            <a:schemeClr val="bg1"/>
+          </a:solidFill>
+          <a:ln>
+            <a:noFill/>
+          </a:ln>
+          <a:effectLst>
+            <a:outerShdw blurRad="139700" dist="127000" dir="5400000" algn="t" rotWithShape="0">
+              <a:prstClr val="black">
+                <a:alpha val="15000"/>
+              </a:prstClr>
+            </a:outerShdw>
+          </a:effectLst>
+        </p:spPr>
+        <p:style>
+          <a:lnRef idx="2">
+            <a:schemeClr val="accent1">
+              <a:shade val="50000"/>
+            </a:schemeClr>
+          </a:lnRef>
+          <a:fillRef idx="1">
+            <a:schemeClr val="accent1"/>
+          </a:fillRef>
+          <a:effectRef idx="0">
+            <a:schemeClr val="accent1"/>
+          </a:effectRef>
+          <a:fontRef idx="minor">
+            <a:schemeClr val="lt1"/>
+          </a:fontRef>
+        </p:style>
+        <p:txBody>
+          <a:bodyPr rtlCol="0" anchor="ctr"/>
+          <a:lstStyle/>
+          <a:p>
+            <a:pPr algn="ctr"/>
+            <a:endParaRPr lang="en-US"/>
           </a:p>
         </p:txBody>
       </p:sp>
@@ -15904,7 +13648,7 @@
           <p:cNvPr id="6" name="Picture 5">
             <a:extLst>
               <a:ext uri="{FF2B5EF4-FFF2-40B4-BE49-F238E27FC236}">
-                <a16:creationId xmlns:a16="http://schemas.microsoft.com/office/drawing/2014/main" id="{ED86285F-77B9-2140-4CA1-798E1AE3D8B7}"/>
+                <a16:creationId xmlns:a16="http://schemas.microsoft.com/office/drawing/2014/main" id="{27E2C64D-7CF1-0CDF-635C-F243832A7E2A}"/>
               </a:ext>
             </a:extLst>
           </p:cNvPr>
@@ -15920,18 +13664,59 @@
         </p:blipFill>
         <p:spPr>
           <a:xfrm>
-            <a:off x="936948" y="3716267"/>
-            <a:ext cx="7311754" cy="2158927"/>
+            <a:off x="400900" y="4349550"/>
+            <a:ext cx="3176637" cy="937979"/>
           </a:xfrm>
           <a:prstGeom prst="rect">
             <a:avLst/>
           </a:prstGeom>
         </p:spPr>
       </p:pic>
+      <p:sp>
+        <p:nvSpPr>
+          <p:cNvPr id="3" name="Content Placeholder 2">
+            <a:extLst>
+              <a:ext uri="{FF2B5EF4-FFF2-40B4-BE49-F238E27FC236}">
+                <a16:creationId xmlns:a16="http://schemas.microsoft.com/office/drawing/2014/main" id="{99207473-C1D4-8B39-AB65-837B29E8886E}"/>
+              </a:ext>
+            </a:extLst>
+          </p:cNvPr>
+          <p:cNvSpPr>
+            <a:spLocks noGrp="1"/>
+          </p:cNvSpPr>
+          <p:nvPr>
+            <p:ph idx="1"/>
+          </p:nvPr>
+        </p:nvSpPr>
+        <p:spPr>
+          <a:xfrm>
+            <a:off x="4324696" y="2620641"/>
+            <a:ext cx="4378313" cy="3023702"/>
+          </a:xfrm>
+        </p:spPr>
+        <p:txBody>
+          <a:bodyPr anchor="ctr">
+            <a:normAutofit/>
+          </a:bodyPr>
+          <a:lstStyle/>
+          <a:p>
+            <a:r>
+              <a:rPr lang="en-US" sz="1700" dirty="0"/>
+              <a:t>G1H uses either hand to create a single gesture</a:t>
+            </a:r>
+          </a:p>
+          <a:p>
+            <a:r>
+              <a:rPr lang="en-US" sz="1700" dirty="0"/>
+              <a:t>G2H uses both hands to both doing the same gesture</a:t>
+            </a:r>
+          </a:p>
+        </p:txBody>
+      </p:sp>
     </p:spTree>
     <p:extLst>
       <p:ext uri="{BB962C8B-B14F-4D97-AF65-F5344CB8AC3E}">
-        <p14:creationId xmlns:p14="http://schemas.microsoft.com/office/powerpoint/2010/main" val="2044274591"/>
+        <p14:creationId xmlns:p14="http://schemas.microsoft.com/office/powerpoint/2010/main" val="3772748371"/>
       </p:ext>
     </p:extLst>
   </p:cSld>
@@ -16404,12 +14189,12 @@
           <a:chExt cx="0" cy="0"/>
         </a:xfrm>
       </p:grpSpPr>
-      <p:sp>
-        <p:nvSpPr>
-          <p:cNvPr id="30" name="Rectangle 29">
+      <p:sp useBgFill="1">
+        <p:nvSpPr>
+          <p:cNvPr id="67" name="Rectangle 66">
             <a:extLst>
               <a:ext uri="{FF2B5EF4-FFF2-40B4-BE49-F238E27FC236}">
-                <a16:creationId xmlns:a16="http://schemas.microsoft.com/office/drawing/2014/main" id="{D7A453D2-15D8-4403-815F-291FA16340D9}"/>
+                <a16:creationId xmlns:a16="http://schemas.microsoft.com/office/drawing/2014/main" id="{7FEAE179-C525-48F3-AD47-0E9E2B6F2E2E}"/>
               </a:ext>
               <a:ext uri="{C183D7F6-B498-43B3-948B-1728B52AA6E4}">
                 <adec:decorative xmlns:adec="http://schemas.microsoft.com/office/drawing/2017/decorative" val="1"/>
@@ -16429,15 +14214,12 @@
         </p:nvSpPr>
         <p:spPr>
           <a:xfrm>
-            <a:off x="2286" y="0"/>
-            <a:ext cx="9141714" cy="6858000"/>
+            <a:off x="0" y="0"/>
+            <a:ext cx="9143999" cy="6857365"/>
           </a:xfrm>
           <a:prstGeom prst="rect">
             <a:avLst/>
           </a:prstGeom>
-          <a:solidFill>
-            <a:schemeClr val="tx2"/>
-          </a:solidFill>
           <a:ln>
             <a:noFill/>
           </a:ln>
@@ -16469,10 +14251,39 @@
       </p:sp>
       <p:sp>
         <p:nvSpPr>
-          <p:cNvPr id="32" name="Rectangle 31">
+          <p:cNvPr id="2" name="Title 1"/>
+          <p:cNvSpPr>
+            <a:spLocks noGrp="1"/>
+          </p:cNvSpPr>
+          <p:nvPr>
+            <p:ph type="title"/>
+          </p:nvPr>
+        </p:nvSpPr>
+        <p:spPr>
+          <a:xfrm>
+            <a:off x="388416" y="4883544"/>
+            <a:ext cx="2907065" cy="1556907"/>
+          </a:xfrm>
+        </p:spPr>
+        <p:txBody>
+          <a:bodyPr anchor="ctr">
+            <a:normAutofit/>
+          </a:bodyPr>
+          <a:lstStyle/>
+          <a:p>
+            <a:r>
+              <a:rPr lang="en-US" sz="2800"/>
+              <a:t>Gameplay Flow</a:t>
+            </a:r>
+          </a:p>
+        </p:txBody>
+      </p:sp>
+      <p:sp>
+        <p:nvSpPr>
+          <p:cNvPr id="69" name="Rectangle 68">
             <a:extLst>
               <a:ext uri="{FF2B5EF4-FFF2-40B4-BE49-F238E27FC236}">
-                <a16:creationId xmlns:a16="http://schemas.microsoft.com/office/drawing/2014/main" id="{8161EA6B-09CA-445B-AB0D-8DF76FA92DEF}"/>
+                <a16:creationId xmlns:a16="http://schemas.microsoft.com/office/drawing/2014/main" id="{95C8260E-968F-44E8-A823-ABB431311926}"/>
               </a:ext>
               <a:ext uri="{C183D7F6-B498-43B3-948B-1728B52AA6E4}">
                 <adec:decorative xmlns:adec="http://schemas.microsoft.com/office/drawing/2017/decorative" val="1"/>
@@ -16493,15 +14304,13 @@
         <p:spPr>
           <a:xfrm>
             <a:off x="0" y="0"/>
-            <a:ext cx="9141714" cy="6858000"/>
+            <a:ext cx="9144000" cy="865848"/>
           </a:xfrm>
           <a:prstGeom prst="rect">
             <a:avLst/>
           </a:prstGeom>
           <a:solidFill>
-            <a:schemeClr val="tx1">
-              <a:alpha val="53000"/>
-            </a:schemeClr>
+            <a:schemeClr val="accent4"/>
           </a:solidFill>
           <a:ln>
             <a:noFill/>
@@ -16532,21 +14341,21 @@
           </a:p>
         </p:txBody>
       </p:sp>
-      <p:grpSp>
-        <p:nvGrpSpPr>
-          <p:cNvPr id="34" name="Group 33">
+      <p:sp>
+        <p:nvSpPr>
+          <p:cNvPr id="71" name="Rectangle 70">
             <a:extLst>
               <a:ext uri="{FF2B5EF4-FFF2-40B4-BE49-F238E27FC236}">
-                <a16:creationId xmlns:a16="http://schemas.microsoft.com/office/drawing/2014/main" id="{1EA1DAFF-CECA-492F-BFA1-22C64956B8D9}"/>
+                <a16:creationId xmlns:a16="http://schemas.microsoft.com/office/drawing/2014/main" id="{2C1BBA94-3F40-40AA-8BB9-E69E25E537C1}"/>
               </a:ext>
               <a:ext uri="{C183D7F6-B498-43B3-948B-1728B52AA6E4}">
                 <adec:decorative xmlns:adec="http://schemas.microsoft.com/office/drawing/2017/decorative" val="1"/>
               </a:ext>
             </a:extLst>
           </p:cNvPr>
-          <p:cNvGrpSpPr>
-            <a:grpSpLocks noGrp="1" noUngrp="1" noRot="1" noChangeAspect="1" noMove="1" noResize="1"/>
-          </p:cNvGrpSpPr>
+          <p:cNvSpPr>
+            <a:spLocks noGrp="1" noRot="1" noChangeAspect="1" noMove="1" noResize="1" noEditPoints="1" noAdjustHandles="1" noChangeArrowheads="1" noChangeShapeType="1" noTextEdit="1"/>
+          </p:cNvSpPr>
           <p:nvPr>
             <p:extLst>
               <p:ext uri="{386F3935-93C4-4BCD-93E2-E3B085C9AB24}">
@@ -16554,526 +14363,28 @@
               </p:ext>
             </p:extLst>
           </p:nvPr>
-        </p:nvGrpSpPr>
-        <p:grpSpPr>
-          <a:xfrm>
-            <a:off x="0" y="2075420"/>
-            <a:ext cx="9036544" cy="4093306"/>
-            <a:chOff x="1" y="2075420"/>
-            <a:chExt cx="12048729" cy="4093306"/>
-          </a:xfrm>
-        </p:grpSpPr>
-        <p:sp>
-          <p:nvSpPr>
-            <p:cNvPr id="35" name="Oval 34">
-              <a:extLst>
-                <a:ext uri="{FF2B5EF4-FFF2-40B4-BE49-F238E27FC236}">
-                  <a16:creationId xmlns:a16="http://schemas.microsoft.com/office/drawing/2014/main" id="{5D3D3744-142C-4653-90AB-546FE6B849E3}"/>
-                </a:ext>
-                <a:ext uri="{C183D7F6-B498-43B3-948B-1728B52AA6E4}">
-                  <adec:decorative xmlns:adec="http://schemas.microsoft.com/office/drawing/2017/decorative" val="1"/>
-                </a:ext>
-              </a:extLst>
-            </p:cNvPr>
-            <p:cNvSpPr/>
-            <p:nvPr>
-              <p:extLst>
-                <p:ext uri="{386F3935-93C4-4BCD-93E2-E3B085C9AB24}">
-                  <p16:designElem xmlns:p16="http://schemas.microsoft.com/office/powerpoint/2015/main" val="1"/>
-                </p:ext>
-              </p:extLst>
-            </p:nvPr>
-          </p:nvSpPr>
-          <p:spPr>
-            <a:xfrm rot="4500000">
-              <a:off x="7942191" y="2507571"/>
-              <a:ext cx="3563871" cy="3563871"/>
-            </a:xfrm>
-            <a:prstGeom prst="ellipse">
-              <a:avLst/>
-            </a:prstGeom>
-            <a:noFill/>
-            <a:ln w="31750">
-              <a:gradFill>
-                <a:gsLst>
-                  <a:gs pos="0">
-                    <a:schemeClr val="tx2">
-                      <a:lumMod val="60000"/>
-                      <a:lumOff val="40000"/>
-                      <a:alpha val="10000"/>
-                    </a:schemeClr>
-                  </a:gs>
-                  <a:gs pos="100000">
-                    <a:schemeClr val="tx2">
-                      <a:lumMod val="50000"/>
-                      <a:alpha val="20000"/>
-                    </a:schemeClr>
-                  </a:gs>
-                </a:gsLst>
-                <a:lin ang="5400000" scaled="1"/>
-              </a:gradFill>
-              <a:prstDash val="sysDot"/>
-            </a:ln>
-          </p:spPr>
-          <p:style>
-            <a:lnRef idx="2">
-              <a:schemeClr val="accent1">
-                <a:shade val="50000"/>
-              </a:schemeClr>
-            </a:lnRef>
-            <a:fillRef idx="1">
-              <a:schemeClr val="accent1"/>
-            </a:fillRef>
-            <a:effectRef idx="0">
-              <a:schemeClr val="accent1"/>
-            </a:effectRef>
-            <a:fontRef idx="minor">
-              <a:schemeClr val="lt1"/>
-            </a:fontRef>
-          </p:style>
-          <p:txBody>
-            <a:bodyPr rtlCol="0" anchor="ctr"/>
-            <a:lstStyle/>
-            <a:p>
-              <a:pPr algn="ctr"/>
-              <a:endParaRPr lang="en-US"/>
-            </a:p>
-          </p:txBody>
-        </p:sp>
-        <p:sp>
-          <p:nvSpPr>
-            <p:cNvPr id="36" name="Oval 35">
-              <a:extLst>
-                <a:ext uri="{FF2B5EF4-FFF2-40B4-BE49-F238E27FC236}">
-                  <a16:creationId xmlns:a16="http://schemas.microsoft.com/office/drawing/2014/main" id="{0BC69CAC-820B-41BA-BFCA-79B455768377}"/>
-                </a:ext>
-                <a:ext uri="{C183D7F6-B498-43B3-948B-1728B52AA6E4}">
-                  <adec:decorative xmlns:adec="http://schemas.microsoft.com/office/drawing/2017/decorative" val="1"/>
-                </a:ext>
-              </a:extLst>
-            </p:cNvPr>
-            <p:cNvSpPr/>
-            <p:nvPr>
-              <p:extLst>
-                <p:ext uri="{386F3935-93C4-4BCD-93E2-E3B085C9AB24}">
-                  <p16:designElem xmlns:p16="http://schemas.microsoft.com/office/powerpoint/2015/main" val="1"/>
-                </p:ext>
-              </p:extLst>
-            </p:nvPr>
-          </p:nvSpPr>
-          <p:spPr>
-            <a:xfrm rot="16200000">
-              <a:off x="10435065" y="4048931"/>
-              <a:ext cx="1381607" cy="1381607"/>
-            </a:xfrm>
-            <a:prstGeom prst="ellipse">
-              <a:avLst/>
-            </a:prstGeom>
-            <a:noFill/>
-            <a:ln w="31750">
-              <a:gradFill>
-                <a:gsLst>
-                  <a:gs pos="0">
-                    <a:schemeClr val="tx2">
-                      <a:lumMod val="60000"/>
-                      <a:lumOff val="40000"/>
-                      <a:alpha val="20000"/>
-                    </a:schemeClr>
-                  </a:gs>
-                  <a:gs pos="100000">
-                    <a:schemeClr val="tx2">
-                      <a:lumMod val="50000"/>
-                      <a:alpha val="20000"/>
-                    </a:schemeClr>
-                  </a:gs>
-                </a:gsLst>
-                <a:lin ang="5400000" scaled="1"/>
-              </a:gradFill>
-              <a:prstDash val="sysDot"/>
-            </a:ln>
-          </p:spPr>
-          <p:style>
-            <a:lnRef idx="2">
-              <a:schemeClr val="accent1">
-                <a:shade val="50000"/>
-              </a:schemeClr>
-            </a:lnRef>
-            <a:fillRef idx="1">
-              <a:schemeClr val="accent1"/>
-            </a:fillRef>
-            <a:effectRef idx="0">
-              <a:schemeClr val="accent1"/>
-            </a:effectRef>
-            <a:fontRef idx="minor">
-              <a:schemeClr val="lt1"/>
-            </a:fontRef>
-          </p:style>
-          <p:txBody>
-            <a:bodyPr rtlCol="0" anchor="ctr"/>
-            <a:lstStyle/>
-            <a:p>
-              <a:pPr algn="ctr"/>
-              <a:endParaRPr lang="en-US"/>
-            </a:p>
-          </p:txBody>
-        </p:sp>
-        <p:sp>
-          <p:nvSpPr>
-            <p:cNvPr id="37" name="Oval 36">
-              <a:extLst>
-                <a:ext uri="{FF2B5EF4-FFF2-40B4-BE49-F238E27FC236}">
-                  <a16:creationId xmlns:a16="http://schemas.microsoft.com/office/drawing/2014/main" id="{3D205E7A-88AB-4C4B-B8D1-5A76AA878BF6}"/>
-                </a:ext>
-                <a:ext uri="{C183D7F6-B498-43B3-948B-1728B52AA6E4}">
-                  <adec:decorative xmlns:adec="http://schemas.microsoft.com/office/drawing/2017/decorative" val="1"/>
-                </a:ext>
-              </a:extLst>
-            </p:cNvPr>
-            <p:cNvSpPr/>
-            <p:nvPr>
-              <p:extLst>
-                <p:ext uri="{386F3935-93C4-4BCD-93E2-E3B085C9AB24}">
-                  <p16:designElem xmlns:p16="http://schemas.microsoft.com/office/powerpoint/2015/main" val="1"/>
-                </p:ext>
-              </p:extLst>
-            </p:nvPr>
-          </p:nvSpPr>
-          <p:spPr>
-            <a:xfrm rot="16200000">
-              <a:off x="1" y="2075420"/>
-              <a:ext cx="3144364" cy="3144364"/>
-            </a:xfrm>
-            <a:prstGeom prst="ellipse">
-              <a:avLst/>
-            </a:prstGeom>
-            <a:gradFill>
-              <a:gsLst>
-                <a:gs pos="0">
-                  <a:schemeClr val="tx2">
-                    <a:lumMod val="75000"/>
-                    <a:alpha val="20000"/>
-                  </a:schemeClr>
-                </a:gs>
-                <a:gs pos="100000">
-                  <a:schemeClr val="tx2">
-                    <a:lumMod val="50000"/>
-                    <a:alpha val="10000"/>
-                  </a:schemeClr>
-                </a:gs>
-              </a:gsLst>
-              <a:lin ang="5400000" scaled="1"/>
-            </a:gradFill>
-            <a:ln>
-              <a:noFill/>
-            </a:ln>
-          </p:spPr>
-          <p:style>
-            <a:lnRef idx="2">
-              <a:schemeClr val="accent1">
-                <a:shade val="50000"/>
-              </a:schemeClr>
-            </a:lnRef>
-            <a:fillRef idx="1">
-              <a:schemeClr val="accent1"/>
-            </a:fillRef>
-            <a:effectRef idx="0">
-              <a:schemeClr val="accent1"/>
-            </a:effectRef>
-            <a:fontRef idx="minor">
-              <a:schemeClr val="lt1"/>
-            </a:fontRef>
-          </p:style>
-          <p:txBody>
-            <a:bodyPr rtlCol="0" anchor="ctr"/>
-            <a:lstStyle/>
-            <a:p>
-              <a:pPr algn="ctr"/>
-              <a:endParaRPr lang="en-US"/>
-            </a:p>
-          </p:txBody>
-        </p:sp>
-        <p:sp>
-          <p:nvSpPr>
-            <p:cNvPr id="38" name="Oval 37">
-              <a:extLst>
-                <a:ext uri="{FF2B5EF4-FFF2-40B4-BE49-F238E27FC236}">
-                  <a16:creationId xmlns:a16="http://schemas.microsoft.com/office/drawing/2014/main" id="{0D4286E9-8501-4EBF-874C-74897B4B6F01}"/>
-                </a:ext>
-                <a:ext uri="{C183D7F6-B498-43B3-948B-1728B52AA6E4}">
-                  <adec:decorative xmlns:adec="http://schemas.microsoft.com/office/drawing/2017/decorative" val="1"/>
-                </a:ext>
-              </a:extLst>
-            </p:cNvPr>
-            <p:cNvSpPr/>
-            <p:nvPr>
-              <p:extLst>
-                <p:ext uri="{386F3935-93C4-4BCD-93E2-E3B085C9AB24}">
-                  <p16:designElem xmlns:p16="http://schemas.microsoft.com/office/powerpoint/2015/main" val="1"/>
-                </p:ext>
-              </p:extLst>
-            </p:nvPr>
-          </p:nvSpPr>
-          <p:spPr>
-            <a:xfrm rot="12600000">
-              <a:off x="10150845" y="4270841"/>
-              <a:ext cx="1897885" cy="1897885"/>
-            </a:xfrm>
-            <a:prstGeom prst="ellipse">
-              <a:avLst/>
-            </a:prstGeom>
-            <a:gradFill>
-              <a:gsLst>
-                <a:gs pos="0">
-                  <a:schemeClr val="tx2">
-                    <a:lumMod val="75000"/>
-                    <a:alpha val="10000"/>
-                  </a:schemeClr>
-                </a:gs>
-                <a:gs pos="100000">
-                  <a:schemeClr val="tx2">
-                    <a:lumMod val="75000"/>
-                    <a:alpha val="20000"/>
-                  </a:schemeClr>
-                </a:gs>
-              </a:gsLst>
-              <a:lin ang="5400000" scaled="1"/>
-            </a:gradFill>
-            <a:ln>
-              <a:noFill/>
-            </a:ln>
-          </p:spPr>
-          <p:style>
-            <a:lnRef idx="2">
-              <a:schemeClr val="accent1">
-                <a:shade val="50000"/>
-              </a:schemeClr>
-            </a:lnRef>
-            <a:fillRef idx="1">
-              <a:schemeClr val="accent1"/>
-            </a:fillRef>
-            <a:effectRef idx="0">
-              <a:schemeClr val="accent1"/>
-            </a:effectRef>
-            <a:fontRef idx="minor">
-              <a:schemeClr val="lt1"/>
-            </a:fontRef>
-          </p:style>
-          <p:txBody>
-            <a:bodyPr rtlCol="0" anchor="ctr"/>
-            <a:lstStyle/>
-            <a:p>
-              <a:pPr algn="ctr"/>
-              <a:endParaRPr lang="en-US" dirty="0"/>
-            </a:p>
-          </p:txBody>
-        </p:sp>
-        <p:sp>
-          <p:nvSpPr>
-            <p:cNvPr id="39" name="Oval 38">
-              <a:extLst>
-                <a:ext uri="{FF2B5EF4-FFF2-40B4-BE49-F238E27FC236}">
-                  <a16:creationId xmlns:a16="http://schemas.microsoft.com/office/drawing/2014/main" id="{45586ADC-910E-45C9-BAB4-CB0EFBEE5B17}"/>
-                </a:ext>
-                <a:ext uri="{C183D7F6-B498-43B3-948B-1728B52AA6E4}">
-                  <adec:decorative xmlns:adec="http://schemas.microsoft.com/office/drawing/2017/decorative" val="1"/>
-                </a:ext>
-              </a:extLst>
-            </p:cNvPr>
-            <p:cNvSpPr/>
-            <p:nvPr>
-              <p:extLst>
-                <p:ext uri="{386F3935-93C4-4BCD-93E2-E3B085C9AB24}">
-                  <p16:designElem xmlns:p16="http://schemas.microsoft.com/office/powerpoint/2015/main" val="1"/>
-                </p:ext>
-              </p:extLst>
-            </p:nvPr>
-          </p:nvSpPr>
-          <p:spPr>
-            <a:xfrm rot="4500000">
-              <a:off x="2046780" y="3040492"/>
-              <a:ext cx="2579322" cy="2579322"/>
-            </a:xfrm>
-            <a:prstGeom prst="ellipse">
-              <a:avLst/>
-            </a:prstGeom>
-            <a:noFill/>
-            <a:ln w="31750">
-              <a:gradFill>
-                <a:gsLst>
-                  <a:gs pos="0">
-                    <a:schemeClr val="tx2">
-                      <a:lumMod val="60000"/>
-                      <a:lumOff val="40000"/>
-                      <a:alpha val="20000"/>
-                    </a:schemeClr>
-                  </a:gs>
-                  <a:gs pos="100000">
-                    <a:schemeClr val="tx2">
-                      <a:lumMod val="50000"/>
-                      <a:alpha val="20000"/>
-                    </a:schemeClr>
-                  </a:gs>
-                </a:gsLst>
-                <a:lin ang="5400000" scaled="1"/>
-              </a:gradFill>
-              <a:prstDash val="sysDot"/>
-            </a:ln>
-          </p:spPr>
-          <p:style>
-            <a:lnRef idx="2">
-              <a:schemeClr val="accent1">
-                <a:shade val="50000"/>
-              </a:schemeClr>
-            </a:lnRef>
-            <a:fillRef idx="1">
-              <a:schemeClr val="accent1"/>
-            </a:fillRef>
-            <a:effectRef idx="0">
-              <a:schemeClr val="accent1"/>
-            </a:effectRef>
-            <a:fontRef idx="minor">
-              <a:schemeClr val="lt1"/>
-            </a:fontRef>
-          </p:style>
-          <p:txBody>
-            <a:bodyPr rtlCol="0" anchor="ctr"/>
-            <a:lstStyle/>
-            <a:p>
-              <a:pPr algn="ctr"/>
-              <a:endParaRPr lang="en-US"/>
-            </a:p>
-          </p:txBody>
-        </p:sp>
-        <p:sp>
-          <p:nvSpPr>
-            <p:cNvPr id="40" name="Oval 39">
-              <a:extLst>
-                <a:ext uri="{FF2B5EF4-FFF2-40B4-BE49-F238E27FC236}">
-                  <a16:creationId xmlns:a16="http://schemas.microsoft.com/office/drawing/2014/main" id="{DAB594C5-5BB0-49AE-8AAC-AE40A6F8A3F3}"/>
-                </a:ext>
-                <a:ext uri="{C183D7F6-B498-43B3-948B-1728B52AA6E4}">
-                  <adec:decorative xmlns:adec="http://schemas.microsoft.com/office/drawing/2017/decorative" val="1"/>
-                </a:ext>
-              </a:extLst>
-            </p:cNvPr>
-            <p:cNvSpPr/>
-            <p:nvPr>
-              <p:extLst>
-                <p:ext uri="{386F3935-93C4-4BCD-93E2-E3B085C9AB24}">
-                  <p16:designElem xmlns:p16="http://schemas.microsoft.com/office/powerpoint/2015/main" val="1"/>
-                </p:ext>
-              </p:extLst>
-            </p:nvPr>
-          </p:nvSpPr>
-          <p:spPr>
-            <a:xfrm rot="4500000">
-              <a:off x="2224640" y="3193975"/>
-              <a:ext cx="2243193" cy="2243193"/>
-            </a:xfrm>
-            <a:prstGeom prst="ellipse">
-              <a:avLst/>
-            </a:prstGeom>
-            <a:noFill/>
-            <a:ln w="31750">
-              <a:gradFill>
-                <a:gsLst>
-                  <a:gs pos="0">
-                    <a:schemeClr val="tx2">
-                      <a:lumMod val="60000"/>
-                      <a:lumOff val="40000"/>
-                      <a:alpha val="10000"/>
-                    </a:schemeClr>
-                  </a:gs>
-                  <a:gs pos="100000">
-                    <a:schemeClr val="tx2">
-                      <a:lumMod val="50000"/>
-                      <a:alpha val="10000"/>
-                    </a:schemeClr>
-                  </a:gs>
-                </a:gsLst>
-                <a:lin ang="5400000" scaled="1"/>
-              </a:gradFill>
-            </a:ln>
-          </p:spPr>
-          <p:style>
-            <a:lnRef idx="2">
-              <a:schemeClr val="accent1">
-                <a:shade val="50000"/>
-              </a:schemeClr>
-            </a:lnRef>
-            <a:fillRef idx="1">
-              <a:schemeClr val="accent1"/>
-            </a:fillRef>
-            <a:effectRef idx="0">
-              <a:schemeClr val="accent1"/>
-            </a:effectRef>
-            <a:fontRef idx="minor">
-              <a:schemeClr val="lt1"/>
-            </a:fontRef>
-          </p:style>
-          <p:txBody>
-            <a:bodyPr rtlCol="0" anchor="ctr"/>
-            <a:lstStyle/>
-            <a:p>
-              <a:pPr algn="ctr"/>
-              <a:endParaRPr lang="en-US"/>
-            </a:p>
-          </p:txBody>
-        </p:sp>
-      </p:grpSp>
-      <p:sp>
-        <p:nvSpPr>
-          <p:cNvPr id="42" name="Rectangle 41">
-            <a:extLst>
-              <a:ext uri="{FF2B5EF4-FFF2-40B4-BE49-F238E27FC236}">
-                <a16:creationId xmlns:a16="http://schemas.microsoft.com/office/drawing/2014/main" id="{B8114C98-A349-4111-A123-E8EAB86ABE30}"/>
-              </a:ext>
-              <a:ext uri="{C183D7F6-B498-43B3-948B-1728B52AA6E4}">
-                <adec:decorative xmlns:adec="http://schemas.microsoft.com/office/drawing/2017/decorative" val="1"/>
-              </a:ext>
-            </a:extLst>
-          </p:cNvPr>
-          <p:cNvSpPr>
-            <a:spLocks noGrp="1" noRot="1" noChangeAspect="1" noMove="1" noResize="1" noEditPoints="1" noAdjustHandles="1" noChangeArrowheads="1" noChangeShapeType="1" noTextEdit="1"/>
-          </p:cNvSpPr>
-          <p:nvPr>
-            <p:extLst>
-              <p:ext uri="{386F3935-93C4-4BCD-93E2-E3B085C9AB24}">
-                <p16:designElem xmlns:p16="http://schemas.microsoft.com/office/powerpoint/2015/main" val="1"/>
-              </p:ext>
-            </p:extLst>
-          </p:nvPr>
-        </p:nvSpPr>
-        <p:spPr>
-          <a:xfrm rot="16200000">
-            <a:off x="7479052" y="1131512"/>
-            <a:ext cx="2796461" cy="533439"/>
+        </p:nvSpPr>
+        <p:spPr>
+          <a:xfrm>
+            <a:off x="388416" y="0"/>
+            <a:ext cx="8423809" cy="4588184"/>
           </a:xfrm>
           <a:prstGeom prst="rect">
             <a:avLst/>
           </a:prstGeom>
-          <a:gradFill flip="none" rotWithShape="1">
-            <a:gsLst>
-              <a:gs pos="0">
-                <a:schemeClr val="tx2">
-                  <a:lumMod val="40000"/>
-                  <a:lumOff val="60000"/>
-                  <a:alpha val="0"/>
-                </a:schemeClr>
-              </a:gs>
-              <a:gs pos="100000">
-                <a:schemeClr val="tx2">
-                  <a:lumMod val="75000"/>
-                  <a:alpha val="10000"/>
-                </a:schemeClr>
-              </a:gs>
-            </a:gsLst>
-            <a:lin ang="8400000" scaled="0"/>
-            <a:tileRect/>
-          </a:gradFill>
+          <a:solidFill>
+            <a:schemeClr val="bg1"/>
+          </a:solidFill>
           <a:ln>
             <a:noFill/>
           </a:ln>
+          <a:effectLst>
+            <a:outerShdw blurRad="139700" dist="127000" dir="5400000" algn="t" rotWithShape="0">
+              <a:prstClr val="black">
+                <a:alpha val="15000"/>
+              </a:prstClr>
+            </a:outerShdw>
+          </a:effectLst>
         </p:spPr>
         <p:style>
           <a:lnRef idx="2">
@@ -17100,314 +14411,6 @@
           </a:p>
         </p:txBody>
       </p:sp>
-      <p:grpSp>
-        <p:nvGrpSpPr>
-          <p:cNvPr id="44" name="Group 43">
-            <a:extLst>
-              <a:ext uri="{FF2B5EF4-FFF2-40B4-BE49-F238E27FC236}">
-                <a16:creationId xmlns:a16="http://schemas.microsoft.com/office/drawing/2014/main" id="{670FB431-AE18-414D-92F4-1D12D1991152}"/>
-              </a:ext>
-              <a:ext uri="{C183D7F6-B498-43B3-948B-1728B52AA6E4}">
-                <adec:decorative xmlns:adec="http://schemas.microsoft.com/office/drawing/2017/decorative" val="1"/>
-              </a:ext>
-            </a:extLst>
-          </p:cNvPr>
-          <p:cNvGrpSpPr>
-            <a:grpSpLocks noGrp="1" noUngrp="1" noRot="1" noChangeAspect="1" noMove="1" noResize="1"/>
-          </p:cNvGrpSpPr>
-          <p:nvPr>
-            <p:extLst>
-              <p:ext uri="{386F3935-93C4-4BCD-93E2-E3B085C9AB24}">
-                <p16:designElem xmlns:p16="http://schemas.microsoft.com/office/powerpoint/2015/main" val="1"/>
-              </p:ext>
-            </p:extLst>
-          </p:nvPr>
-        </p:nvGrpSpPr>
-        <p:grpSpPr>
-          <a:xfrm>
-            <a:off x="8444654" y="317578"/>
-            <a:ext cx="411480" cy="549007"/>
-            <a:chOff x="7029447" y="3514725"/>
-            <a:chExt cx="1285875" cy="549007"/>
-          </a:xfrm>
-        </p:grpSpPr>
-        <p:cxnSp>
-          <p:nvCxnSpPr>
-            <p:cNvPr id="45" name="Straight Connector 44">
-              <a:extLst>
-                <a:ext uri="{FF2B5EF4-FFF2-40B4-BE49-F238E27FC236}">
-                  <a16:creationId xmlns:a16="http://schemas.microsoft.com/office/drawing/2014/main" id="{24467063-D74E-4D42-8790-B9F6D69584BE}"/>
-                </a:ext>
-                <a:ext uri="{C183D7F6-B498-43B3-948B-1728B52AA6E4}">
-                  <adec:decorative xmlns:adec="http://schemas.microsoft.com/office/drawing/2017/decorative" val="1"/>
-                </a:ext>
-              </a:extLst>
-            </p:cNvPr>
-            <p:cNvCxnSpPr>
-              <a:cxnSpLocks/>
-            </p:cNvCxnSpPr>
-            <p:nvPr>
-              <p:extLst>
-                <p:ext uri="{386F3935-93C4-4BCD-93E2-E3B085C9AB24}">
-                  <p16:designElem xmlns:p16="http://schemas.microsoft.com/office/powerpoint/2015/main" val="1"/>
-                </p:ext>
-              </p:extLst>
-            </p:nvPr>
-          </p:nvCxnSpPr>
-          <p:spPr>
-            <a:xfrm>
-              <a:off x="7029447" y="3514725"/>
-              <a:ext cx="1285875" cy="0"/>
-            </a:xfrm>
-            <a:prstGeom prst="line">
-              <a:avLst/>
-            </a:prstGeom>
-            <a:ln w="31750" cap="rnd" cmpd="sng">
-              <a:gradFill>
-                <a:gsLst>
-                  <a:gs pos="0">
-                    <a:schemeClr val="tx2">
-                      <a:lumMod val="60000"/>
-                      <a:lumOff val="40000"/>
-                      <a:alpha val="40000"/>
-                    </a:schemeClr>
-                  </a:gs>
-                  <a:gs pos="100000">
-                    <a:schemeClr val="tx2">
-                      <a:lumMod val="75000"/>
-                      <a:alpha val="40000"/>
-                    </a:schemeClr>
-                  </a:gs>
-                </a:gsLst>
-                <a:lin ang="5400000" scaled="1"/>
-              </a:gradFill>
-              <a:prstDash val="sysDot"/>
-              <a:round/>
-            </a:ln>
-          </p:spPr>
-          <p:style>
-            <a:lnRef idx="1">
-              <a:schemeClr val="accent1"/>
-            </a:lnRef>
-            <a:fillRef idx="0">
-              <a:schemeClr val="accent1"/>
-            </a:fillRef>
-            <a:effectRef idx="0">
-              <a:schemeClr val="accent1"/>
-            </a:effectRef>
-            <a:fontRef idx="minor">
-              <a:schemeClr val="tx1"/>
-            </a:fontRef>
-          </p:style>
-        </p:cxnSp>
-        <p:cxnSp>
-          <p:nvCxnSpPr>
-            <p:cNvPr id="46" name="Straight Connector 45">
-              <a:extLst>
-                <a:ext uri="{FF2B5EF4-FFF2-40B4-BE49-F238E27FC236}">
-                  <a16:creationId xmlns:a16="http://schemas.microsoft.com/office/drawing/2014/main" id="{A1D19BAC-1681-47BC-AAF5-92FAFFF6F4CE}"/>
-                </a:ext>
-                <a:ext uri="{C183D7F6-B498-43B3-948B-1728B52AA6E4}">
-                  <adec:decorative xmlns:adec="http://schemas.microsoft.com/office/drawing/2017/decorative" val="1"/>
-                </a:ext>
-              </a:extLst>
-            </p:cNvPr>
-            <p:cNvCxnSpPr>
-              <a:cxnSpLocks/>
-            </p:cNvCxnSpPr>
-            <p:nvPr>
-              <p:extLst>
-                <p:ext uri="{386F3935-93C4-4BCD-93E2-E3B085C9AB24}">
-                  <p16:designElem xmlns:p16="http://schemas.microsoft.com/office/powerpoint/2015/main" val="1"/>
-                </p:ext>
-              </p:extLst>
-            </p:nvPr>
-          </p:nvCxnSpPr>
-          <p:spPr>
-            <a:xfrm>
-              <a:off x="7029447" y="3697727"/>
-              <a:ext cx="1285875" cy="0"/>
-            </a:xfrm>
-            <a:prstGeom prst="line">
-              <a:avLst/>
-            </a:prstGeom>
-            <a:ln w="31750" cap="rnd" cmpd="sng">
-              <a:gradFill>
-                <a:gsLst>
-                  <a:gs pos="0">
-                    <a:schemeClr val="tx2">
-                      <a:lumMod val="60000"/>
-                      <a:lumOff val="40000"/>
-                      <a:alpha val="40000"/>
-                    </a:schemeClr>
-                  </a:gs>
-                  <a:gs pos="100000">
-                    <a:schemeClr val="tx2">
-                      <a:lumMod val="75000"/>
-                      <a:alpha val="40000"/>
-                    </a:schemeClr>
-                  </a:gs>
-                </a:gsLst>
-                <a:lin ang="5400000" scaled="1"/>
-              </a:gradFill>
-              <a:prstDash val="sysDot"/>
-              <a:round/>
-            </a:ln>
-          </p:spPr>
-          <p:style>
-            <a:lnRef idx="1">
-              <a:schemeClr val="accent1"/>
-            </a:lnRef>
-            <a:fillRef idx="0">
-              <a:schemeClr val="accent1"/>
-            </a:fillRef>
-            <a:effectRef idx="0">
-              <a:schemeClr val="accent1"/>
-            </a:effectRef>
-            <a:fontRef idx="minor">
-              <a:schemeClr val="tx1"/>
-            </a:fontRef>
-          </p:style>
-        </p:cxnSp>
-        <p:cxnSp>
-          <p:nvCxnSpPr>
-            <p:cNvPr id="47" name="Straight Connector 46">
-              <a:extLst>
-                <a:ext uri="{FF2B5EF4-FFF2-40B4-BE49-F238E27FC236}">
-                  <a16:creationId xmlns:a16="http://schemas.microsoft.com/office/drawing/2014/main" id="{94347C2B-E846-452C-97AA-7E254FC1CE8F}"/>
-                </a:ext>
-                <a:ext uri="{C183D7F6-B498-43B3-948B-1728B52AA6E4}">
-                  <adec:decorative xmlns:adec="http://schemas.microsoft.com/office/drawing/2017/decorative" val="1"/>
-                </a:ext>
-              </a:extLst>
-            </p:cNvPr>
-            <p:cNvCxnSpPr>
-              <a:cxnSpLocks/>
-            </p:cNvCxnSpPr>
-            <p:nvPr>
-              <p:extLst>
-                <p:ext uri="{386F3935-93C4-4BCD-93E2-E3B085C9AB24}">
-                  <p16:designElem xmlns:p16="http://schemas.microsoft.com/office/powerpoint/2015/main" val="1"/>
-                </p:ext>
-              </p:extLst>
-            </p:nvPr>
-          </p:nvCxnSpPr>
-          <p:spPr>
-            <a:xfrm>
-              <a:off x="7029447" y="3880729"/>
-              <a:ext cx="1285875" cy="0"/>
-            </a:xfrm>
-            <a:prstGeom prst="line">
-              <a:avLst/>
-            </a:prstGeom>
-            <a:ln w="31750" cap="rnd" cmpd="sng">
-              <a:gradFill>
-                <a:gsLst>
-                  <a:gs pos="0">
-                    <a:schemeClr val="tx2">
-                      <a:lumMod val="60000"/>
-                      <a:lumOff val="40000"/>
-                      <a:alpha val="40000"/>
-                    </a:schemeClr>
-                  </a:gs>
-                  <a:gs pos="100000">
-                    <a:schemeClr val="tx2">
-                      <a:lumMod val="75000"/>
-                      <a:alpha val="40000"/>
-                    </a:schemeClr>
-                  </a:gs>
-                </a:gsLst>
-                <a:lin ang="5400000" scaled="1"/>
-              </a:gradFill>
-              <a:prstDash val="sysDot"/>
-              <a:round/>
-            </a:ln>
-          </p:spPr>
-          <p:style>
-            <a:lnRef idx="1">
-              <a:schemeClr val="accent1"/>
-            </a:lnRef>
-            <a:fillRef idx="0">
-              <a:schemeClr val="accent1"/>
-            </a:fillRef>
-            <a:effectRef idx="0">
-              <a:schemeClr val="accent1"/>
-            </a:effectRef>
-            <a:fontRef idx="minor">
-              <a:schemeClr val="tx1"/>
-            </a:fontRef>
-          </p:style>
-        </p:cxnSp>
-        <p:cxnSp>
-          <p:nvCxnSpPr>
-            <p:cNvPr id="48" name="Straight Connector 47">
-              <a:extLst>
-                <a:ext uri="{FF2B5EF4-FFF2-40B4-BE49-F238E27FC236}">
-                  <a16:creationId xmlns:a16="http://schemas.microsoft.com/office/drawing/2014/main" id="{10EA2B35-7959-4C2A-84AA-FF5D94FEDE90}"/>
-                </a:ext>
-                <a:ext uri="{C183D7F6-B498-43B3-948B-1728B52AA6E4}">
-                  <adec:decorative xmlns:adec="http://schemas.microsoft.com/office/drawing/2017/decorative" val="1"/>
-                </a:ext>
-              </a:extLst>
-            </p:cNvPr>
-            <p:cNvCxnSpPr>
-              <a:cxnSpLocks/>
-            </p:cNvCxnSpPr>
-            <p:nvPr>
-              <p:extLst>
-                <p:ext uri="{386F3935-93C4-4BCD-93E2-E3B085C9AB24}">
-                  <p16:designElem xmlns:p16="http://schemas.microsoft.com/office/powerpoint/2015/main" val="1"/>
-                </p:ext>
-              </p:extLst>
-            </p:nvPr>
-          </p:nvCxnSpPr>
-          <p:spPr>
-            <a:xfrm>
-              <a:off x="7029447" y="4063732"/>
-              <a:ext cx="1285875" cy="0"/>
-            </a:xfrm>
-            <a:prstGeom prst="line">
-              <a:avLst/>
-            </a:prstGeom>
-            <a:ln w="31750" cap="rnd" cmpd="sng">
-              <a:gradFill>
-                <a:gsLst>
-                  <a:gs pos="0">
-                    <a:schemeClr val="tx2">
-                      <a:lumMod val="60000"/>
-                      <a:lumOff val="40000"/>
-                      <a:alpha val="40000"/>
-                    </a:schemeClr>
-                  </a:gs>
-                  <a:gs pos="100000">
-                    <a:schemeClr val="tx2">
-                      <a:lumMod val="75000"/>
-                      <a:alpha val="40000"/>
-                    </a:schemeClr>
-                  </a:gs>
-                </a:gsLst>
-                <a:lin ang="5400000" scaled="1"/>
-              </a:gradFill>
-              <a:prstDash val="sysDot"/>
-              <a:round/>
-            </a:ln>
-          </p:spPr>
-          <p:style>
-            <a:lnRef idx="1">
-              <a:schemeClr val="accent1"/>
-            </a:lnRef>
-            <a:fillRef idx="0">
-              <a:schemeClr val="accent1"/>
-            </a:fillRef>
-            <a:effectRef idx="0">
-              <a:schemeClr val="accent1"/>
-            </a:effectRef>
-            <a:fontRef idx="minor">
-              <a:schemeClr val="tx1"/>
-            </a:fontRef>
-          </p:style>
-        </p:cxnSp>
-      </p:grpSp>
       <p:pic>
         <p:nvPicPr>
           <p:cNvPr id="25" name="Picture 24" descr="A video game screen with a brick wall and a blackboard&#10;&#10;AI-generated content may be incorrect.">
@@ -17424,34 +14427,34 @@
         </p:nvPicPr>
         <p:blipFill>
           <a:blip r:embed="rId2"/>
-          <a:srcRect r="1" b="18276"/>
+          <a:srcRect b="5716"/>
           <a:stretch/>
         </p:blipFill>
         <p:spPr>
           <a:xfrm>
-            <a:off x="469942" y="317578"/>
-            <a:ext cx="8138333" cy="3508437"/>
+            <a:off x="719403" y="364142"/>
+            <a:ext cx="7777234" cy="3867993"/>
           </a:xfrm>
           <a:prstGeom prst="rect">
             <a:avLst/>
           </a:prstGeom>
         </p:spPr>
       </p:pic>
-      <p:grpSp>
-        <p:nvGrpSpPr>
-          <p:cNvPr id="50" name="Group 49">
+      <p:sp>
+        <p:nvSpPr>
+          <p:cNvPr id="73" name="Rectangle 72">
             <a:extLst>
               <a:ext uri="{FF2B5EF4-FFF2-40B4-BE49-F238E27FC236}">
-                <a16:creationId xmlns:a16="http://schemas.microsoft.com/office/drawing/2014/main" id="{AF19A774-30A5-488B-9BAF-629C6440294E}"/>
+                <a16:creationId xmlns:a16="http://schemas.microsoft.com/office/drawing/2014/main" id="{FE43805F-24A6-46A4-B19B-54F28347355C}"/>
               </a:ext>
               <a:ext uri="{C183D7F6-B498-43B3-948B-1728B52AA6E4}">
                 <adec:decorative xmlns:adec="http://schemas.microsoft.com/office/drawing/2017/decorative" val="1"/>
               </a:ext>
             </a:extLst>
           </p:cNvPr>
-          <p:cNvGrpSpPr>
-            <a:grpSpLocks noGrp="1" noUngrp="1" noRot="1" noChangeAspect="1" noMove="1" noResize="1"/>
-          </p:cNvGrpSpPr>
+          <p:cNvSpPr>
+            <a:spLocks noGrp="1" noRot="1" noChangeAspect="1" noMove="1" noResize="1" noEditPoints="1" noAdjustHandles="1" noChangeArrowheads="1" noChangeShapeType="1" noTextEdit="1"/>
+          </p:cNvSpPr>
           <p:nvPr>
             <p:extLst>
               <p:ext uri="{386F3935-93C4-4BCD-93E2-E3B085C9AB24}">
@@ -17459,294 +14462,18 @@
               </p:ext>
             </p:extLst>
           </p:nvPr>
-        </p:nvGrpSpPr>
-        <p:grpSpPr>
-          <a:xfrm rot="16200000">
-            <a:off x="317544" y="536210"/>
-            <a:ext cx="304800" cy="322326"/>
-            <a:chOff x="215328" y="-46937"/>
-            <a:chExt cx="304800" cy="2773841"/>
-          </a:xfrm>
-        </p:grpSpPr>
-        <p:cxnSp>
-          <p:nvCxnSpPr>
-            <p:cNvPr id="51" name="Straight Connector 50">
-              <a:extLst>
-                <a:ext uri="{FF2B5EF4-FFF2-40B4-BE49-F238E27FC236}">
-                  <a16:creationId xmlns:a16="http://schemas.microsoft.com/office/drawing/2014/main" id="{291EBF88-5B98-4258-A542-14C3AF2E5225}"/>
-                </a:ext>
-                <a:ext uri="{C183D7F6-B498-43B3-948B-1728B52AA6E4}">
-                  <adec:decorative xmlns:adec="http://schemas.microsoft.com/office/drawing/2017/decorative" val="1"/>
-                </a:ext>
-              </a:extLst>
-            </p:cNvPr>
-            <p:cNvCxnSpPr>
-              <a:cxnSpLocks/>
-            </p:cNvCxnSpPr>
-            <p:nvPr>
-              <p:extLst>
-                <p:ext uri="{386F3935-93C4-4BCD-93E2-E3B085C9AB24}">
-                  <p16:designElem xmlns:p16="http://schemas.microsoft.com/office/powerpoint/2015/main" val="1"/>
-                </p:ext>
-              </p:extLst>
-            </p:nvPr>
-          </p:nvCxnSpPr>
-          <p:spPr>
-            <a:xfrm>
-              <a:off x="215328" y="-46937"/>
-              <a:ext cx="0" cy="2773841"/>
-            </a:xfrm>
-            <a:prstGeom prst="line">
-              <a:avLst/>
-            </a:prstGeom>
-            <a:ln w="25400" cmpd="sng">
-              <a:solidFill>
-                <a:schemeClr val="bg2">
-                  <a:lumMod val="60000"/>
-                  <a:lumOff val="40000"/>
-                  <a:alpha val="50000"/>
-                </a:schemeClr>
-              </a:solidFill>
-              <a:prstDash val="sysDot"/>
-            </a:ln>
-          </p:spPr>
-          <p:style>
-            <a:lnRef idx="1">
-              <a:schemeClr val="accent1"/>
-            </a:lnRef>
-            <a:fillRef idx="0">
-              <a:schemeClr val="accent1"/>
-            </a:fillRef>
-            <a:effectRef idx="0">
-              <a:schemeClr val="accent1"/>
-            </a:effectRef>
-            <a:fontRef idx="minor">
-              <a:schemeClr val="tx1"/>
-            </a:fontRef>
-          </p:style>
-        </p:cxnSp>
-        <p:cxnSp>
-          <p:nvCxnSpPr>
-            <p:cNvPr id="52" name="Straight Connector 51">
-              <a:extLst>
-                <a:ext uri="{FF2B5EF4-FFF2-40B4-BE49-F238E27FC236}">
-                  <a16:creationId xmlns:a16="http://schemas.microsoft.com/office/drawing/2014/main" id="{8FBC2D58-9E3C-490D-BD7A-61EF07EA79E4}"/>
-                </a:ext>
-                <a:ext uri="{C183D7F6-B498-43B3-948B-1728B52AA6E4}">
-                  <adec:decorative xmlns:adec="http://schemas.microsoft.com/office/drawing/2017/decorative" val="1"/>
-                </a:ext>
-              </a:extLst>
-            </p:cNvPr>
-            <p:cNvCxnSpPr>
-              <a:cxnSpLocks/>
-            </p:cNvCxnSpPr>
-            <p:nvPr>
-              <p:extLst>
-                <p:ext uri="{386F3935-93C4-4BCD-93E2-E3B085C9AB24}">
-                  <p16:designElem xmlns:p16="http://schemas.microsoft.com/office/powerpoint/2015/main" val="1"/>
-                </p:ext>
-              </p:extLst>
-            </p:nvPr>
-          </p:nvCxnSpPr>
-          <p:spPr>
-            <a:xfrm>
-              <a:off x="316928" y="-46937"/>
-              <a:ext cx="0" cy="2773841"/>
-            </a:xfrm>
-            <a:prstGeom prst="line">
-              <a:avLst/>
-            </a:prstGeom>
-            <a:ln w="25400" cmpd="sng">
-              <a:solidFill>
-                <a:schemeClr val="bg2">
-                  <a:lumMod val="60000"/>
-                  <a:lumOff val="40000"/>
-                  <a:alpha val="50000"/>
-                </a:schemeClr>
-              </a:solidFill>
-              <a:prstDash val="sysDot"/>
-            </a:ln>
-          </p:spPr>
-          <p:style>
-            <a:lnRef idx="1">
-              <a:schemeClr val="accent1"/>
-            </a:lnRef>
-            <a:fillRef idx="0">
-              <a:schemeClr val="accent1"/>
-            </a:fillRef>
-            <a:effectRef idx="0">
-              <a:schemeClr val="accent1"/>
-            </a:effectRef>
-            <a:fontRef idx="minor">
-              <a:schemeClr val="tx1"/>
-            </a:fontRef>
-          </p:style>
-        </p:cxnSp>
-        <p:cxnSp>
-          <p:nvCxnSpPr>
-            <p:cNvPr id="53" name="Straight Connector 52">
-              <a:extLst>
-                <a:ext uri="{FF2B5EF4-FFF2-40B4-BE49-F238E27FC236}">
-                  <a16:creationId xmlns:a16="http://schemas.microsoft.com/office/drawing/2014/main" id="{B6CF1BB4-1C1D-4EDE-BA26-0243FCF83BB9}"/>
-                </a:ext>
-                <a:ext uri="{C183D7F6-B498-43B3-948B-1728B52AA6E4}">
-                  <adec:decorative xmlns:adec="http://schemas.microsoft.com/office/drawing/2017/decorative" val="1"/>
-                </a:ext>
-              </a:extLst>
-            </p:cNvPr>
-            <p:cNvCxnSpPr>
-              <a:cxnSpLocks/>
-            </p:cNvCxnSpPr>
-            <p:nvPr>
-              <p:extLst>
-                <p:ext uri="{386F3935-93C4-4BCD-93E2-E3B085C9AB24}">
-                  <p16:designElem xmlns:p16="http://schemas.microsoft.com/office/powerpoint/2015/main" val="1"/>
-                </p:ext>
-              </p:extLst>
-            </p:nvPr>
-          </p:nvCxnSpPr>
-          <p:spPr>
-            <a:xfrm>
-              <a:off x="418528" y="-46937"/>
-              <a:ext cx="0" cy="2773841"/>
-            </a:xfrm>
-            <a:prstGeom prst="line">
-              <a:avLst/>
-            </a:prstGeom>
-            <a:ln w="25400" cmpd="sng">
-              <a:solidFill>
-                <a:schemeClr val="bg2">
-                  <a:lumMod val="60000"/>
-                  <a:lumOff val="40000"/>
-                  <a:alpha val="50000"/>
-                </a:schemeClr>
-              </a:solidFill>
-              <a:prstDash val="sysDot"/>
-            </a:ln>
-          </p:spPr>
-          <p:style>
-            <a:lnRef idx="1">
-              <a:schemeClr val="accent1"/>
-            </a:lnRef>
-            <a:fillRef idx="0">
-              <a:schemeClr val="accent1"/>
-            </a:fillRef>
-            <a:effectRef idx="0">
-              <a:schemeClr val="accent1"/>
-            </a:effectRef>
-            <a:fontRef idx="minor">
-              <a:schemeClr val="tx1"/>
-            </a:fontRef>
-          </p:style>
-        </p:cxnSp>
-        <p:cxnSp>
-          <p:nvCxnSpPr>
-            <p:cNvPr id="54" name="Straight Connector 53">
-              <a:extLst>
-                <a:ext uri="{FF2B5EF4-FFF2-40B4-BE49-F238E27FC236}">
-                  <a16:creationId xmlns:a16="http://schemas.microsoft.com/office/drawing/2014/main" id="{00C83729-E02F-4512-AFE7-F4792228BDA2}"/>
-                </a:ext>
-                <a:ext uri="{C183D7F6-B498-43B3-948B-1728B52AA6E4}">
-                  <adec:decorative xmlns:adec="http://schemas.microsoft.com/office/drawing/2017/decorative" val="1"/>
-                </a:ext>
-              </a:extLst>
-            </p:cNvPr>
-            <p:cNvCxnSpPr>
-              <a:cxnSpLocks/>
-            </p:cNvCxnSpPr>
-            <p:nvPr>
-              <p:extLst>
-                <p:ext uri="{386F3935-93C4-4BCD-93E2-E3B085C9AB24}">
-                  <p16:designElem xmlns:p16="http://schemas.microsoft.com/office/powerpoint/2015/main" val="1"/>
-                </p:ext>
-              </p:extLst>
-            </p:nvPr>
-          </p:nvCxnSpPr>
-          <p:spPr>
-            <a:xfrm>
-              <a:off x="520128" y="-46937"/>
-              <a:ext cx="0" cy="2773841"/>
-            </a:xfrm>
-            <a:prstGeom prst="line">
-              <a:avLst/>
-            </a:prstGeom>
-            <a:ln w="25400" cmpd="sng">
-              <a:solidFill>
-                <a:schemeClr val="bg2">
-                  <a:lumMod val="60000"/>
-                  <a:lumOff val="40000"/>
-                  <a:alpha val="50000"/>
-                </a:schemeClr>
-              </a:solidFill>
-              <a:prstDash val="sysDot"/>
-            </a:ln>
-          </p:spPr>
-          <p:style>
-            <a:lnRef idx="1">
-              <a:schemeClr val="accent1"/>
-            </a:lnRef>
-            <a:fillRef idx="0">
-              <a:schemeClr val="accent1"/>
-            </a:fillRef>
-            <a:effectRef idx="0">
-              <a:schemeClr val="accent1"/>
-            </a:effectRef>
-            <a:fontRef idx="minor">
-              <a:schemeClr val="tx1"/>
-            </a:fontRef>
-          </p:style>
-        </p:cxnSp>
-      </p:grpSp>
-      <p:sp>
-        <p:nvSpPr>
-          <p:cNvPr id="56" name="Rectangle 55">
-            <a:extLst>
-              <a:ext uri="{FF2B5EF4-FFF2-40B4-BE49-F238E27FC236}">
-                <a16:creationId xmlns:a16="http://schemas.microsoft.com/office/drawing/2014/main" id="{E2D3D3F2-ABBB-4453-B1C5-1BEBF7E4DD56}"/>
-              </a:ext>
-              <a:ext uri="{C183D7F6-B498-43B3-948B-1728B52AA6E4}">
-                <adec:decorative xmlns:adec="http://schemas.microsoft.com/office/drawing/2017/decorative" val="1"/>
-              </a:ext>
-            </a:extLst>
-          </p:cNvPr>
-          <p:cNvSpPr>
-            <a:spLocks noGrp="1" noRot="1" noChangeAspect="1" noMove="1" noResize="1" noEditPoints="1" noAdjustHandles="1" noChangeArrowheads="1" noChangeShapeType="1" noTextEdit="1"/>
-          </p:cNvSpPr>
-          <p:nvPr>
-            <p:extLst>
-              <p:ext uri="{386F3935-93C4-4BCD-93E2-E3B085C9AB24}">
-                <p16:designElem xmlns:p16="http://schemas.microsoft.com/office/powerpoint/2015/main" val="1"/>
-              </p:ext>
-            </p:extLst>
-          </p:nvPr>
-        </p:nvSpPr>
-        <p:spPr>
-          <a:xfrm rot="10800000">
-            <a:off x="0" y="6140785"/>
-            <a:ext cx="4571997" cy="711252"/>
+        </p:nvSpPr>
+        <p:spPr>
+          <a:xfrm rot="5400000" flipH="1">
+            <a:off x="2817950" y="5666847"/>
+            <a:ext cx="1463040" cy="34289"/>
           </a:xfrm>
           <a:prstGeom prst="rect">
             <a:avLst/>
           </a:prstGeom>
-          <a:gradFill flip="none" rotWithShape="1">
-            <a:gsLst>
-              <a:gs pos="10000">
-                <a:schemeClr val="tx2">
-                  <a:lumMod val="50000"/>
-                  <a:alpha val="10000"/>
-                </a:schemeClr>
-              </a:gs>
-              <a:gs pos="100000">
-                <a:schemeClr val="tx2">
-                  <a:lumMod val="60000"/>
-                  <a:lumOff val="40000"/>
-                  <a:alpha val="0"/>
-                </a:schemeClr>
-              </a:gs>
-            </a:gsLst>
-            <a:lin ang="8400000" scaled="0"/>
-            <a:tileRect/>
-          </a:gradFill>
+          <a:solidFill>
+            <a:schemeClr val="accent4"/>
+          </a:solidFill>
           <a:ln>
             <a:noFill/>
           </a:ln>
@@ -17776,373 +14503,32 @@
           </a:p>
         </p:txBody>
       </p:sp>
-      <p:grpSp>
-        <p:nvGrpSpPr>
-          <p:cNvPr id="58" name="Group 57">
-            <a:extLst>
-              <a:ext uri="{FF2B5EF4-FFF2-40B4-BE49-F238E27FC236}">
-                <a16:creationId xmlns:a16="http://schemas.microsoft.com/office/drawing/2014/main" id="{8214E4A5-A0D2-42C4-8D14-D2A7E495F041}"/>
-              </a:ext>
-              <a:ext uri="{C183D7F6-B498-43B3-948B-1728B52AA6E4}">
-                <adec:decorative xmlns:adec="http://schemas.microsoft.com/office/drawing/2017/decorative" val="1"/>
-              </a:ext>
-            </a:extLst>
-          </p:cNvPr>
-          <p:cNvGrpSpPr>
-            <a:grpSpLocks noGrp="1" noUngrp="1" noRot="1" noChangeAspect="1" noMove="1" noResize="1"/>
-          </p:cNvGrpSpPr>
-          <p:nvPr>
-            <p:extLst>
-              <p:ext uri="{386F3935-93C4-4BCD-93E2-E3B085C9AB24}">
-                <p16:designElem xmlns:p16="http://schemas.microsoft.com/office/powerpoint/2015/main" val="1"/>
-              </p:ext>
-            </p:extLst>
-          </p:nvPr>
-        </p:nvGrpSpPr>
-        <p:grpSpPr>
-          <a:xfrm rot="5400000">
-            <a:off x="-645785" y="5940560"/>
-            <a:ext cx="1285875" cy="549007"/>
-            <a:chOff x="7029447" y="3514725"/>
-            <a:chExt cx="1285875" cy="549007"/>
-          </a:xfrm>
-        </p:grpSpPr>
-        <p:cxnSp>
-          <p:nvCxnSpPr>
-            <p:cNvPr id="59" name="Straight Connector 58">
-              <a:extLst>
-                <a:ext uri="{FF2B5EF4-FFF2-40B4-BE49-F238E27FC236}">
-                  <a16:creationId xmlns:a16="http://schemas.microsoft.com/office/drawing/2014/main" id="{7494D7A0-6B21-41E8-A7D3-0033BBB79156}"/>
-                </a:ext>
-                <a:ext uri="{C183D7F6-B498-43B3-948B-1728B52AA6E4}">
-                  <adec:decorative xmlns:adec="http://schemas.microsoft.com/office/drawing/2017/decorative" val="1"/>
-                </a:ext>
-              </a:extLst>
-            </p:cNvPr>
-            <p:cNvCxnSpPr>
-              <a:cxnSpLocks/>
-            </p:cNvCxnSpPr>
-            <p:nvPr>
-              <p:extLst>
-                <p:ext uri="{386F3935-93C4-4BCD-93E2-E3B085C9AB24}">
-                  <p16:designElem xmlns:p16="http://schemas.microsoft.com/office/powerpoint/2015/main" val="1"/>
-                </p:ext>
-              </p:extLst>
-            </p:nvPr>
-          </p:nvCxnSpPr>
-          <p:spPr>
-            <a:xfrm>
-              <a:off x="7029447" y="3514725"/>
-              <a:ext cx="1285875" cy="0"/>
-            </a:xfrm>
-            <a:prstGeom prst="line">
-              <a:avLst/>
-            </a:prstGeom>
-            <a:ln w="31750" cap="rnd" cmpd="sng">
-              <a:gradFill>
-                <a:gsLst>
-                  <a:gs pos="0">
-                    <a:schemeClr val="tx2">
-                      <a:lumMod val="60000"/>
-                      <a:lumOff val="40000"/>
-                      <a:alpha val="40000"/>
-                    </a:schemeClr>
-                  </a:gs>
-                  <a:gs pos="100000">
-                    <a:schemeClr val="tx2">
-                      <a:lumMod val="50000"/>
-                      <a:alpha val="40000"/>
-                    </a:schemeClr>
-                  </a:gs>
-                </a:gsLst>
-                <a:lin ang="5400000" scaled="1"/>
-              </a:gradFill>
-              <a:prstDash val="sysDot"/>
-              <a:round/>
-            </a:ln>
-          </p:spPr>
-          <p:style>
-            <a:lnRef idx="1">
-              <a:schemeClr val="accent1"/>
-            </a:lnRef>
-            <a:fillRef idx="0">
-              <a:schemeClr val="accent1"/>
-            </a:fillRef>
-            <a:effectRef idx="0">
-              <a:schemeClr val="accent1"/>
-            </a:effectRef>
-            <a:fontRef idx="minor">
-              <a:schemeClr val="tx1"/>
-            </a:fontRef>
-          </p:style>
-        </p:cxnSp>
-        <p:cxnSp>
-          <p:nvCxnSpPr>
-            <p:cNvPr id="60" name="Straight Connector 59">
-              <a:extLst>
-                <a:ext uri="{FF2B5EF4-FFF2-40B4-BE49-F238E27FC236}">
-                  <a16:creationId xmlns:a16="http://schemas.microsoft.com/office/drawing/2014/main" id="{1E141D7D-32B0-448E-A666-EA8703AFCF2C}"/>
-                </a:ext>
-                <a:ext uri="{C183D7F6-B498-43B3-948B-1728B52AA6E4}">
-                  <adec:decorative xmlns:adec="http://schemas.microsoft.com/office/drawing/2017/decorative" val="1"/>
-                </a:ext>
-              </a:extLst>
-            </p:cNvPr>
-            <p:cNvCxnSpPr>
-              <a:cxnSpLocks/>
-            </p:cNvCxnSpPr>
-            <p:nvPr>
-              <p:extLst>
-                <p:ext uri="{386F3935-93C4-4BCD-93E2-E3B085C9AB24}">
-                  <p16:designElem xmlns:p16="http://schemas.microsoft.com/office/powerpoint/2015/main" val="1"/>
-                </p:ext>
-              </p:extLst>
-            </p:nvPr>
-          </p:nvCxnSpPr>
-          <p:spPr>
-            <a:xfrm>
-              <a:off x="7029447" y="3697727"/>
-              <a:ext cx="1285875" cy="0"/>
-            </a:xfrm>
-            <a:prstGeom prst="line">
-              <a:avLst/>
-            </a:prstGeom>
-            <a:ln w="31750" cap="rnd" cmpd="sng">
-              <a:gradFill>
-                <a:gsLst>
-                  <a:gs pos="0">
-                    <a:schemeClr val="tx2">
-                      <a:lumMod val="60000"/>
-                      <a:lumOff val="40000"/>
-                      <a:alpha val="40000"/>
-                    </a:schemeClr>
-                  </a:gs>
-                  <a:gs pos="100000">
-                    <a:schemeClr val="tx2">
-                      <a:lumMod val="50000"/>
-                      <a:alpha val="40000"/>
-                    </a:schemeClr>
-                  </a:gs>
-                </a:gsLst>
-                <a:lin ang="5400000" scaled="1"/>
-              </a:gradFill>
-              <a:prstDash val="sysDot"/>
-              <a:round/>
-            </a:ln>
-          </p:spPr>
-          <p:style>
-            <a:lnRef idx="1">
-              <a:schemeClr val="accent1"/>
-            </a:lnRef>
-            <a:fillRef idx="0">
-              <a:schemeClr val="accent1"/>
-            </a:fillRef>
-            <a:effectRef idx="0">
-              <a:schemeClr val="accent1"/>
-            </a:effectRef>
-            <a:fontRef idx="minor">
-              <a:schemeClr val="tx1"/>
-            </a:fontRef>
-          </p:style>
-        </p:cxnSp>
-        <p:cxnSp>
-          <p:nvCxnSpPr>
-            <p:cNvPr id="61" name="Straight Connector 60">
-              <a:extLst>
-                <a:ext uri="{FF2B5EF4-FFF2-40B4-BE49-F238E27FC236}">
-                  <a16:creationId xmlns:a16="http://schemas.microsoft.com/office/drawing/2014/main" id="{8D87E268-6345-420F-8B97-B37ED04100EC}"/>
-                </a:ext>
-                <a:ext uri="{C183D7F6-B498-43B3-948B-1728B52AA6E4}">
-                  <adec:decorative xmlns:adec="http://schemas.microsoft.com/office/drawing/2017/decorative" val="1"/>
-                </a:ext>
-              </a:extLst>
-            </p:cNvPr>
-            <p:cNvCxnSpPr>
-              <a:cxnSpLocks/>
-            </p:cNvCxnSpPr>
-            <p:nvPr>
-              <p:extLst>
-                <p:ext uri="{386F3935-93C4-4BCD-93E2-E3B085C9AB24}">
-                  <p16:designElem xmlns:p16="http://schemas.microsoft.com/office/powerpoint/2015/main" val="1"/>
-                </p:ext>
-              </p:extLst>
-            </p:nvPr>
-          </p:nvCxnSpPr>
-          <p:spPr>
-            <a:xfrm>
-              <a:off x="7029447" y="3880729"/>
-              <a:ext cx="1285875" cy="0"/>
-            </a:xfrm>
-            <a:prstGeom prst="line">
-              <a:avLst/>
-            </a:prstGeom>
-            <a:ln w="31750" cap="rnd" cmpd="sng">
-              <a:gradFill>
-                <a:gsLst>
-                  <a:gs pos="0">
-                    <a:schemeClr val="tx2">
-                      <a:lumMod val="60000"/>
-                      <a:lumOff val="40000"/>
-                      <a:alpha val="40000"/>
-                    </a:schemeClr>
-                  </a:gs>
-                  <a:gs pos="100000">
-                    <a:schemeClr val="tx2">
-                      <a:lumMod val="50000"/>
-                      <a:alpha val="40000"/>
-                    </a:schemeClr>
-                  </a:gs>
-                </a:gsLst>
-                <a:lin ang="5400000" scaled="1"/>
-              </a:gradFill>
-              <a:prstDash val="sysDot"/>
-              <a:round/>
-            </a:ln>
-          </p:spPr>
-          <p:style>
-            <a:lnRef idx="1">
-              <a:schemeClr val="accent1"/>
-            </a:lnRef>
-            <a:fillRef idx="0">
-              <a:schemeClr val="accent1"/>
-            </a:fillRef>
-            <a:effectRef idx="0">
-              <a:schemeClr val="accent1"/>
-            </a:effectRef>
-            <a:fontRef idx="minor">
-              <a:schemeClr val="tx1"/>
-            </a:fontRef>
-          </p:style>
-        </p:cxnSp>
-        <p:cxnSp>
-          <p:nvCxnSpPr>
-            <p:cNvPr id="62" name="Straight Connector 61">
-              <a:extLst>
-                <a:ext uri="{FF2B5EF4-FFF2-40B4-BE49-F238E27FC236}">
-                  <a16:creationId xmlns:a16="http://schemas.microsoft.com/office/drawing/2014/main" id="{35E1622E-7FA6-4760-A2BF-A8105EBF7BB9}"/>
-                </a:ext>
-                <a:ext uri="{C183D7F6-B498-43B3-948B-1728B52AA6E4}">
-                  <adec:decorative xmlns:adec="http://schemas.microsoft.com/office/drawing/2017/decorative" val="1"/>
-                </a:ext>
-              </a:extLst>
-            </p:cNvPr>
-            <p:cNvCxnSpPr>
-              <a:cxnSpLocks/>
-            </p:cNvCxnSpPr>
-            <p:nvPr>
-              <p:extLst>
-                <p:ext uri="{386F3935-93C4-4BCD-93E2-E3B085C9AB24}">
-                  <p16:designElem xmlns:p16="http://schemas.microsoft.com/office/powerpoint/2015/main" val="1"/>
-                </p:ext>
-              </p:extLst>
-            </p:nvPr>
-          </p:nvCxnSpPr>
-          <p:spPr>
-            <a:xfrm>
-              <a:off x="7029447" y="4063732"/>
-              <a:ext cx="1285875" cy="0"/>
-            </a:xfrm>
-            <a:prstGeom prst="line">
-              <a:avLst/>
-            </a:prstGeom>
-            <a:ln w="31750" cap="rnd" cmpd="sng">
-              <a:gradFill>
-                <a:gsLst>
-                  <a:gs pos="0">
-                    <a:schemeClr val="tx2">
-                      <a:lumMod val="60000"/>
-                      <a:lumOff val="40000"/>
-                      <a:alpha val="40000"/>
-                    </a:schemeClr>
-                  </a:gs>
-                  <a:gs pos="100000">
-                    <a:schemeClr val="tx2">
-                      <a:lumMod val="50000"/>
-                      <a:alpha val="40000"/>
-                    </a:schemeClr>
-                  </a:gs>
-                </a:gsLst>
-                <a:lin ang="5400000" scaled="1"/>
-              </a:gradFill>
-              <a:prstDash val="sysDot"/>
-              <a:round/>
-            </a:ln>
-          </p:spPr>
-          <p:style>
-            <a:lnRef idx="1">
-              <a:schemeClr val="accent1"/>
-            </a:lnRef>
-            <a:fillRef idx="0">
-              <a:schemeClr val="accent1"/>
-            </a:fillRef>
-            <a:effectRef idx="0">
-              <a:schemeClr val="accent1"/>
-            </a:effectRef>
-            <a:fontRef idx="minor">
-              <a:schemeClr val="tx1"/>
-            </a:fontRef>
-          </p:style>
-        </p:cxnSp>
-      </p:grpSp>
       <p:sp>
         <p:nvSpPr>
-          <p:cNvPr id="2" name="Title 1"/>
+          <p:cNvPr id="3" name="Content Placeholder 2"/>
           <p:cNvSpPr>
             <a:spLocks noGrp="1"/>
           </p:cNvSpPr>
           <p:nvPr>
-            <p:ph type="title"/>
-          </p:nvPr>
-        </p:nvSpPr>
-        <p:spPr>
-          <a:xfrm>
-            <a:off x="473202" y="4018137"/>
-            <a:ext cx="3426795" cy="2129586"/>
-          </a:xfrm>
-          <a:noFill/>
-        </p:spPr>
-        <p:txBody>
-          <a:bodyPr anchor="t">
-            <a:normAutofit/>
+            <p:ph idx="1"/>
+          </p:nvPr>
+        </p:nvSpPr>
+        <p:spPr>
+          <a:xfrm>
+            <a:off x="3803459" y="4905537"/>
+            <a:ext cx="5271961" cy="1556907"/>
+          </a:xfrm>
+        </p:spPr>
+        <p:txBody>
+          <a:bodyPr anchor="ctr">
+            <a:noAutofit/>
           </a:bodyPr>
           <a:lstStyle/>
           <a:p>
-            <a:pPr algn="l"/>
-            <a:r>
-              <a:rPr lang="en-US" sz="4200">
-                <a:solidFill>
-                  <a:schemeClr val="bg1"/>
-                </a:solidFill>
-              </a:rPr>
-              <a:t>Gameplay Flow</a:t>
-            </a:r>
-          </a:p>
-        </p:txBody>
-      </p:sp>
-      <p:sp>
-        <p:nvSpPr>
-          <p:cNvPr id="3" name="Content Placeholder 2"/>
-          <p:cNvSpPr>
-            <a:spLocks noGrp="1"/>
-          </p:cNvSpPr>
-          <p:nvPr>
-            <p:ph idx="1"/>
-          </p:nvPr>
-        </p:nvSpPr>
-        <p:spPr>
-          <a:xfrm>
-            <a:off x="4114560" y="4018143"/>
-            <a:ext cx="4255578" cy="2129599"/>
-          </a:xfrm>
-          <a:noFill/>
-        </p:spPr>
-        <p:txBody>
-          <a:bodyPr anchor="t">
-            <a:normAutofit lnSpcReduction="10000"/>
-          </a:bodyPr>
-          <a:lstStyle/>
-          <a:p>
             <a:pPr>
+              <a:lnSpc>
+                <a:spcPct val="90000"/>
+              </a:lnSpc>
               <a:defRPr sz="2000">
                 <a:solidFill>
                   <a:srgbClr val="FFFFFF"/>
@@ -18150,9 +14536,12 @@
               </a:defRPr>
             </a:pPr>
             <a:r>
-              <a:rPr lang="en-US" sz="1600" dirty="0">
+              <a:rPr lang="en-US" sz="1400" dirty="0">
                 <a:solidFill>
-                  <a:schemeClr val="bg1"/>
+                  <a:schemeClr val="tx1">
+                    <a:lumMod val="95000"/>
+                    <a:lumOff val="5000"/>
+                  </a:schemeClr>
                 </a:solidFill>
               </a:rPr>
               <a:t>In-game chalkboard layout</a:t>
@@ -18160,6 +14549,9 @@
           </a:p>
           <a:p>
             <a:pPr>
+              <a:lnSpc>
+                <a:spcPct val="90000"/>
+              </a:lnSpc>
               <a:defRPr sz="2000">
                 <a:solidFill>
                   <a:srgbClr val="FFFFFF"/>
@@ -18167,16 +14559,22 @@
               </a:defRPr>
             </a:pPr>
             <a:r>
-              <a:rPr lang="en-US" sz="1600" dirty="0">
+              <a:rPr lang="en-US" sz="1400" dirty="0">
                 <a:solidFill>
-                  <a:schemeClr val="bg1"/>
+                  <a:schemeClr val="tx1">
+                    <a:lumMod val="95000"/>
+                    <a:lumOff val="5000"/>
+                  </a:schemeClr>
                 </a:solidFill>
               </a:rPr>
-              <a:t>Left: “Teacher” board showing the target glyph sequence and progress indicator.</a:t>
-            </a:r>
-          </a:p>
-          <a:p>
-            <a:pPr>
+              <a:t>Left (Teacher Board)</a:t>
+            </a:r>
+          </a:p>
+          <a:p>
+            <a:pPr lvl="1">
+              <a:lnSpc>
+                <a:spcPct val="90000"/>
+              </a:lnSpc>
               <a:defRPr sz="2000">
                 <a:solidFill>
                   <a:srgbClr val="FFFFFF"/>
@@ -18184,16 +14582,22 @@
               </a:defRPr>
             </a:pPr>
             <a:r>
-              <a:rPr lang="en-US" sz="1600" dirty="0">
+              <a:rPr lang="en-US" sz="1400" dirty="0">
                 <a:solidFill>
-                  <a:schemeClr val="bg1"/>
+                  <a:schemeClr val="tx1">
+                    <a:lumMod val="95000"/>
+                    <a:lumOff val="5000"/>
+                  </a:schemeClr>
                 </a:solidFill>
               </a:rPr>
-              <a:t>Center: Control mapping board listing the current glyph–input assignments. </a:t>
+              <a:t>Showing the target glyph sequence and progress indicator.</a:t>
             </a:r>
           </a:p>
           <a:p>
             <a:pPr>
+              <a:lnSpc>
+                <a:spcPct val="90000"/>
+              </a:lnSpc>
               <a:defRPr sz="2000">
                 <a:solidFill>
                   <a:srgbClr val="FFFFFF"/>
@@ -18201,12 +14605,84 @@
               </a:defRPr>
             </a:pPr>
             <a:r>
-              <a:rPr lang="en-US" sz="1600" dirty="0">
+              <a:rPr lang="en-US" sz="1400" dirty="0">
                 <a:solidFill>
-                  <a:schemeClr val="bg1"/>
+                  <a:schemeClr val="tx1">
+                    <a:lumMod val="95000"/>
+                    <a:lumOff val="5000"/>
+                  </a:schemeClr>
                 </a:solidFill>
               </a:rPr>
-              <a:t>Right: “Student” board where the user’s inputs appear with immediate green/red feedback.</a:t>
+              <a:t>Center (Control Set Board)</a:t>
+            </a:r>
+          </a:p>
+          <a:p>
+            <a:pPr lvl="1">
+              <a:lnSpc>
+                <a:spcPct val="90000"/>
+              </a:lnSpc>
+              <a:defRPr sz="2000">
+                <a:solidFill>
+                  <a:srgbClr val="FFFFFF"/>
+                </a:solidFill>
+              </a:defRPr>
+            </a:pPr>
+            <a:r>
+              <a:rPr lang="en-US" sz="1400" dirty="0">
+                <a:solidFill>
+                  <a:schemeClr val="tx1">
+                    <a:lumMod val="95000"/>
+                    <a:lumOff val="5000"/>
+                  </a:schemeClr>
+                </a:solidFill>
+              </a:rPr>
+              <a:t>listing the current glyph–input assignments. </a:t>
+            </a:r>
+          </a:p>
+          <a:p>
+            <a:pPr>
+              <a:lnSpc>
+                <a:spcPct val="90000"/>
+              </a:lnSpc>
+              <a:defRPr sz="2000">
+                <a:solidFill>
+                  <a:srgbClr val="FFFFFF"/>
+                </a:solidFill>
+              </a:defRPr>
+            </a:pPr>
+            <a:r>
+              <a:rPr lang="en-US" sz="1400" dirty="0">
+                <a:solidFill>
+                  <a:schemeClr val="tx1">
+                    <a:lumMod val="95000"/>
+                    <a:lumOff val="5000"/>
+                  </a:schemeClr>
+                </a:solidFill>
+              </a:rPr>
+              <a:t>Right (Student Board) </a:t>
+            </a:r>
+          </a:p>
+          <a:p>
+            <a:pPr lvl="1">
+              <a:lnSpc>
+                <a:spcPct val="90000"/>
+              </a:lnSpc>
+              <a:defRPr sz="2000">
+                <a:solidFill>
+                  <a:srgbClr val="FFFFFF"/>
+                </a:solidFill>
+              </a:defRPr>
+            </a:pPr>
+            <a:r>
+              <a:rPr lang="en-US" sz="1400" dirty="0">
+                <a:solidFill>
+                  <a:schemeClr val="tx1">
+                    <a:lumMod val="95000"/>
+                    <a:lumOff val="5000"/>
+                  </a:schemeClr>
+                </a:solidFill>
+              </a:rPr>
+              <a:t>Where the user’s inputs appear with immediate green/red feedback.</a:t>
             </a:r>
           </a:p>
         </p:txBody>

--- a/Rosys_Wizards_465_Presentation.pptx
+++ b/Rosys_Wizards_465_Presentation.pptx
@@ -9783,7 +9783,7 @@
                   </a:schemeClr>
                 </a:solidFill>
               </a:rPr>
-              <a:t>Learn to form spells with three-input glyphs</a:t>
+              <a:t>Better Utilize Unity</a:t>
             </a:r>
           </a:p>
           <a:p>
@@ -9802,7 +9802,7 @@
                   </a:schemeClr>
                 </a:solidFill>
               </a:rPr>
-              <a:t>Understand Defense, Attack, Healing, Buff</a:t>
+              <a:t>How multimodal devices change interaction with the experience</a:t>
             </a:r>
           </a:p>
           <a:p>
@@ -9821,7 +9821,7 @@
                   </a:schemeClr>
                 </a:solidFill>
               </a:rPr>
-              <a:t>Practice accuracy and speed</a:t>
+              <a:t>Coding and Project skills</a:t>
             </a:r>
           </a:p>
           <a:p>
@@ -9832,16 +9832,13 @@
                 </a:solidFill>
               </a:defRPr>
             </a:pPr>
-            <a:r>
-              <a:rPr lang="en-US" sz="1700" dirty="0">
-                <a:solidFill>
-                  <a:schemeClr val="tx1">
-                    <a:alpha val="80000"/>
-                  </a:schemeClr>
-                </a:solidFill>
-              </a:rPr>
-              <a:t>Complete class lesson with 8–16 spells</a:t>
-            </a:r>
+            <a:endParaRPr lang="en-US" sz="1700" dirty="0">
+              <a:solidFill>
+                <a:schemeClr val="tx1">
+                  <a:alpha val="80000"/>
+                </a:schemeClr>
+              </a:solidFill>
+            </a:endParaRPr>
           </a:p>
         </p:txBody>
       </p:sp>
